--- a/downloads/presentations/modules/lesson-16-electronic-case-reporting-technical-workflow.pptx
+++ b/downloads/presentations/modules/lesson-16-electronic-case-reporting-technical-workflow.pptx
@@ -3086,6 +3086,45 @@
           </a:p>
         </p:txBody>
       </p:sp>
+      <p:sp>
+        <p:nvSpPr>
+          <p:cNvPr id="8" name="Text 5"/>
+          <p:cNvSpPr/>
+          <p:nvPr/>
+        </p:nvSpPr>
+        <p:spPr>
+          <a:xfrm>
+            <a:off x="11137392" y="6510528"/>
+            <a:ext cx="411480" cy="201168"/>
+          </a:xfrm>
+          <a:prstGeom prst="rect">
+            <a:avLst/>
+          </a:prstGeom>
+          <a:noFill/>
+          <a:ln/>
+        </p:spPr>
+        <p:txBody>
+          <a:bodyPr wrap="square" lIns="0" tIns="0" rIns="0" bIns="0" rtlCol="0" anchor="ctr"/>
+          <a:lstStyle/>
+          <a:p>
+            <a:pPr algn="r" indent="0" marL="0">
+              <a:buNone/>
+            </a:pPr>
+            <a:r>
+              <a:rPr lang="en-US" sz="900" dirty="0">
+                <a:solidFill>
+                  <a:srgbClr val="5F7181"/>
+                </a:solidFill>
+                <a:latin typeface="Aptos" pitchFamily="34" charset="0"/>
+                <a:ea typeface="Aptos" pitchFamily="34" charset="-122"/>
+                <a:cs typeface="Aptos" pitchFamily="34" charset="-120"/>
+              </a:rPr>
+              <a:t>1</a:t>
+            </a:r>
+            <a:endParaRPr lang="en-US" sz="900" dirty="0"/>
+          </a:p>
+        </p:txBody>
+      </p:sp>
     </p:spTree>
   </p:cSld>
   <p:clrMapOvr>
@@ -3279,7 +3318,7 @@
                 <a:ea typeface="Aptos" pitchFamily="34" charset="-122"/>
                 <a:cs typeface="Aptos" pitchFamily="34" charset="-120"/>
               </a:rPr>
-              <a:t>© Paula Soper</a:t>
+              <a:t>Â© Paula Soper</a:t>
             </a:r>
             <a:endParaRPr lang="en-US" sz="800" dirty="0"/>
           </a:p>
@@ -3293,8 +3332,47 @@
         </p:nvSpPr>
         <p:spPr>
           <a:xfrm>
+            <a:off x="11137392" y="6510528"/>
+            <a:ext cx="411480" cy="201168"/>
+          </a:xfrm>
+          <a:prstGeom prst="rect">
+            <a:avLst/>
+          </a:prstGeom>
+          <a:noFill/>
+          <a:ln/>
+        </p:spPr>
+        <p:txBody>
+          <a:bodyPr wrap="square" lIns="0" tIns="0" rIns="0" bIns="0" rtlCol="0" anchor="ctr"/>
+          <a:lstStyle/>
+          <a:p>
+            <a:pPr algn="r" indent="0" marL="0">
+              <a:buNone/>
+            </a:pPr>
+            <a:r>
+              <a:rPr lang="en-US" sz="900" dirty="0">
+                <a:solidFill>
+                  <a:srgbClr val="5F7181"/>
+                </a:solidFill>
+                <a:latin typeface="Aptos" pitchFamily="34" charset="0"/>
+                <a:ea typeface="Aptos" pitchFamily="34" charset="-122"/>
+                <a:cs typeface="Aptos" pitchFamily="34" charset="-120"/>
+              </a:rPr>
+              <a:t>10</a:t>
+            </a:r>
+            <a:endParaRPr lang="en-US" sz="900" dirty="0"/>
+          </a:p>
+        </p:txBody>
+      </p:sp>
+      <p:sp>
+        <p:nvSpPr>
+          <p:cNvPr id="8" name="Text 6"/>
+          <p:cNvSpPr/>
+          <p:nvPr/>
+        </p:nvSpPr>
+        <p:spPr>
+          <a:xfrm>
             <a:off x="640080" y="658368"/>
-            <a:ext cx="10881360" cy="566928"/>
+            <a:ext cx="10881360" cy="713232"/>
           </a:xfrm>
           <a:prstGeom prst="rect">
             <a:avLst/>
@@ -3312,7 +3390,7 @@
               <a:buNone/>
             </a:pPr>
             <a:r>
-              <a:rPr lang="en-US" sz="2700" b="1" dirty="0">
+              <a:rPr lang="en-US" sz="3400" b="1" dirty="0">
                 <a:solidFill>
                   <a:srgbClr val="003A63"/>
                 </a:solidFill>
@@ -3322,20 +3400,20 @@
               </a:rPr>
               <a:t>Core Concepts Continued</a:t>
             </a:r>
-            <a:endParaRPr lang="en-US" sz="2700" dirty="0"/>
-          </a:p>
-        </p:txBody>
-      </p:sp>
-      <p:sp>
-        <p:nvSpPr>
-          <p:cNvPr id="8" name="Text 6"/>
-          <p:cNvSpPr/>
-          <p:nvPr/>
-        </p:nvSpPr>
-        <p:spPr>
-          <a:xfrm>
-            <a:off x="868680" y="1417320"/>
-            <a:ext cx="6675120" cy="4434840"/>
+            <a:endParaRPr lang="en-US" sz="3400" dirty="0"/>
+          </a:p>
+        </p:txBody>
+      </p:sp>
+      <p:sp>
+        <p:nvSpPr>
+          <p:cNvPr id="9" name="Text 7"/>
+          <p:cNvSpPr/>
+          <p:nvPr/>
+        </p:nvSpPr>
+        <p:spPr>
+          <a:xfrm>
+            <a:off x="868680" y="1508760"/>
+            <a:ext cx="6537960" cy="4160520"/>
           </a:xfrm>
           <a:prstGeom prst="rect">
             <a:avLst/>
@@ -3350,7 +3428,7 @@
           <a:lstStyle/>
           <a:p>
             <a:r>
-              <a:rPr lang="en-US" sz="1700" dirty="0">
+              <a:rPr lang="en-US" sz="2100" dirty="0">
                 <a:solidFill>
                   <a:srgbClr val="17364A"/>
                 </a:solidFill>
@@ -3360,11 +3438,11 @@
               </a:rPr>
               <a:t>eRSD and RCTC.</a:t>
             </a:r>
-            <a:endParaRPr lang="en-US" sz="1700" dirty="0"/>
-          </a:p>
-          <a:p>
-            <a:r>
-              <a:rPr lang="en-US" sz="1700" dirty="0">
+            <a:endParaRPr lang="en-US" sz="2100" dirty="0"/>
+          </a:p>
+          <a:p>
+            <a:r>
+              <a:rPr lang="en-US" sz="2100" dirty="0">
                 <a:solidFill>
                   <a:srgbClr val="17364A"/>
                 </a:solidFill>
@@ -3372,13 +3450,13 @@
                 <a:ea typeface="Aptos" pitchFamily="34" charset="-122"/>
                 <a:cs typeface="Aptos" pitchFamily="34" charset="-120"/>
               </a:rPr>
-              <a:t>Electronic Reporting and Surveillance Distribution supports the distribution of reporting criteria and trigger code value.</a:t>
-            </a:r>
-            <a:endParaRPr lang="en-US" sz="1700" dirty="0"/>
-          </a:p>
-          <a:p>
-            <a:r>
-              <a:rPr lang="en-US" sz="1700" dirty="0">
+              <a:t>Electronic Reporting and Surveillance Distribution supports the distribution of reporting criteria and.</a:t>
+            </a:r>
+            <a:endParaRPr lang="en-US" sz="2100" dirty="0"/>
+          </a:p>
+          <a:p>
+            <a:r>
+              <a:rPr lang="en-US" sz="2100" dirty="0">
                 <a:solidFill>
                   <a:srgbClr val="17364A"/>
                 </a:solidFill>
@@ -3388,27 +3466,13 @@
               </a:rPr>
               <a:t>Reportable Conditions Trigger Codes help EHRs determine when an eICR should be generated.</a:t>
             </a:r>
-            <a:endParaRPr lang="en-US" sz="1700" dirty="0"/>
-          </a:p>
-          <a:p>
-            <a:r>
-              <a:rPr lang="en-US" sz="1700" dirty="0">
-                <a:solidFill>
-                  <a:srgbClr val="17364A"/>
-                </a:solidFill>
-                <a:latin typeface="Aptos" pitchFamily="34" charset="0"/>
-                <a:ea typeface="Aptos" pitchFamily="34" charset="-122"/>
-                <a:cs typeface="Aptos" pitchFamily="34" charset="-120"/>
-              </a:rPr>
-              <a:t>These components are essential to reliable and current triggering.</a:t>
-            </a:r>
-            <a:endParaRPr lang="en-US" sz="1700" dirty="0"/>
-          </a:p>
-        </p:txBody>
-      </p:sp>
-      <p:sp>
-        <p:nvSpPr>
-          <p:cNvPr id="9" name="Shape 7"/>
+            <a:endParaRPr lang="en-US" sz="2100" dirty="0"/>
+          </a:p>
+        </p:txBody>
+      </p:sp>
+      <p:sp>
+        <p:nvSpPr>
+          <p:cNvPr id="10" name="Shape 8"/>
           <p:cNvSpPr/>
           <p:nvPr/>
         </p:nvSpPr>
@@ -3435,14 +3499,14 @@
       </p:sp>
       <p:sp>
         <p:nvSpPr>
-          <p:cNvPr id="10" name="Text 8"/>
+          <p:cNvPr id="11" name="Text 9"/>
           <p:cNvSpPr/>
           <p:nvPr/>
         </p:nvSpPr>
         <p:spPr>
           <a:xfrm>
             <a:off x="8074152" y="1563624"/>
-            <a:ext cx="2825496" cy="201168"/>
+            <a:ext cx="2825496" cy="256032"/>
           </a:xfrm>
           <a:prstGeom prst="rect">
             <a:avLst/>
@@ -3458,7 +3522,7 @@
               <a:buNone/>
             </a:pPr>
             <a:r>
-              <a:rPr lang="en-US" sz="950" b="1" dirty="0">
+              <a:rPr lang="en-US" sz="1300" b="1" dirty="0">
                 <a:solidFill>
                   <a:srgbClr val="0068B7"/>
                 </a:solidFill>
@@ -3468,20 +3532,20 @@
               </a:rPr>
               <a:t>Key idea</a:t>
             </a:r>
-            <a:endParaRPr lang="en-US" sz="950" dirty="0"/>
-          </a:p>
-        </p:txBody>
-      </p:sp>
-      <p:sp>
-        <p:nvSpPr>
-          <p:cNvPr id="11" name="Text 9"/>
-          <p:cNvSpPr/>
-          <p:nvPr/>
-        </p:nvSpPr>
-        <p:spPr>
-          <a:xfrm>
-            <a:off x="8074152" y="1856232"/>
-            <a:ext cx="2825496" cy="1261872"/>
+            <a:endParaRPr lang="en-US" sz="1300" dirty="0"/>
+          </a:p>
+        </p:txBody>
+      </p:sp>
+      <p:sp>
+        <p:nvSpPr>
+          <p:cNvPr id="12" name="Text 10"/>
+          <p:cNvSpPr/>
+          <p:nvPr/>
+        </p:nvSpPr>
+        <p:spPr>
+          <a:xfrm>
+            <a:off x="8074152" y="1920240"/>
+            <a:ext cx="2825496" cy="1188720"/>
           </a:xfrm>
           <a:prstGeom prst="rect">
             <a:avLst/>
@@ -3499,7 +3563,7 @@
               <a:buNone/>
             </a:pPr>
             <a:r>
-              <a:rPr lang="en-US" sz="1250" dirty="0">
+              <a:rPr lang="en-US" sz="1550" dirty="0">
                 <a:solidFill>
                   <a:srgbClr val="17364A"/>
                 </a:solidFill>
@@ -3509,13 +3573,13 @@
               </a:rPr>
               <a:t>eRSD and RCTC.</a:t>
             </a:r>
-            <a:endParaRPr lang="en-US" sz="1250" dirty="0"/>
-          </a:p>
-        </p:txBody>
-      </p:sp>
-      <p:sp>
-        <p:nvSpPr>
-          <p:cNvPr id="12" name="Shape 10"/>
+            <a:endParaRPr lang="en-US" sz="1550" dirty="0"/>
+          </a:p>
+        </p:txBody>
+      </p:sp>
+      <p:sp>
+        <p:nvSpPr>
+          <p:cNvPr id="13" name="Shape 11"/>
           <p:cNvSpPr/>
           <p:nvPr/>
         </p:nvSpPr>
@@ -3542,14 +3606,14 @@
       </p:sp>
       <p:sp>
         <p:nvSpPr>
-          <p:cNvPr id="13" name="Text 11"/>
+          <p:cNvPr id="14" name="Text 12"/>
           <p:cNvSpPr/>
           <p:nvPr/>
         </p:nvSpPr>
         <p:spPr>
           <a:xfrm>
             <a:off x="8074152" y="3666744"/>
-            <a:ext cx="2825496" cy="201168"/>
+            <a:ext cx="2825496" cy="256032"/>
           </a:xfrm>
           <a:prstGeom prst="rect">
             <a:avLst/>
@@ -3565,7 +3629,7 @@
               <a:buNone/>
             </a:pPr>
             <a:r>
-              <a:rPr lang="en-US" sz="950" b="1" dirty="0">
+              <a:rPr lang="en-US" sz="1300" b="1" dirty="0">
                 <a:solidFill>
                   <a:srgbClr val="0068B7"/>
                 </a:solidFill>
@@ -3575,20 +3639,20 @@
               </a:rPr>
               <a:t>Use this for</a:t>
             </a:r>
-            <a:endParaRPr lang="en-US" sz="950" dirty="0"/>
-          </a:p>
-        </p:txBody>
-      </p:sp>
-      <p:sp>
-        <p:nvSpPr>
-          <p:cNvPr id="14" name="Text 12"/>
-          <p:cNvSpPr/>
-          <p:nvPr/>
-        </p:nvSpPr>
-        <p:spPr>
-          <a:xfrm>
-            <a:off x="8074152" y="3959352"/>
-            <a:ext cx="2825496" cy="1170432"/>
+            <a:endParaRPr lang="en-US" sz="1300" dirty="0"/>
+          </a:p>
+        </p:txBody>
+      </p:sp>
+      <p:sp>
+        <p:nvSpPr>
+          <p:cNvPr id="15" name="Text 13"/>
+          <p:cNvSpPr/>
+          <p:nvPr/>
+        </p:nvSpPr>
+        <p:spPr>
+          <a:xfrm>
+            <a:off x="8074152" y="4023360"/>
+            <a:ext cx="2825496" cy="1097280"/>
           </a:xfrm>
           <a:prstGeom prst="rect">
             <a:avLst/>
@@ -3606,7 +3670,7 @@
               <a:buNone/>
             </a:pPr>
             <a:r>
-              <a:rPr lang="en-US" sz="1250" dirty="0">
+              <a:rPr lang="en-US" sz="1550" dirty="0">
                 <a:solidFill>
                   <a:srgbClr val="17364A"/>
                 </a:solidFill>
@@ -3616,7 +3680,7 @@
               </a:rPr>
               <a:t>Connect the concept to public health decisions, safeguards, documentation, or implementation work.</a:t>
             </a:r>
-            <a:endParaRPr lang="en-US" sz="1250" dirty="0"/>
+            <a:endParaRPr lang="en-US" sz="1550" dirty="0"/>
           </a:p>
         </p:txBody>
       </p:sp>
@@ -3813,7 +3877,7 @@
                 <a:ea typeface="Aptos" pitchFamily="34" charset="-122"/>
                 <a:cs typeface="Aptos" pitchFamily="34" charset="-120"/>
               </a:rPr>
-              <a:t>© Paula Soper</a:t>
+              <a:t>Â© Paula Soper</a:t>
             </a:r>
             <a:endParaRPr lang="en-US" sz="800" dirty="0"/>
           </a:p>
@@ -3821,7 +3885,46 @@
       </p:sp>
       <p:sp>
         <p:nvSpPr>
-          <p:cNvPr id="7" name="Shape 5"/>
+          <p:cNvPr id="7" name="Text 5"/>
+          <p:cNvSpPr/>
+          <p:nvPr/>
+        </p:nvSpPr>
+        <p:spPr>
+          <a:xfrm>
+            <a:off x="11137392" y="6510528"/>
+            <a:ext cx="411480" cy="201168"/>
+          </a:xfrm>
+          <a:prstGeom prst="rect">
+            <a:avLst/>
+          </a:prstGeom>
+          <a:noFill/>
+          <a:ln/>
+        </p:spPr>
+        <p:txBody>
+          <a:bodyPr wrap="square" lIns="0" tIns="0" rIns="0" bIns="0" rtlCol="0" anchor="ctr"/>
+          <a:lstStyle/>
+          <a:p>
+            <a:pPr algn="r" indent="0" marL="0">
+              <a:buNone/>
+            </a:pPr>
+            <a:r>
+              <a:rPr lang="en-US" sz="900" dirty="0">
+                <a:solidFill>
+                  <a:srgbClr val="5F7181"/>
+                </a:solidFill>
+                <a:latin typeface="Aptos" pitchFamily="34" charset="0"/>
+                <a:ea typeface="Aptos" pitchFamily="34" charset="-122"/>
+                <a:cs typeface="Aptos" pitchFamily="34" charset="-120"/>
+              </a:rPr>
+              <a:t>11</a:t>
+            </a:r>
+            <a:endParaRPr lang="en-US" sz="900" dirty="0"/>
+          </a:p>
+        </p:txBody>
+      </p:sp>
+      <p:sp>
+        <p:nvSpPr>
+          <p:cNvPr id="8" name="Shape 6"/>
           <p:cNvSpPr/>
           <p:nvPr/>
         </p:nvSpPr>
@@ -3846,7 +3949,7 @@
       </p:sp>
       <p:sp>
         <p:nvSpPr>
-          <p:cNvPr id="8" name="Text 6"/>
+          <p:cNvPr id="9" name="Text 7"/>
           <p:cNvSpPr/>
           <p:nvPr/>
         </p:nvSpPr>
@@ -3885,14 +3988,14 @@
       </p:sp>
       <p:sp>
         <p:nvSpPr>
-          <p:cNvPr id="9" name="Text 7"/>
+          <p:cNvPr id="10" name="Text 8"/>
           <p:cNvSpPr/>
           <p:nvPr/>
         </p:nvSpPr>
         <p:spPr>
           <a:xfrm>
             <a:off x="640080" y="621792"/>
-            <a:ext cx="10881360" cy="566928"/>
+            <a:ext cx="10881360" cy="713232"/>
           </a:xfrm>
           <a:prstGeom prst="rect">
             <a:avLst/>
@@ -3910,7 +4013,7 @@
               <a:buNone/>
             </a:pPr>
             <a:r>
-              <a:rPr lang="en-US" sz="2700" b="1" dirty="0">
+              <a:rPr lang="en-US" sz="3400" b="1" dirty="0">
                 <a:solidFill>
                   <a:srgbClr val="003A63"/>
                 </a:solidFill>
@@ -3920,20 +4023,20 @@
               </a:rPr>
               <a:t>Public Health Example</a:t>
             </a:r>
-            <a:endParaRPr lang="en-US" sz="2700" dirty="0"/>
-          </a:p>
-        </p:txBody>
-      </p:sp>
-      <p:sp>
-        <p:nvSpPr>
-          <p:cNvPr id="10" name="Text 8"/>
-          <p:cNvSpPr/>
-          <p:nvPr/>
-        </p:nvSpPr>
-        <p:spPr>
-          <a:xfrm>
-            <a:off x="868680" y="1417320"/>
-            <a:ext cx="6675120" cy="4434840"/>
+            <a:endParaRPr lang="en-US" sz="3400" dirty="0"/>
+          </a:p>
+        </p:txBody>
+      </p:sp>
+      <p:sp>
+        <p:nvSpPr>
+          <p:cNvPr id="11" name="Text 9"/>
+          <p:cNvSpPr/>
+          <p:nvPr/>
+        </p:nvSpPr>
+        <p:spPr>
+          <a:xfrm>
+            <a:off x="868680" y="1508760"/>
+            <a:ext cx="6537960" cy="4160520"/>
           </a:xfrm>
           <a:prstGeom prst="rect">
             <a:avLst/>
@@ -3948,7 +4051,7 @@
           <a:lstStyle/>
           <a:p>
             <a:r>
-              <a:rPr lang="en-US" sz="1700" dirty="0">
+              <a:rPr lang="en-US" sz="2100" dirty="0">
                 <a:solidFill>
                   <a:srgbClr val="17364A"/>
                 </a:solidFill>
@@ -3956,13 +4059,13 @@
                 <a:ea typeface="Aptos" pitchFamily="34" charset="-122"/>
                 <a:cs typeface="Aptos" pitchFamily="34" charset="-120"/>
               </a:rPr>
-              <a:t>A jurisdiction may receive eICRs for a reportable condition and want AI to create an investigator-facing summary.</a:t>
-            </a:r>
-            <a:endParaRPr lang="en-US" sz="1700" dirty="0"/>
-          </a:p>
-          <a:p>
-            <a:r>
-              <a:rPr lang="en-US" sz="1700" dirty="0">
+              <a:t>A jurisdiction may receive eICRs for a reportable condition and want AI to create an.</a:t>
+            </a:r>
+            <a:endParaRPr lang="en-US" sz="2100" dirty="0"/>
+          </a:p>
+          <a:p>
+            <a:r>
+              <a:rPr lang="en-US" sz="2100" dirty="0">
                 <a:solidFill>
                   <a:srgbClr val="17364A"/>
                 </a:solidFill>
@@ -3970,13 +4073,13 @@
                 <a:ea typeface="Aptos" pitchFamily="34" charset="-122"/>
                 <a:cs typeface="Aptos" pitchFamily="34" charset="-120"/>
               </a:rPr>
-              <a:t>The tool could highlight the suspected condition, key dates, lab evidence, symptoms, provider details, pregnancy status,.</a:t>
-            </a:r>
-            <a:endParaRPr lang="en-US" sz="1700" dirty="0"/>
-          </a:p>
-          <a:p>
-            <a:r>
-              <a:rPr lang="en-US" sz="1700" dirty="0">
+              <a:t>The tool could highlight the suspected condition, key dates, lab evidence, symptoms, provider details,.</a:t>
+            </a:r>
+            <a:endParaRPr lang="en-US" sz="2100" dirty="0"/>
+          </a:p>
+          <a:p>
+            <a:r>
+              <a:rPr lang="en-US" sz="2100" dirty="0">
                 <a:solidFill>
                   <a:srgbClr val="17364A"/>
                 </a:solidFill>
@@ -3986,27 +4089,13 @@
               </a:rPr>
               <a:t>This could reduce staff burden, but only if users can inspect the source data and correct errors.</a:t>
             </a:r>
-            <a:endParaRPr lang="en-US" sz="1700" dirty="0"/>
-          </a:p>
-          <a:p>
-            <a:r>
-              <a:rPr lang="en-US" sz="1700" dirty="0">
-                <a:solidFill>
-                  <a:srgbClr val="17364A"/>
-                </a:solidFill>
-                <a:latin typeface="Aptos" pitchFamily="34" charset="0"/>
-                <a:ea typeface="Aptos" pitchFamily="34" charset="-122"/>
-                <a:cs typeface="Aptos" pitchFamily="34" charset="-120"/>
-              </a:rPr>
-              <a:t>Another jurisdiction may want to use AI to triage incoming eICRs by urgency.</a:t>
-            </a:r>
-            <a:endParaRPr lang="en-US" sz="1700" dirty="0"/>
-          </a:p>
-        </p:txBody>
-      </p:sp>
-      <p:sp>
-        <p:nvSpPr>
-          <p:cNvPr id="11" name="Shape 9"/>
+            <a:endParaRPr lang="en-US" sz="2100" dirty="0"/>
+          </a:p>
+        </p:txBody>
+      </p:sp>
+      <p:sp>
+        <p:nvSpPr>
+          <p:cNvPr id="12" name="Shape 10"/>
           <p:cNvSpPr/>
           <p:nvPr/>
         </p:nvSpPr>
@@ -4033,14 +4122,14 @@
       </p:sp>
       <p:sp>
         <p:nvSpPr>
-          <p:cNvPr id="12" name="Text 10"/>
+          <p:cNvPr id="13" name="Text 11"/>
           <p:cNvSpPr/>
           <p:nvPr/>
         </p:nvSpPr>
         <p:spPr>
           <a:xfrm>
             <a:off x="8074152" y="1563624"/>
-            <a:ext cx="2825496" cy="201168"/>
+            <a:ext cx="2825496" cy="256032"/>
           </a:xfrm>
           <a:prstGeom prst="rect">
             <a:avLst/>
@@ -4056,7 +4145,7 @@
               <a:buNone/>
             </a:pPr>
             <a:r>
-              <a:rPr lang="en-US" sz="950" b="1" dirty="0">
+              <a:rPr lang="en-US" sz="1300" b="1" dirty="0">
                 <a:solidFill>
                   <a:srgbClr val="0068B7"/>
                 </a:solidFill>
@@ -4066,20 +4155,20 @@
               </a:rPr>
               <a:t>Key idea</a:t>
             </a:r>
-            <a:endParaRPr lang="en-US" sz="950" dirty="0"/>
-          </a:p>
-        </p:txBody>
-      </p:sp>
-      <p:sp>
-        <p:nvSpPr>
-          <p:cNvPr id="13" name="Text 11"/>
-          <p:cNvSpPr/>
-          <p:nvPr/>
-        </p:nvSpPr>
-        <p:spPr>
-          <a:xfrm>
-            <a:off x="8074152" y="1856232"/>
-            <a:ext cx="2825496" cy="1261872"/>
+            <a:endParaRPr lang="en-US" sz="1300" dirty="0"/>
+          </a:p>
+        </p:txBody>
+      </p:sp>
+      <p:sp>
+        <p:nvSpPr>
+          <p:cNvPr id="14" name="Text 12"/>
+          <p:cNvSpPr/>
+          <p:nvPr/>
+        </p:nvSpPr>
+        <p:spPr>
+          <a:xfrm>
+            <a:off x="8074152" y="1920240"/>
+            <a:ext cx="2825496" cy="1188720"/>
           </a:xfrm>
           <a:prstGeom prst="rect">
             <a:avLst/>
@@ -4097,7 +4186,7 @@
               <a:buNone/>
             </a:pPr>
             <a:r>
-              <a:rPr lang="en-US" sz="1250" dirty="0">
+              <a:rPr lang="en-US" sz="1550" dirty="0">
                 <a:solidFill>
                   <a:srgbClr val="17364A"/>
                 </a:solidFill>
@@ -4105,15 +4194,15 @@
                 <a:ea typeface="Aptos" pitchFamily="34" charset="-122"/>
                 <a:cs typeface="Aptos" pitchFamily="34" charset="-120"/>
               </a:rPr>
-              <a:t>A jurisdiction may receive eICRs for a reportable condition and want AI to create an investigator-facing summary.</a:t>
-            </a:r>
-            <a:endParaRPr lang="en-US" sz="1250" dirty="0"/>
-          </a:p>
-        </p:txBody>
-      </p:sp>
-      <p:sp>
-        <p:nvSpPr>
-          <p:cNvPr id="14" name="Shape 12"/>
+              <a:t>A jurisdiction may receive eICRs for a reportable condition and want AI to create an.</a:t>
+            </a:r>
+            <a:endParaRPr lang="en-US" sz="1550" dirty="0"/>
+          </a:p>
+        </p:txBody>
+      </p:sp>
+      <p:sp>
+        <p:nvSpPr>
+          <p:cNvPr id="15" name="Shape 13"/>
           <p:cNvSpPr/>
           <p:nvPr/>
         </p:nvSpPr>
@@ -4140,14 +4229,14 @@
       </p:sp>
       <p:sp>
         <p:nvSpPr>
-          <p:cNvPr id="15" name="Text 13"/>
+          <p:cNvPr id="16" name="Text 14"/>
           <p:cNvSpPr/>
           <p:nvPr/>
         </p:nvSpPr>
         <p:spPr>
           <a:xfrm>
             <a:off x="8074152" y="3666744"/>
-            <a:ext cx="2825496" cy="201168"/>
+            <a:ext cx="2825496" cy="256032"/>
           </a:xfrm>
           <a:prstGeom prst="rect">
             <a:avLst/>
@@ -4163,7 +4252,7 @@
               <a:buNone/>
             </a:pPr>
             <a:r>
-              <a:rPr lang="en-US" sz="950" b="1" dirty="0">
+              <a:rPr lang="en-US" sz="1300" b="1" dirty="0">
                 <a:solidFill>
                   <a:srgbClr val="0068B7"/>
                 </a:solidFill>
@@ -4173,20 +4262,20 @@
               </a:rPr>
               <a:t>Use this for</a:t>
             </a:r>
-            <a:endParaRPr lang="en-US" sz="950" dirty="0"/>
-          </a:p>
-        </p:txBody>
-      </p:sp>
-      <p:sp>
-        <p:nvSpPr>
-          <p:cNvPr id="16" name="Text 14"/>
-          <p:cNvSpPr/>
-          <p:nvPr/>
-        </p:nvSpPr>
-        <p:spPr>
-          <a:xfrm>
-            <a:off x="8074152" y="3959352"/>
-            <a:ext cx="2825496" cy="1170432"/>
+            <a:endParaRPr lang="en-US" sz="1300" dirty="0"/>
+          </a:p>
+        </p:txBody>
+      </p:sp>
+      <p:sp>
+        <p:nvSpPr>
+          <p:cNvPr id="17" name="Text 15"/>
+          <p:cNvSpPr/>
+          <p:nvPr/>
+        </p:nvSpPr>
+        <p:spPr>
+          <a:xfrm>
+            <a:off x="8074152" y="4023360"/>
+            <a:ext cx="2825496" cy="1097280"/>
           </a:xfrm>
           <a:prstGeom prst="rect">
             <a:avLst/>
@@ -4204,7 +4293,7 @@
               <a:buNone/>
             </a:pPr>
             <a:r>
-              <a:rPr lang="en-US" sz="1250" dirty="0">
+              <a:rPr lang="en-US" sz="1550" dirty="0">
                 <a:solidFill>
                   <a:srgbClr val="17364A"/>
                 </a:solidFill>
@@ -4214,7 +4303,7 @@
               </a:rPr>
               <a:t>Connect the concept to public health decisions, safeguards, documentation, or implementation work.</a:t>
             </a:r>
-            <a:endParaRPr lang="en-US" sz="1250" dirty="0"/>
+            <a:endParaRPr lang="en-US" sz="1550" dirty="0"/>
           </a:p>
         </p:txBody>
       </p:sp>
@@ -4411,7 +4500,7 @@
                 <a:ea typeface="Aptos" pitchFamily="34" charset="-122"/>
                 <a:cs typeface="Aptos" pitchFamily="34" charset="-120"/>
               </a:rPr>
-              <a:t>© Paula Soper</a:t>
+              <a:t>Â© Paula Soper</a:t>
             </a:r>
             <a:endParaRPr lang="en-US" sz="800" dirty="0"/>
           </a:p>
@@ -4419,7 +4508,46 @@
       </p:sp>
       <p:sp>
         <p:nvSpPr>
-          <p:cNvPr id="7" name="Shape 5"/>
+          <p:cNvPr id="7" name="Text 5"/>
+          <p:cNvSpPr/>
+          <p:nvPr/>
+        </p:nvSpPr>
+        <p:spPr>
+          <a:xfrm>
+            <a:off x="11137392" y="6510528"/>
+            <a:ext cx="411480" cy="201168"/>
+          </a:xfrm>
+          <a:prstGeom prst="rect">
+            <a:avLst/>
+          </a:prstGeom>
+          <a:noFill/>
+          <a:ln/>
+        </p:spPr>
+        <p:txBody>
+          <a:bodyPr wrap="square" lIns="0" tIns="0" rIns="0" bIns="0" rtlCol="0" anchor="ctr"/>
+          <a:lstStyle/>
+          <a:p>
+            <a:pPr algn="r" indent="0" marL="0">
+              <a:buNone/>
+            </a:pPr>
+            <a:r>
+              <a:rPr lang="en-US" sz="900" dirty="0">
+                <a:solidFill>
+                  <a:srgbClr val="5F7181"/>
+                </a:solidFill>
+                <a:latin typeface="Aptos" pitchFamily="34" charset="0"/>
+                <a:ea typeface="Aptos" pitchFamily="34" charset="-122"/>
+                <a:cs typeface="Aptos" pitchFamily="34" charset="-120"/>
+              </a:rPr>
+              <a:t>12</a:t>
+            </a:r>
+            <a:endParaRPr lang="en-US" sz="900" dirty="0"/>
+          </a:p>
+        </p:txBody>
+      </p:sp>
+      <p:sp>
+        <p:nvSpPr>
+          <p:cNvPr id="8" name="Shape 6"/>
           <p:cNvSpPr/>
           <p:nvPr/>
         </p:nvSpPr>
@@ -4444,7 +4572,7 @@
       </p:sp>
       <p:sp>
         <p:nvSpPr>
-          <p:cNvPr id="8" name="Text 6"/>
+          <p:cNvPr id="9" name="Text 7"/>
           <p:cNvSpPr/>
           <p:nvPr/>
         </p:nvSpPr>
@@ -4483,14 +4611,14 @@
       </p:sp>
       <p:sp>
         <p:nvSpPr>
-          <p:cNvPr id="9" name="Text 7"/>
+          <p:cNvPr id="10" name="Text 8"/>
           <p:cNvSpPr/>
           <p:nvPr/>
         </p:nvSpPr>
         <p:spPr>
           <a:xfrm>
             <a:off x="640080" y="621792"/>
-            <a:ext cx="10881360" cy="566928"/>
+            <a:ext cx="10881360" cy="713232"/>
           </a:xfrm>
           <a:prstGeom prst="rect">
             <a:avLst/>
@@ -4508,7 +4636,7 @@
               <a:buNone/>
             </a:pPr>
             <a:r>
-              <a:rPr lang="en-US" sz="2700" b="1" dirty="0">
+              <a:rPr lang="en-US" sz="3400" b="1" dirty="0">
                 <a:solidFill>
                   <a:srgbClr val="003A63"/>
                 </a:solidFill>
@@ -4518,20 +4646,20 @@
               </a:rPr>
               <a:t>Technical Deep Dive</a:t>
             </a:r>
-            <a:endParaRPr lang="en-US" sz="2700" dirty="0"/>
-          </a:p>
-        </p:txBody>
-      </p:sp>
-      <p:sp>
-        <p:nvSpPr>
-          <p:cNvPr id="10" name="Text 8"/>
-          <p:cNvSpPr/>
-          <p:nvPr/>
-        </p:nvSpPr>
-        <p:spPr>
-          <a:xfrm>
-            <a:off x="868680" y="1417320"/>
-            <a:ext cx="6675120" cy="4434840"/>
+            <a:endParaRPr lang="en-US" sz="3400" dirty="0"/>
+          </a:p>
+        </p:txBody>
+      </p:sp>
+      <p:sp>
+        <p:nvSpPr>
+          <p:cNvPr id="11" name="Text 9"/>
+          <p:cNvSpPr/>
+          <p:nvPr/>
+        </p:nvSpPr>
+        <p:spPr>
+          <a:xfrm>
+            <a:off x="868680" y="1508760"/>
+            <a:ext cx="6537960" cy="4160520"/>
           </a:xfrm>
           <a:prstGeom prst="rect">
             <a:avLst/>
@@ -4546,7 +4674,7 @@
           <a:lstStyle/>
           <a:p>
             <a:r>
-              <a:rPr lang="en-US" sz="1700" dirty="0">
+              <a:rPr lang="en-US" sz="2100" dirty="0">
                 <a:solidFill>
                   <a:srgbClr val="17364A"/>
                 </a:solidFill>
@@ -4556,11 +4684,11 @@
               </a:rPr>
               <a:t>The eCR workflow begins before a report reaches public health.</a:t>
             </a:r>
-            <a:endParaRPr lang="en-US" sz="1700" dirty="0"/>
-          </a:p>
-          <a:p>
-            <a:r>
-              <a:rPr lang="en-US" sz="1700" dirty="0">
+            <a:endParaRPr lang="en-US" sz="2100" dirty="0"/>
+          </a:p>
+          <a:p>
+            <a:r>
+              <a:rPr lang="en-US" sz="2100" dirty="0">
                 <a:solidFill>
                   <a:srgbClr val="17364A"/>
                 </a:solidFill>
@@ -4570,11 +4698,11 @@
               </a:rPr>
               <a:t>EHR systems use trigger criteria and value sets to identify encounters that may need reporting.</a:t>
             </a:r>
-            <a:endParaRPr lang="en-US" sz="1700" dirty="0"/>
-          </a:p>
-          <a:p>
-            <a:r>
-              <a:rPr lang="en-US" sz="1700" dirty="0">
+            <a:endParaRPr lang="en-US" sz="2100" dirty="0"/>
+          </a:p>
+          <a:p>
+            <a:r>
+              <a:rPr lang="en-US" sz="2100" dirty="0">
                 <a:solidFill>
                   <a:srgbClr val="17364A"/>
                 </a:solidFill>
@@ -4582,29 +4710,15 @@
                 <a:ea typeface="Aptos" pitchFamily="34" charset="-122"/>
                 <a:cs typeface="Aptos" pitchFamily="34" charset="-120"/>
               </a:rPr>
-              <a:t>The eICR is generated and transmitted through an exchange process to the appropriate public health jurisdiction.</a:t>
-            </a:r>
-            <a:endParaRPr lang="en-US" sz="1700" dirty="0"/>
-          </a:p>
-          <a:p>
-            <a:r>
-              <a:rPr lang="en-US" sz="1700" dirty="0">
-                <a:solidFill>
-                  <a:srgbClr val="17364A"/>
-                </a:solidFill>
-                <a:latin typeface="Aptos" pitchFamily="34" charset="0"/>
-                <a:ea typeface="Aptos" pitchFamily="34" charset="-122"/>
-                <a:cs typeface="Aptos" pitchFamily="34" charset="-120"/>
-              </a:rPr>
-              <a:t>Public health systems then receive, parse, route, review, and incorporate the information into surveillance workflows.</a:t>
-            </a:r>
-            <a:endParaRPr lang="en-US" sz="1700" dirty="0"/>
-          </a:p>
-        </p:txBody>
-      </p:sp>
-      <p:sp>
-        <p:nvSpPr>
-          <p:cNvPr id="11" name="Shape 9"/>
+              <a:t>The eICR is generated and transmitted through an exchange process to the appropriate public health.</a:t>
+            </a:r>
+            <a:endParaRPr lang="en-US" sz="2100" dirty="0"/>
+          </a:p>
+        </p:txBody>
+      </p:sp>
+      <p:sp>
+        <p:nvSpPr>
+          <p:cNvPr id="12" name="Shape 10"/>
           <p:cNvSpPr/>
           <p:nvPr/>
         </p:nvSpPr>
@@ -4631,14 +4745,14 @@
       </p:sp>
       <p:sp>
         <p:nvSpPr>
-          <p:cNvPr id="12" name="Text 10"/>
+          <p:cNvPr id="13" name="Text 11"/>
           <p:cNvSpPr/>
           <p:nvPr/>
         </p:nvSpPr>
         <p:spPr>
           <a:xfrm>
             <a:off x="8074152" y="1563624"/>
-            <a:ext cx="2825496" cy="201168"/>
+            <a:ext cx="2825496" cy="256032"/>
           </a:xfrm>
           <a:prstGeom prst="rect">
             <a:avLst/>
@@ -4654,7 +4768,7 @@
               <a:buNone/>
             </a:pPr>
             <a:r>
-              <a:rPr lang="en-US" sz="950" b="1" dirty="0">
+              <a:rPr lang="en-US" sz="1300" b="1" dirty="0">
                 <a:solidFill>
                   <a:srgbClr val="0068B7"/>
                 </a:solidFill>
@@ -4664,20 +4778,20 @@
               </a:rPr>
               <a:t>Key idea</a:t>
             </a:r>
-            <a:endParaRPr lang="en-US" sz="950" dirty="0"/>
-          </a:p>
-        </p:txBody>
-      </p:sp>
-      <p:sp>
-        <p:nvSpPr>
-          <p:cNvPr id="13" name="Text 11"/>
-          <p:cNvSpPr/>
-          <p:nvPr/>
-        </p:nvSpPr>
-        <p:spPr>
-          <a:xfrm>
-            <a:off x="8074152" y="1856232"/>
-            <a:ext cx="2825496" cy="1261872"/>
+            <a:endParaRPr lang="en-US" sz="1300" dirty="0"/>
+          </a:p>
+        </p:txBody>
+      </p:sp>
+      <p:sp>
+        <p:nvSpPr>
+          <p:cNvPr id="14" name="Text 12"/>
+          <p:cNvSpPr/>
+          <p:nvPr/>
+        </p:nvSpPr>
+        <p:spPr>
+          <a:xfrm>
+            <a:off x="8074152" y="1920240"/>
+            <a:ext cx="2825496" cy="1188720"/>
           </a:xfrm>
           <a:prstGeom prst="rect">
             <a:avLst/>
@@ -4695,7 +4809,7 @@
               <a:buNone/>
             </a:pPr>
             <a:r>
-              <a:rPr lang="en-US" sz="1250" dirty="0">
+              <a:rPr lang="en-US" sz="1550" dirty="0">
                 <a:solidFill>
                   <a:srgbClr val="17364A"/>
                 </a:solidFill>
@@ -4705,13 +4819,13 @@
               </a:rPr>
               <a:t>The eCR workflow begins before a report reaches public health.</a:t>
             </a:r>
-            <a:endParaRPr lang="en-US" sz="1250" dirty="0"/>
-          </a:p>
-        </p:txBody>
-      </p:sp>
-      <p:sp>
-        <p:nvSpPr>
-          <p:cNvPr id="14" name="Shape 12"/>
+            <a:endParaRPr lang="en-US" sz="1550" dirty="0"/>
+          </a:p>
+        </p:txBody>
+      </p:sp>
+      <p:sp>
+        <p:nvSpPr>
+          <p:cNvPr id="15" name="Shape 13"/>
           <p:cNvSpPr/>
           <p:nvPr/>
         </p:nvSpPr>
@@ -4738,14 +4852,14 @@
       </p:sp>
       <p:sp>
         <p:nvSpPr>
-          <p:cNvPr id="15" name="Text 13"/>
+          <p:cNvPr id="16" name="Text 14"/>
           <p:cNvSpPr/>
           <p:nvPr/>
         </p:nvSpPr>
         <p:spPr>
           <a:xfrm>
             <a:off x="8074152" y="3666744"/>
-            <a:ext cx="2825496" cy="201168"/>
+            <a:ext cx="2825496" cy="256032"/>
           </a:xfrm>
           <a:prstGeom prst="rect">
             <a:avLst/>
@@ -4761,7 +4875,7 @@
               <a:buNone/>
             </a:pPr>
             <a:r>
-              <a:rPr lang="en-US" sz="950" b="1" dirty="0">
+              <a:rPr lang="en-US" sz="1300" b="1" dirty="0">
                 <a:solidFill>
                   <a:srgbClr val="0068B7"/>
                 </a:solidFill>
@@ -4771,20 +4885,20 @@
               </a:rPr>
               <a:t>Use this for</a:t>
             </a:r>
-            <a:endParaRPr lang="en-US" sz="950" dirty="0"/>
-          </a:p>
-        </p:txBody>
-      </p:sp>
-      <p:sp>
-        <p:nvSpPr>
-          <p:cNvPr id="16" name="Text 14"/>
-          <p:cNvSpPr/>
-          <p:nvPr/>
-        </p:nvSpPr>
-        <p:spPr>
-          <a:xfrm>
-            <a:off x="8074152" y="3959352"/>
-            <a:ext cx="2825496" cy="1170432"/>
+            <a:endParaRPr lang="en-US" sz="1300" dirty="0"/>
+          </a:p>
+        </p:txBody>
+      </p:sp>
+      <p:sp>
+        <p:nvSpPr>
+          <p:cNvPr id="17" name="Text 15"/>
+          <p:cNvSpPr/>
+          <p:nvPr/>
+        </p:nvSpPr>
+        <p:spPr>
+          <a:xfrm>
+            <a:off x="8074152" y="4023360"/>
+            <a:ext cx="2825496" cy="1097280"/>
           </a:xfrm>
           <a:prstGeom prst="rect">
             <a:avLst/>
@@ -4802,7 +4916,7 @@
               <a:buNone/>
             </a:pPr>
             <a:r>
-              <a:rPr lang="en-US" sz="1250" dirty="0">
+              <a:rPr lang="en-US" sz="1550" dirty="0">
                 <a:solidFill>
                   <a:srgbClr val="17364A"/>
                 </a:solidFill>
@@ -4812,7 +4926,7 @@
               </a:rPr>
               <a:t>Connect the concept to public health decisions, safeguards, documentation, or implementation work.</a:t>
             </a:r>
-            <a:endParaRPr lang="en-US" sz="1250" dirty="0"/>
+            <a:endParaRPr lang="en-US" sz="1550" dirty="0"/>
           </a:p>
         </p:txBody>
       </p:sp>
@@ -5009,7 +5123,7 @@
                 <a:ea typeface="Aptos" pitchFamily="34" charset="-122"/>
                 <a:cs typeface="Aptos" pitchFamily="34" charset="-120"/>
               </a:rPr>
-              <a:t>© Paula Soper</a:t>
+              <a:t>Â© Paula Soper</a:t>
             </a:r>
             <a:endParaRPr lang="en-US" sz="800" dirty="0"/>
           </a:p>
@@ -5017,7 +5131,46 @@
       </p:sp>
       <p:sp>
         <p:nvSpPr>
-          <p:cNvPr id="7" name="Shape 5"/>
+          <p:cNvPr id="7" name="Text 5"/>
+          <p:cNvSpPr/>
+          <p:nvPr/>
+        </p:nvSpPr>
+        <p:spPr>
+          <a:xfrm>
+            <a:off x="11137392" y="6510528"/>
+            <a:ext cx="411480" cy="201168"/>
+          </a:xfrm>
+          <a:prstGeom prst="rect">
+            <a:avLst/>
+          </a:prstGeom>
+          <a:noFill/>
+          <a:ln/>
+        </p:spPr>
+        <p:txBody>
+          <a:bodyPr wrap="square" lIns="0" tIns="0" rIns="0" bIns="0" rtlCol="0" anchor="ctr"/>
+          <a:lstStyle/>
+          <a:p>
+            <a:pPr algn="r" indent="0" marL="0">
+              <a:buNone/>
+            </a:pPr>
+            <a:r>
+              <a:rPr lang="en-US" sz="900" dirty="0">
+                <a:solidFill>
+                  <a:srgbClr val="5F7181"/>
+                </a:solidFill>
+                <a:latin typeface="Aptos" pitchFamily="34" charset="0"/>
+                <a:ea typeface="Aptos" pitchFamily="34" charset="-122"/>
+                <a:cs typeface="Aptos" pitchFamily="34" charset="-120"/>
+              </a:rPr>
+              <a:t>13</a:t>
+            </a:r>
+            <a:endParaRPr lang="en-US" sz="900" dirty="0"/>
+          </a:p>
+        </p:txBody>
+      </p:sp>
+      <p:sp>
+        <p:nvSpPr>
+          <p:cNvPr id="8" name="Shape 6"/>
           <p:cNvSpPr/>
           <p:nvPr/>
         </p:nvSpPr>
@@ -5042,7 +5195,7 @@
       </p:sp>
       <p:sp>
         <p:nvSpPr>
-          <p:cNvPr id="8" name="Text 6"/>
+          <p:cNvPr id="9" name="Text 7"/>
           <p:cNvSpPr/>
           <p:nvPr/>
         </p:nvSpPr>
@@ -5081,14 +5234,14 @@
       </p:sp>
       <p:sp>
         <p:nvSpPr>
-          <p:cNvPr id="9" name="Text 7"/>
+          <p:cNvPr id="10" name="Text 8"/>
           <p:cNvSpPr/>
           <p:nvPr/>
         </p:nvSpPr>
         <p:spPr>
           <a:xfrm>
             <a:off x="640080" y="621792"/>
-            <a:ext cx="10881360" cy="566928"/>
+            <a:ext cx="10881360" cy="713232"/>
           </a:xfrm>
           <a:prstGeom prst="rect">
             <a:avLst/>
@@ -5106,7 +5259,7 @@
               <a:buNone/>
             </a:pPr>
             <a:r>
-              <a:rPr lang="en-US" sz="2700" b="1" dirty="0">
+              <a:rPr lang="en-US" sz="3400" b="1" dirty="0">
                 <a:solidFill>
                   <a:srgbClr val="003A63"/>
                 </a:solidFill>
@@ -5116,20 +5269,20 @@
               </a:rPr>
               <a:t>Risks, Failure Modes, and Guardrails</a:t>
             </a:r>
-            <a:endParaRPr lang="en-US" sz="2700" dirty="0"/>
-          </a:p>
-        </p:txBody>
-      </p:sp>
-      <p:sp>
-        <p:nvSpPr>
-          <p:cNvPr id="10" name="Text 8"/>
-          <p:cNvSpPr/>
-          <p:nvPr/>
-        </p:nvSpPr>
-        <p:spPr>
-          <a:xfrm>
-            <a:off x="868680" y="1417320"/>
-            <a:ext cx="6675120" cy="4434840"/>
+            <a:endParaRPr lang="en-US" sz="3400" dirty="0"/>
+          </a:p>
+        </p:txBody>
+      </p:sp>
+      <p:sp>
+        <p:nvSpPr>
+          <p:cNvPr id="11" name="Text 9"/>
+          <p:cNvSpPr/>
+          <p:nvPr/>
+        </p:nvSpPr>
+        <p:spPr>
+          <a:xfrm>
+            <a:off x="868680" y="1508760"/>
+            <a:ext cx="6537960" cy="4160520"/>
           </a:xfrm>
           <a:prstGeom prst="rect">
             <a:avLst/>
@@ -5144,7 +5297,7 @@
           <a:lstStyle/>
           <a:p>
             <a:r>
-              <a:rPr lang="en-US" sz="1700" dirty="0">
+              <a:rPr lang="en-US" sz="2100" dirty="0">
                 <a:solidFill>
                   <a:srgbClr val="17364A"/>
                 </a:solidFill>
@@ -5154,11 +5307,11 @@
               </a:rPr>
               <a:t>Incorrect trigger assumptions.</a:t>
             </a:r>
-            <a:endParaRPr lang="en-US" sz="1700" dirty="0"/>
-          </a:p>
-          <a:p>
-            <a:r>
-              <a:rPr lang="en-US" sz="1700" dirty="0">
+            <a:endParaRPr lang="en-US" sz="2100" dirty="0"/>
+          </a:p>
+          <a:p>
+            <a:r>
+              <a:rPr lang="en-US" sz="2100" dirty="0">
                 <a:solidFill>
                   <a:srgbClr val="17364A"/>
                 </a:solidFill>
@@ -5166,13 +5319,13 @@
                 <a:ea typeface="Aptos" pitchFamily="34" charset="-122"/>
                 <a:cs typeface="Aptos" pitchFamily="34" charset="-120"/>
               </a:rPr>
-              <a:t>If trigger value sets or reporting criteria are outdated, the workflow may generate missing or inappropriate reports.</a:t>
-            </a:r>
-            <a:endParaRPr lang="en-US" sz="1700" dirty="0"/>
-          </a:p>
-          <a:p>
-            <a:r>
-              <a:rPr lang="en-US" sz="1700" dirty="0">
+              <a:t>If trigger value sets or reporting criteria are outdated, the workflow may generate missing or.</a:t>
+            </a:r>
+            <a:endParaRPr lang="en-US" sz="2100" dirty="0"/>
+          </a:p>
+          <a:p>
+            <a:r>
+              <a:rPr lang="en-US" sz="2100" dirty="0">
                 <a:solidFill>
                   <a:srgbClr val="17364A"/>
                 </a:solidFill>
@@ -5182,27 +5335,13 @@
               </a:rPr>
               <a:t>Guardrails include current eRSD/RCTC management, onboarding checks, and periodic review.</a:t>
             </a:r>
-            <a:endParaRPr lang="en-US" sz="1700" dirty="0"/>
-          </a:p>
-          <a:p>
-            <a:r>
-              <a:rPr lang="en-US" sz="1700" dirty="0">
-                <a:solidFill>
-                  <a:srgbClr val="17364A"/>
-                </a:solidFill>
-                <a:latin typeface="Aptos" pitchFamily="34" charset="0"/>
-                <a:ea typeface="Aptos" pitchFamily="34" charset="-122"/>
-                <a:cs typeface="Aptos" pitchFamily="34" charset="-120"/>
-              </a:rPr>
-              <a:t>Unsupported summaries.</a:t>
-            </a:r>
-            <a:endParaRPr lang="en-US" sz="1700" dirty="0"/>
-          </a:p>
-        </p:txBody>
-      </p:sp>
-      <p:sp>
-        <p:nvSpPr>
-          <p:cNvPr id="11" name="Shape 9"/>
+            <a:endParaRPr lang="en-US" sz="2100" dirty="0"/>
+          </a:p>
+        </p:txBody>
+      </p:sp>
+      <p:sp>
+        <p:nvSpPr>
+          <p:cNvPr id="12" name="Shape 10"/>
           <p:cNvSpPr/>
           <p:nvPr/>
         </p:nvSpPr>
@@ -5229,14 +5368,14 @@
       </p:sp>
       <p:sp>
         <p:nvSpPr>
-          <p:cNvPr id="12" name="Text 10"/>
+          <p:cNvPr id="13" name="Text 11"/>
           <p:cNvSpPr/>
           <p:nvPr/>
         </p:nvSpPr>
         <p:spPr>
           <a:xfrm>
             <a:off x="8074152" y="1563624"/>
-            <a:ext cx="2825496" cy="201168"/>
+            <a:ext cx="2825496" cy="256032"/>
           </a:xfrm>
           <a:prstGeom prst="rect">
             <a:avLst/>
@@ -5252,7 +5391,7 @@
               <a:buNone/>
             </a:pPr>
             <a:r>
-              <a:rPr lang="en-US" sz="950" b="1" dirty="0">
+              <a:rPr lang="en-US" sz="1300" b="1" dirty="0">
                 <a:solidFill>
                   <a:srgbClr val="0068B7"/>
                 </a:solidFill>
@@ -5262,20 +5401,20 @@
               </a:rPr>
               <a:t>Key idea</a:t>
             </a:r>
-            <a:endParaRPr lang="en-US" sz="950" dirty="0"/>
-          </a:p>
-        </p:txBody>
-      </p:sp>
-      <p:sp>
-        <p:nvSpPr>
-          <p:cNvPr id="13" name="Text 11"/>
-          <p:cNvSpPr/>
-          <p:nvPr/>
-        </p:nvSpPr>
-        <p:spPr>
-          <a:xfrm>
-            <a:off x="8074152" y="1856232"/>
-            <a:ext cx="2825496" cy="1261872"/>
+            <a:endParaRPr lang="en-US" sz="1300" dirty="0"/>
+          </a:p>
+        </p:txBody>
+      </p:sp>
+      <p:sp>
+        <p:nvSpPr>
+          <p:cNvPr id="14" name="Text 12"/>
+          <p:cNvSpPr/>
+          <p:nvPr/>
+        </p:nvSpPr>
+        <p:spPr>
+          <a:xfrm>
+            <a:off x="8074152" y="1920240"/>
+            <a:ext cx="2825496" cy="1188720"/>
           </a:xfrm>
           <a:prstGeom prst="rect">
             <a:avLst/>
@@ -5293,7 +5432,7 @@
               <a:buNone/>
             </a:pPr>
             <a:r>
-              <a:rPr lang="en-US" sz="1250" dirty="0">
+              <a:rPr lang="en-US" sz="1550" dirty="0">
                 <a:solidFill>
                   <a:srgbClr val="17364A"/>
                 </a:solidFill>
@@ -5303,13 +5442,13 @@
               </a:rPr>
               <a:t>Incorrect trigger assumptions.</a:t>
             </a:r>
-            <a:endParaRPr lang="en-US" sz="1250" dirty="0"/>
-          </a:p>
-        </p:txBody>
-      </p:sp>
-      <p:sp>
-        <p:nvSpPr>
-          <p:cNvPr id="14" name="Shape 12"/>
+            <a:endParaRPr lang="en-US" sz="1550" dirty="0"/>
+          </a:p>
+        </p:txBody>
+      </p:sp>
+      <p:sp>
+        <p:nvSpPr>
+          <p:cNvPr id="15" name="Shape 13"/>
           <p:cNvSpPr/>
           <p:nvPr/>
         </p:nvSpPr>
@@ -5336,14 +5475,14 @@
       </p:sp>
       <p:sp>
         <p:nvSpPr>
-          <p:cNvPr id="15" name="Text 13"/>
+          <p:cNvPr id="16" name="Text 14"/>
           <p:cNvSpPr/>
           <p:nvPr/>
         </p:nvSpPr>
         <p:spPr>
           <a:xfrm>
             <a:off x="8074152" y="3666744"/>
-            <a:ext cx="2825496" cy="201168"/>
+            <a:ext cx="2825496" cy="256032"/>
           </a:xfrm>
           <a:prstGeom prst="rect">
             <a:avLst/>
@@ -5359,7 +5498,7 @@
               <a:buNone/>
             </a:pPr>
             <a:r>
-              <a:rPr lang="en-US" sz="950" b="1" dirty="0">
+              <a:rPr lang="en-US" sz="1300" b="1" dirty="0">
                 <a:solidFill>
                   <a:srgbClr val="0068B7"/>
                 </a:solidFill>
@@ -5369,20 +5508,20 @@
               </a:rPr>
               <a:t>Use this for</a:t>
             </a:r>
-            <a:endParaRPr lang="en-US" sz="950" dirty="0"/>
-          </a:p>
-        </p:txBody>
-      </p:sp>
-      <p:sp>
-        <p:nvSpPr>
-          <p:cNvPr id="16" name="Text 14"/>
-          <p:cNvSpPr/>
-          <p:nvPr/>
-        </p:nvSpPr>
-        <p:spPr>
-          <a:xfrm>
-            <a:off x="8074152" y="3959352"/>
-            <a:ext cx="2825496" cy="1170432"/>
+            <a:endParaRPr lang="en-US" sz="1300" dirty="0"/>
+          </a:p>
+        </p:txBody>
+      </p:sp>
+      <p:sp>
+        <p:nvSpPr>
+          <p:cNvPr id="17" name="Text 15"/>
+          <p:cNvSpPr/>
+          <p:nvPr/>
+        </p:nvSpPr>
+        <p:spPr>
+          <a:xfrm>
+            <a:off x="8074152" y="4023360"/>
+            <a:ext cx="2825496" cy="1097280"/>
           </a:xfrm>
           <a:prstGeom prst="rect">
             <a:avLst/>
@@ -5400,7 +5539,7 @@
               <a:buNone/>
             </a:pPr>
             <a:r>
-              <a:rPr lang="en-US" sz="1250" dirty="0">
+              <a:rPr lang="en-US" sz="1550" dirty="0">
                 <a:solidFill>
                   <a:srgbClr val="17364A"/>
                 </a:solidFill>
@@ -5410,7 +5549,7 @@
               </a:rPr>
               <a:t>Connect the concept to public health decisions, safeguards, documentation, or implementation work.</a:t>
             </a:r>
-            <a:endParaRPr lang="en-US" sz="1250" dirty="0"/>
+            <a:endParaRPr lang="en-US" sz="1550" dirty="0"/>
           </a:p>
         </p:txBody>
       </p:sp>
@@ -5607,7 +5746,7 @@
                 <a:ea typeface="Aptos" pitchFamily="34" charset="-122"/>
                 <a:cs typeface="Aptos" pitchFamily="34" charset="-120"/>
               </a:rPr>
-              <a:t>© Paula Soper</a:t>
+              <a:t>Â© Paula Soper</a:t>
             </a:r>
             <a:endParaRPr lang="en-US" sz="800" dirty="0"/>
           </a:p>
@@ -5621,8 +5760,47 @@
         </p:nvSpPr>
         <p:spPr>
           <a:xfrm>
+            <a:off x="11137392" y="6510528"/>
+            <a:ext cx="411480" cy="201168"/>
+          </a:xfrm>
+          <a:prstGeom prst="rect">
+            <a:avLst/>
+          </a:prstGeom>
+          <a:noFill/>
+          <a:ln/>
+        </p:spPr>
+        <p:txBody>
+          <a:bodyPr wrap="square" lIns="0" tIns="0" rIns="0" bIns="0" rtlCol="0" anchor="ctr"/>
+          <a:lstStyle/>
+          <a:p>
+            <a:pPr algn="r" indent="0" marL="0">
+              <a:buNone/>
+            </a:pPr>
+            <a:r>
+              <a:rPr lang="en-US" sz="900" dirty="0">
+                <a:solidFill>
+                  <a:srgbClr val="5F7181"/>
+                </a:solidFill>
+                <a:latin typeface="Aptos" pitchFamily="34" charset="0"/>
+                <a:ea typeface="Aptos" pitchFamily="34" charset="-122"/>
+                <a:cs typeface="Aptos" pitchFamily="34" charset="-120"/>
+              </a:rPr>
+              <a:t>14</a:t>
+            </a:r>
+            <a:endParaRPr lang="en-US" sz="900" dirty="0"/>
+          </a:p>
+        </p:txBody>
+      </p:sp>
+      <p:sp>
+        <p:nvSpPr>
+          <p:cNvPr id="8" name="Text 6"/>
+          <p:cNvSpPr/>
+          <p:nvPr/>
+        </p:nvSpPr>
+        <p:spPr>
+          <a:xfrm>
             <a:off x="640080" y="658368"/>
-            <a:ext cx="10881360" cy="566928"/>
+            <a:ext cx="10881360" cy="713232"/>
           </a:xfrm>
           <a:prstGeom prst="rect">
             <a:avLst/>
@@ -5640,7 +5818,7 @@
               <a:buNone/>
             </a:pPr>
             <a:r>
-              <a:rPr lang="en-US" sz="2700" b="1" dirty="0">
+              <a:rPr lang="en-US" sz="3400" b="1" dirty="0">
                 <a:solidFill>
                   <a:srgbClr val="003A63"/>
                 </a:solidFill>
@@ -5650,20 +5828,20 @@
               </a:rPr>
               <a:t>Risks, Failure Modes, and Guardrails Continued</a:t>
             </a:r>
-            <a:endParaRPr lang="en-US" sz="2700" dirty="0"/>
-          </a:p>
-        </p:txBody>
-      </p:sp>
-      <p:sp>
-        <p:nvSpPr>
-          <p:cNvPr id="8" name="Text 6"/>
-          <p:cNvSpPr/>
-          <p:nvPr/>
-        </p:nvSpPr>
-        <p:spPr>
-          <a:xfrm>
-            <a:off x="868680" y="1417320"/>
-            <a:ext cx="6675120" cy="4434840"/>
+            <a:endParaRPr lang="en-US" sz="3400" dirty="0"/>
+          </a:p>
+        </p:txBody>
+      </p:sp>
+      <p:sp>
+        <p:nvSpPr>
+          <p:cNvPr id="9" name="Text 7"/>
+          <p:cNvSpPr/>
+          <p:nvPr/>
+        </p:nvSpPr>
+        <p:spPr>
+          <a:xfrm>
+            <a:off x="868680" y="1508760"/>
+            <a:ext cx="6537960" cy="4160520"/>
           </a:xfrm>
           <a:prstGeom prst="rect">
             <a:avLst/>
@@ -5678,7 +5856,7 @@
           <a:lstStyle/>
           <a:p>
             <a:r>
-              <a:rPr lang="en-US" sz="1700" dirty="0">
+              <a:rPr lang="en-US" sz="2100" dirty="0">
                 <a:solidFill>
                   <a:srgbClr val="17364A"/>
                 </a:solidFill>
@@ -5688,11 +5866,11 @@
               </a:rPr>
               <a:t>Routing errors.</a:t>
             </a:r>
-            <a:endParaRPr lang="en-US" sz="1700" dirty="0"/>
-          </a:p>
-          <a:p>
-            <a:r>
-              <a:rPr lang="en-US" sz="1700" dirty="0">
+            <a:endParaRPr lang="en-US" sz="2100" dirty="0"/>
+          </a:p>
+          <a:p>
+            <a:r>
+              <a:rPr lang="en-US" sz="2100" dirty="0">
                 <a:solidFill>
                   <a:srgbClr val="17364A"/>
                 </a:solidFill>
@@ -5702,11 +5880,11 @@
               </a:rPr>
               <a:t>Incorrect jurisdiction or program routing can delay response.</a:t>
             </a:r>
-            <a:endParaRPr lang="en-US" sz="1700" dirty="0"/>
-          </a:p>
-          <a:p>
-            <a:r>
-              <a:rPr lang="en-US" sz="1700" dirty="0">
+            <a:endParaRPr lang="en-US" sz="2100" dirty="0"/>
+          </a:p>
+          <a:p>
+            <a:r>
+              <a:rPr lang="en-US" sz="2100" dirty="0">
                 <a:solidFill>
                   <a:srgbClr val="17364A"/>
                 </a:solidFill>
@@ -5716,13 +5894,13 @@
               </a:rPr>
               <a:t>Guardrails include routing validation, exception queues, and escalation procedures.</a:t>
             </a:r>
-            <a:endParaRPr lang="en-US" sz="1700" dirty="0"/>
-          </a:p>
-        </p:txBody>
-      </p:sp>
-      <p:sp>
-        <p:nvSpPr>
-          <p:cNvPr id="9" name="Shape 7"/>
+            <a:endParaRPr lang="en-US" sz="2100" dirty="0"/>
+          </a:p>
+        </p:txBody>
+      </p:sp>
+      <p:sp>
+        <p:nvSpPr>
+          <p:cNvPr id="10" name="Shape 8"/>
           <p:cNvSpPr/>
           <p:nvPr/>
         </p:nvSpPr>
@@ -5749,14 +5927,14 @@
       </p:sp>
       <p:sp>
         <p:nvSpPr>
-          <p:cNvPr id="10" name="Text 8"/>
+          <p:cNvPr id="11" name="Text 9"/>
           <p:cNvSpPr/>
           <p:nvPr/>
         </p:nvSpPr>
         <p:spPr>
           <a:xfrm>
             <a:off x="8074152" y="1563624"/>
-            <a:ext cx="2825496" cy="201168"/>
+            <a:ext cx="2825496" cy="256032"/>
           </a:xfrm>
           <a:prstGeom prst="rect">
             <a:avLst/>
@@ -5772,7 +5950,7 @@
               <a:buNone/>
             </a:pPr>
             <a:r>
-              <a:rPr lang="en-US" sz="950" b="1" dirty="0">
+              <a:rPr lang="en-US" sz="1300" b="1" dirty="0">
                 <a:solidFill>
                   <a:srgbClr val="0068B7"/>
                 </a:solidFill>
@@ -5782,20 +5960,20 @@
               </a:rPr>
               <a:t>Key idea</a:t>
             </a:r>
-            <a:endParaRPr lang="en-US" sz="950" dirty="0"/>
-          </a:p>
-        </p:txBody>
-      </p:sp>
-      <p:sp>
-        <p:nvSpPr>
-          <p:cNvPr id="11" name="Text 9"/>
-          <p:cNvSpPr/>
-          <p:nvPr/>
-        </p:nvSpPr>
-        <p:spPr>
-          <a:xfrm>
-            <a:off x="8074152" y="1856232"/>
-            <a:ext cx="2825496" cy="1261872"/>
+            <a:endParaRPr lang="en-US" sz="1300" dirty="0"/>
+          </a:p>
+        </p:txBody>
+      </p:sp>
+      <p:sp>
+        <p:nvSpPr>
+          <p:cNvPr id="12" name="Text 10"/>
+          <p:cNvSpPr/>
+          <p:nvPr/>
+        </p:nvSpPr>
+        <p:spPr>
+          <a:xfrm>
+            <a:off x="8074152" y="1920240"/>
+            <a:ext cx="2825496" cy="1188720"/>
           </a:xfrm>
           <a:prstGeom prst="rect">
             <a:avLst/>
@@ -5813,7 +5991,7 @@
               <a:buNone/>
             </a:pPr>
             <a:r>
-              <a:rPr lang="en-US" sz="1250" dirty="0">
+              <a:rPr lang="en-US" sz="1550" dirty="0">
                 <a:solidFill>
                   <a:srgbClr val="17364A"/>
                 </a:solidFill>
@@ -5823,13 +6001,13 @@
               </a:rPr>
               <a:t>Routing errors.</a:t>
             </a:r>
-            <a:endParaRPr lang="en-US" sz="1250" dirty="0"/>
-          </a:p>
-        </p:txBody>
-      </p:sp>
-      <p:sp>
-        <p:nvSpPr>
-          <p:cNvPr id="12" name="Shape 10"/>
+            <a:endParaRPr lang="en-US" sz="1550" dirty="0"/>
+          </a:p>
+        </p:txBody>
+      </p:sp>
+      <p:sp>
+        <p:nvSpPr>
+          <p:cNvPr id="13" name="Shape 11"/>
           <p:cNvSpPr/>
           <p:nvPr/>
         </p:nvSpPr>
@@ -5856,14 +6034,14 @@
       </p:sp>
       <p:sp>
         <p:nvSpPr>
-          <p:cNvPr id="13" name="Text 11"/>
+          <p:cNvPr id="14" name="Text 12"/>
           <p:cNvSpPr/>
           <p:nvPr/>
         </p:nvSpPr>
         <p:spPr>
           <a:xfrm>
             <a:off x="8074152" y="3666744"/>
-            <a:ext cx="2825496" cy="201168"/>
+            <a:ext cx="2825496" cy="256032"/>
           </a:xfrm>
           <a:prstGeom prst="rect">
             <a:avLst/>
@@ -5879,7 +6057,7 @@
               <a:buNone/>
             </a:pPr>
             <a:r>
-              <a:rPr lang="en-US" sz="950" b="1" dirty="0">
+              <a:rPr lang="en-US" sz="1300" b="1" dirty="0">
                 <a:solidFill>
                   <a:srgbClr val="0068B7"/>
                 </a:solidFill>
@@ -5889,20 +6067,20 @@
               </a:rPr>
               <a:t>Use this for</a:t>
             </a:r>
-            <a:endParaRPr lang="en-US" sz="950" dirty="0"/>
-          </a:p>
-        </p:txBody>
-      </p:sp>
-      <p:sp>
-        <p:nvSpPr>
-          <p:cNvPr id="14" name="Text 12"/>
-          <p:cNvSpPr/>
-          <p:nvPr/>
-        </p:nvSpPr>
-        <p:spPr>
-          <a:xfrm>
-            <a:off x="8074152" y="3959352"/>
-            <a:ext cx="2825496" cy="1170432"/>
+            <a:endParaRPr lang="en-US" sz="1300" dirty="0"/>
+          </a:p>
+        </p:txBody>
+      </p:sp>
+      <p:sp>
+        <p:nvSpPr>
+          <p:cNvPr id="15" name="Text 13"/>
+          <p:cNvSpPr/>
+          <p:nvPr/>
+        </p:nvSpPr>
+        <p:spPr>
+          <a:xfrm>
+            <a:off x="8074152" y="4023360"/>
+            <a:ext cx="2825496" cy="1097280"/>
           </a:xfrm>
           <a:prstGeom prst="rect">
             <a:avLst/>
@@ -5920,7 +6098,7 @@
               <a:buNone/>
             </a:pPr>
             <a:r>
-              <a:rPr lang="en-US" sz="1250" dirty="0">
+              <a:rPr lang="en-US" sz="1550" dirty="0">
                 <a:solidFill>
                   <a:srgbClr val="17364A"/>
                 </a:solidFill>
@@ -5930,7 +6108,7 @@
               </a:rPr>
               <a:t>Connect the concept to public health decisions, safeguards, documentation, or implementation work.</a:t>
             </a:r>
-            <a:endParaRPr lang="en-US" sz="1250" dirty="0"/>
+            <a:endParaRPr lang="en-US" sz="1550" dirty="0"/>
           </a:p>
         </p:txBody>
       </p:sp>
@@ -6127,7 +6305,7 @@
                 <a:ea typeface="Aptos" pitchFamily="34" charset="-122"/>
                 <a:cs typeface="Aptos" pitchFamily="34" charset="-120"/>
               </a:rPr>
-              <a:t>© Paula Soper</a:t>
+              <a:t>Â© Paula Soper</a:t>
             </a:r>
             <a:endParaRPr lang="en-US" sz="800" dirty="0"/>
           </a:p>
@@ -6135,7 +6313,46 @@
       </p:sp>
       <p:sp>
         <p:nvSpPr>
-          <p:cNvPr id="7" name="Shape 5"/>
+          <p:cNvPr id="7" name="Text 5"/>
+          <p:cNvSpPr/>
+          <p:nvPr/>
+        </p:nvSpPr>
+        <p:spPr>
+          <a:xfrm>
+            <a:off x="11137392" y="6510528"/>
+            <a:ext cx="411480" cy="201168"/>
+          </a:xfrm>
+          <a:prstGeom prst="rect">
+            <a:avLst/>
+          </a:prstGeom>
+          <a:noFill/>
+          <a:ln/>
+        </p:spPr>
+        <p:txBody>
+          <a:bodyPr wrap="square" lIns="0" tIns="0" rIns="0" bIns="0" rtlCol="0" anchor="ctr"/>
+          <a:lstStyle/>
+          <a:p>
+            <a:pPr algn="r" indent="0" marL="0">
+              <a:buNone/>
+            </a:pPr>
+            <a:r>
+              <a:rPr lang="en-US" sz="900" dirty="0">
+                <a:solidFill>
+                  <a:srgbClr val="5F7181"/>
+                </a:solidFill>
+                <a:latin typeface="Aptos" pitchFamily="34" charset="0"/>
+                <a:ea typeface="Aptos" pitchFamily="34" charset="-122"/>
+                <a:cs typeface="Aptos" pitchFamily="34" charset="-120"/>
+              </a:rPr>
+              <a:t>15</a:t>
+            </a:r>
+            <a:endParaRPr lang="en-US" sz="900" dirty="0"/>
+          </a:p>
+        </p:txBody>
+      </p:sp>
+      <p:sp>
+        <p:nvSpPr>
+          <p:cNvPr id="8" name="Shape 6"/>
           <p:cNvSpPr/>
           <p:nvPr/>
         </p:nvSpPr>
@@ -6160,7 +6377,7 @@
       </p:sp>
       <p:sp>
         <p:nvSpPr>
-          <p:cNvPr id="8" name="Text 6"/>
+          <p:cNvPr id="9" name="Text 7"/>
           <p:cNvSpPr/>
           <p:nvPr/>
         </p:nvSpPr>
@@ -6199,14 +6416,14 @@
       </p:sp>
       <p:sp>
         <p:nvSpPr>
-          <p:cNvPr id="9" name="Text 7"/>
+          <p:cNvPr id="10" name="Text 8"/>
           <p:cNvSpPr/>
           <p:nvPr/>
         </p:nvSpPr>
         <p:spPr>
           <a:xfrm>
             <a:off x="640080" y="621792"/>
-            <a:ext cx="10881360" cy="566928"/>
+            <a:ext cx="10881360" cy="713232"/>
           </a:xfrm>
           <a:prstGeom prst="rect">
             <a:avLst/>
@@ -6224,7 +6441,7 @@
               <a:buNone/>
             </a:pPr>
             <a:r>
-              <a:rPr lang="en-US" sz="2700" b="1" dirty="0">
+              <a:rPr lang="en-US" sz="3400" b="1" dirty="0">
                 <a:solidFill>
                   <a:srgbClr val="003A63"/>
                 </a:solidFill>
@@ -6234,20 +6451,20 @@
               </a:rPr>
               <a:t>Application to AI-Supported Workflows</a:t>
             </a:r>
-            <a:endParaRPr lang="en-US" sz="2700" dirty="0"/>
-          </a:p>
-        </p:txBody>
-      </p:sp>
-      <p:sp>
-        <p:nvSpPr>
-          <p:cNvPr id="10" name="Text 8"/>
-          <p:cNvSpPr/>
-          <p:nvPr/>
-        </p:nvSpPr>
-        <p:spPr>
-          <a:xfrm>
-            <a:off x="868680" y="1417320"/>
-            <a:ext cx="6675120" cy="4434840"/>
+            <a:endParaRPr lang="en-US" sz="3400" dirty="0"/>
+          </a:p>
+        </p:txBody>
+      </p:sp>
+      <p:sp>
+        <p:nvSpPr>
+          <p:cNvPr id="11" name="Text 9"/>
+          <p:cNvSpPr/>
+          <p:nvPr/>
+        </p:nvSpPr>
+        <p:spPr>
+          <a:xfrm>
+            <a:off x="868680" y="1508760"/>
+            <a:ext cx="6537960" cy="4160520"/>
           </a:xfrm>
           <a:prstGeom prst="rect">
             <a:avLst/>
@@ -6262,7 +6479,7 @@
           <a:lstStyle/>
           <a:p>
             <a:r>
-              <a:rPr lang="en-US" sz="1700" dirty="0">
+              <a:rPr lang="en-US" sz="2100" dirty="0">
                 <a:solidFill>
                   <a:srgbClr val="17364A"/>
                 </a:solidFill>
@@ -6272,11 +6489,11 @@
               </a:rPr>
               <a:t>Generative AI may summarize eICR content, but summaries should display source evidence and uncertainty.</a:t>
             </a:r>
-            <a:endParaRPr lang="en-US" sz="1700" dirty="0"/>
-          </a:p>
-          <a:p>
-            <a:r>
-              <a:rPr lang="en-US" sz="1700" dirty="0">
+            <a:endParaRPr lang="en-US" sz="2100" dirty="0"/>
+          </a:p>
+          <a:p>
+            <a:r>
+              <a:rPr lang="en-US" sz="2100" dirty="0">
                 <a:solidFill>
                   <a:srgbClr val="17364A"/>
                 </a:solidFill>
@@ -6284,13 +6501,13 @@
                 <a:ea typeface="Aptos" pitchFamily="34" charset="-122"/>
                 <a:cs typeface="Aptos" pitchFamily="34" charset="-120"/>
               </a:rPr>
-              <a:t>Predictive models may support prioritization, but only after validation against public health outcomes and review workflows.</a:t>
-            </a:r>
-            <a:endParaRPr lang="en-US" sz="1700" dirty="0"/>
-          </a:p>
-          <a:p>
-            <a:r>
-              <a:rPr lang="en-US" sz="1700" dirty="0">
+              <a:t>Predictive models may support prioritization, but only after validation against public health outcomes.</a:t>
+            </a:r>
+            <a:endParaRPr lang="en-US" sz="2100" dirty="0"/>
+          </a:p>
+          <a:p>
+            <a:r>
+              <a:rPr lang="en-US" sz="2100" dirty="0">
                 <a:solidFill>
                   <a:srgbClr val="17364A"/>
                 </a:solidFill>
@@ -6298,29 +6515,15 @@
                 <a:ea typeface="Aptos" pitchFamily="34" charset="-122"/>
                 <a:cs typeface="Aptos" pitchFamily="34" charset="-120"/>
               </a:rPr>
-              <a:t>RAG may provide disease-specific guidance to investigators, but document sources must be current and authoritative.</a:t>
-            </a:r>
-            <a:endParaRPr lang="en-US" sz="1700" dirty="0"/>
-          </a:p>
-          <a:p>
-            <a:r>
-              <a:rPr lang="en-US" sz="1700" dirty="0">
-                <a:solidFill>
-                  <a:srgbClr val="17364A"/>
-                </a:solidFill>
-                <a:latin typeface="Aptos" pitchFamily="34" charset="0"/>
-                <a:ea typeface="Aptos" pitchFamily="34" charset="-122"/>
-                <a:cs typeface="Aptos" pitchFamily="34" charset="-120"/>
-              </a:rPr>
-              <a:t>Agentic AI could create follow-up tasks, but task creation should be constrained and auditable.</a:t>
-            </a:r>
-            <a:endParaRPr lang="en-US" sz="1700" dirty="0"/>
-          </a:p>
-        </p:txBody>
-      </p:sp>
-      <p:sp>
-        <p:nvSpPr>
-          <p:cNvPr id="11" name="Shape 9"/>
+              <a:t>RAG may provide disease-specific guidance to investigators, but document sources must be current and.</a:t>
+            </a:r>
+            <a:endParaRPr lang="en-US" sz="2100" dirty="0"/>
+          </a:p>
+        </p:txBody>
+      </p:sp>
+      <p:sp>
+        <p:nvSpPr>
+          <p:cNvPr id="12" name="Shape 10"/>
           <p:cNvSpPr/>
           <p:nvPr/>
         </p:nvSpPr>
@@ -6347,14 +6550,14 @@
       </p:sp>
       <p:sp>
         <p:nvSpPr>
-          <p:cNvPr id="12" name="Text 10"/>
+          <p:cNvPr id="13" name="Text 11"/>
           <p:cNvSpPr/>
           <p:nvPr/>
         </p:nvSpPr>
         <p:spPr>
           <a:xfrm>
             <a:off x="8074152" y="1563624"/>
-            <a:ext cx="2825496" cy="201168"/>
+            <a:ext cx="2825496" cy="256032"/>
           </a:xfrm>
           <a:prstGeom prst="rect">
             <a:avLst/>
@@ -6370,7 +6573,7 @@
               <a:buNone/>
             </a:pPr>
             <a:r>
-              <a:rPr lang="en-US" sz="950" b="1" dirty="0">
+              <a:rPr lang="en-US" sz="1300" b="1" dirty="0">
                 <a:solidFill>
                   <a:srgbClr val="0068B7"/>
                 </a:solidFill>
@@ -6380,20 +6583,20 @@
               </a:rPr>
               <a:t>Key idea</a:t>
             </a:r>
-            <a:endParaRPr lang="en-US" sz="950" dirty="0"/>
-          </a:p>
-        </p:txBody>
-      </p:sp>
-      <p:sp>
-        <p:nvSpPr>
-          <p:cNvPr id="13" name="Text 11"/>
-          <p:cNvSpPr/>
-          <p:nvPr/>
-        </p:nvSpPr>
-        <p:spPr>
-          <a:xfrm>
-            <a:off x="8074152" y="1856232"/>
-            <a:ext cx="2825496" cy="1261872"/>
+            <a:endParaRPr lang="en-US" sz="1300" dirty="0"/>
+          </a:p>
+        </p:txBody>
+      </p:sp>
+      <p:sp>
+        <p:nvSpPr>
+          <p:cNvPr id="14" name="Text 12"/>
+          <p:cNvSpPr/>
+          <p:nvPr/>
+        </p:nvSpPr>
+        <p:spPr>
+          <a:xfrm>
+            <a:off x="8074152" y="1920240"/>
+            <a:ext cx="2825496" cy="1188720"/>
           </a:xfrm>
           <a:prstGeom prst="rect">
             <a:avLst/>
@@ -6411,7 +6614,7 @@
               <a:buNone/>
             </a:pPr>
             <a:r>
-              <a:rPr lang="en-US" sz="1250" dirty="0">
+              <a:rPr lang="en-US" sz="1550" dirty="0">
                 <a:solidFill>
                   <a:srgbClr val="17364A"/>
                 </a:solidFill>
@@ -6421,13 +6624,13 @@
               </a:rPr>
               <a:t>Generative AI may summarize eICR content, but summaries should display source evidence and uncertainty.</a:t>
             </a:r>
-            <a:endParaRPr lang="en-US" sz="1250" dirty="0"/>
-          </a:p>
-        </p:txBody>
-      </p:sp>
-      <p:sp>
-        <p:nvSpPr>
-          <p:cNvPr id="14" name="Shape 12"/>
+            <a:endParaRPr lang="en-US" sz="1550" dirty="0"/>
+          </a:p>
+        </p:txBody>
+      </p:sp>
+      <p:sp>
+        <p:nvSpPr>
+          <p:cNvPr id="15" name="Shape 13"/>
           <p:cNvSpPr/>
           <p:nvPr/>
         </p:nvSpPr>
@@ -6454,14 +6657,14 @@
       </p:sp>
       <p:sp>
         <p:nvSpPr>
-          <p:cNvPr id="15" name="Text 13"/>
+          <p:cNvPr id="16" name="Text 14"/>
           <p:cNvSpPr/>
           <p:nvPr/>
         </p:nvSpPr>
         <p:spPr>
           <a:xfrm>
             <a:off x="8074152" y="3666744"/>
-            <a:ext cx="2825496" cy="201168"/>
+            <a:ext cx="2825496" cy="256032"/>
           </a:xfrm>
           <a:prstGeom prst="rect">
             <a:avLst/>
@@ -6477,7 +6680,7 @@
               <a:buNone/>
             </a:pPr>
             <a:r>
-              <a:rPr lang="en-US" sz="950" b="1" dirty="0">
+              <a:rPr lang="en-US" sz="1300" b="1" dirty="0">
                 <a:solidFill>
                   <a:srgbClr val="0068B7"/>
                 </a:solidFill>
@@ -6487,20 +6690,20 @@
               </a:rPr>
               <a:t>Use this for</a:t>
             </a:r>
-            <a:endParaRPr lang="en-US" sz="950" dirty="0"/>
-          </a:p>
-        </p:txBody>
-      </p:sp>
-      <p:sp>
-        <p:nvSpPr>
-          <p:cNvPr id="16" name="Text 14"/>
-          <p:cNvSpPr/>
-          <p:nvPr/>
-        </p:nvSpPr>
-        <p:spPr>
-          <a:xfrm>
-            <a:off x="8074152" y="3959352"/>
-            <a:ext cx="2825496" cy="1170432"/>
+            <a:endParaRPr lang="en-US" sz="1300" dirty="0"/>
+          </a:p>
+        </p:txBody>
+      </p:sp>
+      <p:sp>
+        <p:nvSpPr>
+          <p:cNvPr id="17" name="Text 15"/>
+          <p:cNvSpPr/>
+          <p:nvPr/>
+        </p:nvSpPr>
+        <p:spPr>
+          <a:xfrm>
+            <a:off x="8074152" y="4023360"/>
+            <a:ext cx="2825496" cy="1097280"/>
           </a:xfrm>
           <a:prstGeom prst="rect">
             <a:avLst/>
@@ -6518,7 +6721,7 @@
               <a:buNone/>
             </a:pPr>
             <a:r>
-              <a:rPr lang="en-US" sz="1250" dirty="0">
+              <a:rPr lang="en-US" sz="1550" dirty="0">
                 <a:solidFill>
                   <a:srgbClr val="17364A"/>
                 </a:solidFill>
@@ -6528,7 +6731,7 @@
               </a:rPr>
               <a:t>Connect the concept to public health decisions, safeguards, documentation, or implementation work.</a:t>
             </a:r>
-            <a:endParaRPr lang="en-US" sz="1250" dirty="0"/>
+            <a:endParaRPr lang="en-US" sz="1550" dirty="0"/>
           </a:p>
         </p:txBody>
       </p:sp>
@@ -6725,7 +6928,7 @@
                 <a:ea typeface="Aptos" pitchFamily="34" charset="-122"/>
                 <a:cs typeface="Aptos" pitchFamily="34" charset="-120"/>
               </a:rPr>
-              <a:t>© Paula Soper</a:t>
+              <a:t>Â© Paula Soper</a:t>
             </a:r>
             <a:endParaRPr lang="en-US" sz="800" dirty="0"/>
           </a:p>
@@ -6733,7 +6936,46 @@
       </p:sp>
       <p:sp>
         <p:nvSpPr>
-          <p:cNvPr id="7" name="Shape 5"/>
+          <p:cNvPr id="7" name="Text 5"/>
+          <p:cNvSpPr/>
+          <p:nvPr/>
+        </p:nvSpPr>
+        <p:spPr>
+          <a:xfrm>
+            <a:off x="11137392" y="6510528"/>
+            <a:ext cx="411480" cy="201168"/>
+          </a:xfrm>
+          <a:prstGeom prst="rect">
+            <a:avLst/>
+          </a:prstGeom>
+          <a:noFill/>
+          <a:ln/>
+        </p:spPr>
+        <p:txBody>
+          <a:bodyPr wrap="square" lIns="0" tIns="0" rIns="0" bIns="0" rtlCol="0" anchor="ctr"/>
+          <a:lstStyle/>
+          <a:p>
+            <a:pPr algn="r" indent="0" marL="0">
+              <a:buNone/>
+            </a:pPr>
+            <a:r>
+              <a:rPr lang="en-US" sz="900" dirty="0">
+                <a:solidFill>
+                  <a:srgbClr val="5F7181"/>
+                </a:solidFill>
+                <a:latin typeface="Aptos" pitchFamily="34" charset="0"/>
+                <a:ea typeface="Aptos" pitchFamily="34" charset="-122"/>
+                <a:cs typeface="Aptos" pitchFamily="34" charset="-120"/>
+              </a:rPr>
+              <a:t>16</a:t>
+            </a:r>
+            <a:endParaRPr lang="en-US" sz="900" dirty="0"/>
+          </a:p>
+        </p:txBody>
+      </p:sp>
+      <p:sp>
+        <p:nvSpPr>
+          <p:cNvPr id="8" name="Shape 6"/>
           <p:cNvSpPr/>
           <p:nvPr/>
         </p:nvSpPr>
@@ -6758,7 +7000,7 @@
       </p:sp>
       <p:sp>
         <p:nvSpPr>
-          <p:cNvPr id="8" name="Text 6"/>
+          <p:cNvPr id="9" name="Text 7"/>
           <p:cNvSpPr/>
           <p:nvPr/>
         </p:nvSpPr>
@@ -6797,14 +7039,14 @@
       </p:sp>
       <p:sp>
         <p:nvSpPr>
-          <p:cNvPr id="9" name="Text 7"/>
+          <p:cNvPr id="10" name="Text 8"/>
           <p:cNvSpPr/>
           <p:nvPr/>
         </p:nvSpPr>
         <p:spPr>
           <a:xfrm>
             <a:off x="640080" y="621792"/>
-            <a:ext cx="10881360" cy="566928"/>
+            <a:ext cx="10881360" cy="713232"/>
           </a:xfrm>
           <a:prstGeom prst="rect">
             <a:avLst/>
@@ -6822,7 +7064,7 @@
               <a:buNone/>
             </a:pPr>
             <a:r>
-              <a:rPr lang="en-US" sz="2700" b="1" dirty="0">
+              <a:rPr lang="en-US" sz="3400" b="1" dirty="0">
                 <a:solidFill>
                   <a:srgbClr val="003A63"/>
                 </a:solidFill>
@@ -6832,20 +7074,20 @@
               </a:rPr>
               <a:t>Reflection Questions</a:t>
             </a:r>
-            <a:endParaRPr lang="en-US" sz="2700" dirty="0"/>
-          </a:p>
-        </p:txBody>
-      </p:sp>
-      <p:sp>
-        <p:nvSpPr>
-          <p:cNvPr id="10" name="Text 8"/>
-          <p:cNvSpPr/>
-          <p:nvPr/>
-        </p:nvSpPr>
-        <p:spPr>
-          <a:xfrm>
-            <a:off x="868680" y="1417320"/>
-            <a:ext cx="6675120" cy="4434840"/>
+            <a:endParaRPr lang="en-US" sz="3400" dirty="0"/>
+          </a:p>
+        </p:txBody>
+      </p:sp>
+      <p:sp>
+        <p:nvSpPr>
+          <p:cNvPr id="11" name="Text 9"/>
+          <p:cNvSpPr/>
+          <p:nvPr/>
+        </p:nvSpPr>
+        <p:spPr>
+          <a:xfrm>
+            <a:off x="868680" y="1508760"/>
+            <a:ext cx="6537960" cy="4160520"/>
           </a:xfrm>
           <a:prstGeom prst="rect">
             <a:avLst/>
@@ -6860,7 +7102,7 @@
           <a:lstStyle/>
           <a:p>
             <a:r>
-              <a:rPr lang="en-US" sz="1700" dirty="0">
+              <a:rPr lang="en-US" sz="2100" dirty="0">
                 <a:solidFill>
                   <a:srgbClr val="17364A"/>
                 </a:solidFill>
@@ -6870,11 +7112,11 @@
               </a:rPr>
               <a:t>Where does your agency receive, review, or process case reports today?</a:t>
             </a:r>
-            <a:endParaRPr lang="en-US" sz="1700" dirty="0"/>
-          </a:p>
-          <a:p>
-            <a:r>
-              <a:rPr lang="en-US" sz="1700" dirty="0">
+            <a:endParaRPr lang="en-US" sz="2100" dirty="0"/>
+          </a:p>
+          <a:p>
+            <a:r>
+              <a:rPr lang="en-US" sz="2100" dirty="0">
                 <a:solidFill>
                   <a:srgbClr val="17364A"/>
                 </a:solidFill>
@@ -6884,11 +7126,11 @@
               </a:rPr>
               <a:t>Which steps are automated and which remain manual?</a:t>
             </a:r>
-            <a:endParaRPr lang="en-US" sz="1700" dirty="0"/>
-          </a:p>
-          <a:p>
-            <a:r>
-              <a:rPr lang="en-US" sz="1700" dirty="0">
+            <a:endParaRPr lang="en-US" sz="2100" dirty="0"/>
+          </a:p>
+          <a:p>
+            <a:r>
+              <a:rPr lang="en-US" sz="2100" dirty="0">
                 <a:solidFill>
                   <a:srgbClr val="17364A"/>
                 </a:solidFill>
@@ -6898,13 +7140,13 @@
               </a:rPr>
               <a:t>Where are timeliness, completeness, routing, or duplication problems most common?</a:t>
             </a:r>
-            <a:endParaRPr lang="en-US" sz="1700" dirty="0"/>
-          </a:p>
-        </p:txBody>
-      </p:sp>
-      <p:sp>
-        <p:nvSpPr>
-          <p:cNvPr id="11" name="Shape 9"/>
+            <a:endParaRPr lang="en-US" sz="2100" dirty="0"/>
+          </a:p>
+        </p:txBody>
+      </p:sp>
+      <p:sp>
+        <p:nvSpPr>
+          <p:cNvPr id="12" name="Shape 10"/>
           <p:cNvSpPr/>
           <p:nvPr/>
         </p:nvSpPr>
@@ -6931,14 +7173,14 @@
       </p:sp>
       <p:sp>
         <p:nvSpPr>
-          <p:cNvPr id="12" name="Text 10"/>
+          <p:cNvPr id="13" name="Text 11"/>
           <p:cNvSpPr/>
           <p:nvPr/>
         </p:nvSpPr>
         <p:spPr>
           <a:xfrm>
             <a:off x="8074152" y="1563624"/>
-            <a:ext cx="2825496" cy="201168"/>
+            <a:ext cx="2825496" cy="256032"/>
           </a:xfrm>
           <a:prstGeom prst="rect">
             <a:avLst/>
@@ -6954,7 +7196,7 @@
               <a:buNone/>
             </a:pPr>
             <a:r>
-              <a:rPr lang="en-US" sz="950" b="1" dirty="0">
+              <a:rPr lang="en-US" sz="1300" b="1" dirty="0">
                 <a:solidFill>
                   <a:srgbClr val="0068B7"/>
                 </a:solidFill>
@@ -6964,20 +7206,20 @@
               </a:rPr>
               <a:t>Key idea</a:t>
             </a:r>
-            <a:endParaRPr lang="en-US" sz="950" dirty="0"/>
-          </a:p>
-        </p:txBody>
-      </p:sp>
-      <p:sp>
-        <p:nvSpPr>
-          <p:cNvPr id="13" name="Text 11"/>
-          <p:cNvSpPr/>
-          <p:nvPr/>
-        </p:nvSpPr>
-        <p:spPr>
-          <a:xfrm>
-            <a:off x="8074152" y="1856232"/>
-            <a:ext cx="2825496" cy="1261872"/>
+            <a:endParaRPr lang="en-US" sz="1300" dirty="0"/>
+          </a:p>
+        </p:txBody>
+      </p:sp>
+      <p:sp>
+        <p:nvSpPr>
+          <p:cNvPr id="14" name="Text 12"/>
+          <p:cNvSpPr/>
+          <p:nvPr/>
+        </p:nvSpPr>
+        <p:spPr>
+          <a:xfrm>
+            <a:off x="8074152" y="1920240"/>
+            <a:ext cx="2825496" cy="1188720"/>
           </a:xfrm>
           <a:prstGeom prst="rect">
             <a:avLst/>
@@ -6995,7 +7237,7 @@
               <a:buNone/>
             </a:pPr>
             <a:r>
-              <a:rPr lang="en-US" sz="1250" dirty="0">
+              <a:rPr lang="en-US" sz="1550" dirty="0">
                 <a:solidFill>
                   <a:srgbClr val="17364A"/>
                 </a:solidFill>
@@ -7005,13 +7247,13 @@
               </a:rPr>
               <a:t>Where does your agency receive, review, or process case reports today?</a:t>
             </a:r>
-            <a:endParaRPr lang="en-US" sz="1250" dirty="0"/>
-          </a:p>
-        </p:txBody>
-      </p:sp>
-      <p:sp>
-        <p:nvSpPr>
-          <p:cNvPr id="14" name="Shape 12"/>
+            <a:endParaRPr lang="en-US" sz="1550" dirty="0"/>
+          </a:p>
+        </p:txBody>
+      </p:sp>
+      <p:sp>
+        <p:nvSpPr>
+          <p:cNvPr id="15" name="Shape 13"/>
           <p:cNvSpPr/>
           <p:nvPr/>
         </p:nvSpPr>
@@ -7038,14 +7280,14 @@
       </p:sp>
       <p:sp>
         <p:nvSpPr>
-          <p:cNvPr id="15" name="Text 13"/>
+          <p:cNvPr id="16" name="Text 14"/>
           <p:cNvSpPr/>
           <p:nvPr/>
         </p:nvSpPr>
         <p:spPr>
           <a:xfrm>
             <a:off x="8074152" y="3666744"/>
-            <a:ext cx="2825496" cy="201168"/>
+            <a:ext cx="2825496" cy="256032"/>
           </a:xfrm>
           <a:prstGeom prst="rect">
             <a:avLst/>
@@ -7061,7 +7303,7 @@
               <a:buNone/>
             </a:pPr>
             <a:r>
-              <a:rPr lang="en-US" sz="950" b="1" dirty="0">
+              <a:rPr lang="en-US" sz="1300" b="1" dirty="0">
                 <a:solidFill>
                   <a:srgbClr val="0068B7"/>
                 </a:solidFill>
@@ -7071,20 +7313,20 @@
               </a:rPr>
               <a:t>Use this for</a:t>
             </a:r>
-            <a:endParaRPr lang="en-US" sz="950" dirty="0"/>
-          </a:p>
-        </p:txBody>
-      </p:sp>
-      <p:sp>
-        <p:nvSpPr>
-          <p:cNvPr id="16" name="Text 14"/>
-          <p:cNvSpPr/>
-          <p:nvPr/>
-        </p:nvSpPr>
-        <p:spPr>
-          <a:xfrm>
-            <a:off x="8074152" y="3959352"/>
-            <a:ext cx="2825496" cy="1170432"/>
+            <a:endParaRPr lang="en-US" sz="1300" dirty="0"/>
+          </a:p>
+        </p:txBody>
+      </p:sp>
+      <p:sp>
+        <p:nvSpPr>
+          <p:cNvPr id="17" name="Text 15"/>
+          <p:cNvSpPr/>
+          <p:nvPr/>
+        </p:nvSpPr>
+        <p:spPr>
+          <a:xfrm>
+            <a:off x="8074152" y="4023360"/>
+            <a:ext cx="2825496" cy="1097280"/>
           </a:xfrm>
           <a:prstGeom prst="rect">
             <a:avLst/>
@@ -7102,7 +7344,7 @@
               <a:buNone/>
             </a:pPr>
             <a:r>
-              <a:rPr lang="en-US" sz="1250" dirty="0">
+              <a:rPr lang="en-US" sz="1550" dirty="0">
                 <a:solidFill>
                   <a:srgbClr val="17364A"/>
                 </a:solidFill>
@@ -7112,7 +7354,7 @@
               </a:rPr>
               <a:t>Connect the concept to public health decisions, safeguards, documentation, or implementation work.</a:t>
             </a:r>
-            <a:endParaRPr lang="en-US" sz="1250" dirty="0"/>
+            <a:endParaRPr lang="en-US" sz="1550" dirty="0"/>
           </a:p>
         </p:txBody>
       </p:sp>
@@ -7309,7 +7551,7 @@
                 <a:ea typeface="Aptos" pitchFamily="34" charset="-122"/>
                 <a:cs typeface="Aptos" pitchFamily="34" charset="-120"/>
               </a:rPr>
-              <a:t>© Paula Soper</a:t>
+              <a:t>Â© Paula Soper</a:t>
             </a:r>
             <a:endParaRPr lang="en-US" sz="800" dirty="0"/>
           </a:p>
@@ -7323,8 +7565,47 @@
         </p:nvSpPr>
         <p:spPr>
           <a:xfrm>
+            <a:off x="11137392" y="6510528"/>
+            <a:ext cx="411480" cy="201168"/>
+          </a:xfrm>
+          <a:prstGeom prst="rect">
+            <a:avLst/>
+          </a:prstGeom>
+          <a:noFill/>
+          <a:ln/>
+        </p:spPr>
+        <p:txBody>
+          <a:bodyPr wrap="square" lIns="0" tIns="0" rIns="0" bIns="0" rtlCol="0" anchor="ctr"/>
+          <a:lstStyle/>
+          <a:p>
+            <a:pPr algn="r" indent="0" marL="0">
+              <a:buNone/>
+            </a:pPr>
+            <a:r>
+              <a:rPr lang="en-US" sz="900" dirty="0">
+                <a:solidFill>
+                  <a:srgbClr val="5F7181"/>
+                </a:solidFill>
+                <a:latin typeface="Aptos" pitchFamily="34" charset="0"/>
+                <a:ea typeface="Aptos" pitchFamily="34" charset="-122"/>
+                <a:cs typeface="Aptos" pitchFamily="34" charset="-120"/>
+              </a:rPr>
+              <a:t>17</a:t>
+            </a:r>
+            <a:endParaRPr lang="en-US" sz="900" dirty="0"/>
+          </a:p>
+        </p:txBody>
+      </p:sp>
+      <p:sp>
+        <p:nvSpPr>
+          <p:cNvPr id="8" name="Text 6"/>
+          <p:cNvSpPr/>
+          <p:nvPr/>
+        </p:nvSpPr>
+        <p:spPr>
+          <a:xfrm>
             <a:off x="640080" y="658368"/>
-            <a:ext cx="10881360" cy="566928"/>
+            <a:ext cx="10881360" cy="713232"/>
           </a:xfrm>
           <a:prstGeom prst="rect">
             <a:avLst/>
@@ -7342,7 +7623,7 @@
               <a:buNone/>
             </a:pPr>
             <a:r>
-              <a:rPr lang="en-US" sz="2700" b="1" dirty="0">
+              <a:rPr lang="en-US" sz="3400" b="1" dirty="0">
                 <a:solidFill>
                   <a:srgbClr val="003A63"/>
                 </a:solidFill>
@@ -7352,20 +7633,20 @@
               </a:rPr>
               <a:t>Reflection Questions Continued</a:t>
             </a:r>
-            <a:endParaRPr lang="en-US" sz="2700" dirty="0"/>
-          </a:p>
-        </p:txBody>
-      </p:sp>
-      <p:sp>
-        <p:nvSpPr>
-          <p:cNvPr id="8" name="Text 6"/>
-          <p:cNvSpPr/>
-          <p:nvPr/>
-        </p:nvSpPr>
-        <p:spPr>
-          <a:xfrm>
-            <a:off x="868680" y="1417320"/>
-            <a:ext cx="6675120" cy="4434840"/>
+            <a:endParaRPr lang="en-US" sz="3400" dirty="0"/>
+          </a:p>
+        </p:txBody>
+      </p:sp>
+      <p:sp>
+        <p:nvSpPr>
+          <p:cNvPr id="9" name="Text 7"/>
+          <p:cNvSpPr/>
+          <p:nvPr/>
+        </p:nvSpPr>
+        <p:spPr>
+          <a:xfrm>
+            <a:off x="868680" y="1508760"/>
+            <a:ext cx="6537960" cy="4160520"/>
           </a:xfrm>
           <a:prstGeom prst="rect">
             <a:avLst/>
@@ -7380,7 +7661,7 @@
           <a:lstStyle/>
           <a:p>
             <a:r>
-              <a:rPr lang="en-US" sz="1700" dirty="0">
+              <a:rPr lang="en-US" sz="2100" dirty="0">
                 <a:solidFill>
                   <a:srgbClr val="17364A"/>
                 </a:solidFill>
@@ -7390,11 +7671,11 @@
               </a:rPr>
               <a:t>Which eCR tasks could AI support safely?</a:t>
             </a:r>
-            <a:endParaRPr lang="en-US" sz="1700" dirty="0"/>
-          </a:p>
-          <a:p>
-            <a:r>
-              <a:rPr lang="en-US" sz="1700" dirty="0">
+            <a:endParaRPr lang="en-US" sz="2100" dirty="0"/>
+          </a:p>
+          <a:p>
+            <a:r>
+              <a:rPr lang="en-US" sz="2100" dirty="0">
                 <a:solidFill>
                   <a:srgbClr val="17364A"/>
                 </a:solidFill>
@@ -7404,13 +7685,13 @@
               </a:rPr>
               <a:t>Which tasks require human review, legal authority, or epidemiologic judgment?</a:t>
             </a:r>
-            <a:endParaRPr lang="en-US" sz="1700" dirty="0"/>
-          </a:p>
-        </p:txBody>
-      </p:sp>
-      <p:sp>
-        <p:nvSpPr>
-          <p:cNvPr id="9" name="Shape 7"/>
+            <a:endParaRPr lang="en-US" sz="2100" dirty="0"/>
+          </a:p>
+        </p:txBody>
+      </p:sp>
+      <p:sp>
+        <p:nvSpPr>
+          <p:cNvPr id="10" name="Shape 8"/>
           <p:cNvSpPr/>
           <p:nvPr/>
         </p:nvSpPr>
@@ -7437,14 +7718,14 @@
       </p:sp>
       <p:sp>
         <p:nvSpPr>
-          <p:cNvPr id="10" name="Text 8"/>
+          <p:cNvPr id="11" name="Text 9"/>
           <p:cNvSpPr/>
           <p:nvPr/>
         </p:nvSpPr>
         <p:spPr>
           <a:xfrm>
             <a:off x="8074152" y="1563624"/>
-            <a:ext cx="2825496" cy="201168"/>
+            <a:ext cx="2825496" cy="256032"/>
           </a:xfrm>
           <a:prstGeom prst="rect">
             <a:avLst/>
@@ -7460,7 +7741,7 @@
               <a:buNone/>
             </a:pPr>
             <a:r>
-              <a:rPr lang="en-US" sz="950" b="1" dirty="0">
+              <a:rPr lang="en-US" sz="1300" b="1" dirty="0">
                 <a:solidFill>
                   <a:srgbClr val="0068B7"/>
                 </a:solidFill>
@@ -7470,20 +7751,20 @@
               </a:rPr>
               <a:t>Key idea</a:t>
             </a:r>
-            <a:endParaRPr lang="en-US" sz="950" dirty="0"/>
-          </a:p>
-        </p:txBody>
-      </p:sp>
-      <p:sp>
-        <p:nvSpPr>
-          <p:cNvPr id="11" name="Text 9"/>
-          <p:cNvSpPr/>
-          <p:nvPr/>
-        </p:nvSpPr>
-        <p:spPr>
-          <a:xfrm>
-            <a:off x="8074152" y="1856232"/>
-            <a:ext cx="2825496" cy="1261872"/>
+            <a:endParaRPr lang="en-US" sz="1300" dirty="0"/>
+          </a:p>
+        </p:txBody>
+      </p:sp>
+      <p:sp>
+        <p:nvSpPr>
+          <p:cNvPr id="12" name="Text 10"/>
+          <p:cNvSpPr/>
+          <p:nvPr/>
+        </p:nvSpPr>
+        <p:spPr>
+          <a:xfrm>
+            <a:off x="8074152" y="1920240"/>
+            <a:ext cx="2825496" cy="1188720"/>
           </a:xfrm>
           <a:prstGeom prst="rect">
             <a:avLst/>
@@ -7501,7 +7782,7 @@
               <a:buNone/>
             </a:pPr>
             <a:r>
-              <a:rPr lang="en-US" sz="1250" dirty="0">
+              <a:rPr lang="en-US" sz="1550" dirty="0">
                 <a:solidFill>
                   <a:srgbClr val="17364A"/>
                 </a:solidFill>
@@ -7511,13 +7792,13 @@
               </a:rPr>
               <a:t>Which eCR tasks could AI support safely?</a:t>
             </a:r>
-            <a:endParaRPr lang="en-US" sz="1250" dirty="0"/>
-          </a:p>
-        </p:txBody>
-      </p:sp>
-      <p:sp>
-        <p:nvSpPr>
-          <p:cNvPr id="12" name="Shape 10"/>
+            <a:endParaRPr lang="en-US" sz="1550" dirty="0"/>
+          </a:p>
+        </p:txBody>
+      </p:sp>
+      <p:sp>
+        <p:nvSpPr>
+          <p:cNvPr id="13" name="Shape 11"/>
           <p:cNvSpPr/>
           <p:nvPr/>
         </p:nvSpPr>
@@ -7544,14 +7825,14 @@
       </p:sp>
       <p:sp>
         <p:nvSpPr>
-          <p:cNvPr id="13" name="Text 11"/>
+          <p:cNvPr id="14" name="Text 12"/>
           <p:cNvSpPr/>
           <p:nvPr/>
         </p:nvSpPr>
         <p:spPr>
           <a:xfrm>
             <a:off x="8074152" y="3666744"/>
-            <a:ext cx="2825496" cy="201168"/>
+            <a:ext cx="2825496" cy="256032"/>
           </a:xfrm>
           <a:prstGeom prst="rect">
             <a:avLst/>
@@ -7567,7 +7848,7 @@
               <a:buNone/>
             </a:pPr>
             <a:r>
-              <a:rPr lang="en-US" sz="950" b="1" dirty="0">
+              <a:rPr lang="en-US" sz="1300" b="1" dirty="0">
                 <a:solidFill>
                   <a:srgbClr val="0068B7"/>
                 </a:solidFill>
@@ -7577,20 +7858,20 @@
               </a:rPr>
               <a:t>Use this for</a:t>
             </a:r>
-            <a:endParaRPr lang="en-US" sz="950" dirty="0"/>
-          </a:p>
-        </p:txBody>
-      </p:sp>
-      <p:sp>
-        <p:nvSpPr>
-          <p:cNvPr id="14" name="Text 12"/>
-          <p:cNvSpPr/>
-          <p:nvPr/>
-        </p:nvSpPr>
-        <p:spPr>
-          <a:xfrm>
-            <a:off x="8074152" y="3959352"/>
-            <a:ext cx="2825496" cy="1170432"/>
+            <a:endParaRPr lang="en-US" sz="1300" dirty="0"/>
+          </a:p>
+        </p:txBody>
+      </p:sp>
+      <p:sp>
+        <p:nvSpPr>
+          <p:cNvPr id="15" name="Text 13"/>
+          <p:cNvSpPr/>
+          <p:nvPr/>
+        </p:nvSpPr>
+        <p:spPr>
+          <a:xfrm>
+            <a:off x="8074152" y="4023360"/>
+            <a:ext cx="2825496" cy="1097280"/>
           </a:xfrm>
           <a:prstGeom prst="rect">
             <a:avLst/>
@@ -7608,7 +7889,7 @@
               <a:buNone/>
             </a:pPr>
             <a:r>
-              <a:rPr lang="en-US" sz="1250" dirty="0">
+              <a:rPr lang="en-US" sz="1550" dirty="0">
                 <a:solidFill>
                   <a:srgbClr val="17364A"/>
                 </a:solidFill>
@@ -7618,7 +7899,7 @@
               </a:rPr>
               <a:t>Connect the concept to public health decisions, safeguards, documentation, or implementation work.</a:t>
             </a:r>
-            <a:endParaRPr lang="en-US" sz="1250" dirty="0"/>
+            <a:endParaRPr lang="en-US" sz="1550" dirty="0"/>
           </a:p>
         </p:txBody>
       </p:sp>
@@ -7815,7 +8096,7 @@
                 <a:ea typeface="Aptos" pitchFamily="34" charset="-122"/>
                 <a:cs typeface="Aptos" pitchFamily="34" charset="-120"/>
               </a:rPr>
-              <a:t>© Paula Soper</a:t>
+              <a:t>Â© Paula Soper</a:t>
             </a:r>
             <a:endParaRPr lang="en-US" sz="800" dirty="0"/>
           </a:p>
@@ -7823,7 +8104,46 @@
       </p:sp>
       <p:sp>
         <p:nvSpPr>
-          <p:cNvPr id="7" name="Shape 5"/>
+          <p:cNvPr id="7" name="Text 5"/>
+          <p:cNvSpPr/>
+          <p:nvPr/>
+        </p:nvSpPr>
+        <p:spPr>
+          <a:xfrm>
+            <a:off x="11137392" y="6510528"/>
+            <a:ext cx="411480" cy="201168"/>
+          </a:xfrm>
+          <a:prstGeom prst="rect">
+            <a:avLst/>
+          </a:prstGeom>
+          <a:noFill/>
+          <a:ln/>
+        </p:spPr>
+        <p:txBody>
+          <a:bodyPr wrap="square" lIns="0" tIns="0" rIns="0" bIns="0" rtlCol="0" anchor="ctr"/>
+          <a:lstStyle/>
+          <a:p>
+            <a:pPr algn="r" indent="0" marL="0">
+              <a:buNone/>
+            </a:pPr>
+            <a:r>
+              <a:rPr lang="en-US" sz="900" dirty="0">
+                <a:solidFill>
+                  <a:srgbClr val="5F7181"/>
+                </a:solidFill>
+                <a:latin typeface="Aptos" pitchFamily="34" charset="0"/>
+                <a:ea typeface="Aptos" pitchFamily="34" charset="-122"/>
+                <a:cs typeface="Aptos" pitchFamily="34" charset="-120"/>
+              </a:rPr>
+              <a:t>18</a:t>
+            </a:r>
+            <a:endParaRPr lang="en-US" sz="900" dirty="0"/>
+          </a:p>
+        </p:txBody>
+      </p:sp>
+      <p:sp>
+        <p:nvSpPr>
+          <p:cNvPr id="8" name="Shape 6"/>
           <p:cNvSpPr/>
           <p:nvPr/>
         </p:nvSpPr>
@@ -7848,7 +8168,7 @@
       </p:sp>
       <p:sp>
         <p:nvSpPr>
-          <p:cNvPr id="8" name="Text 6"/>
+          <p:cNvPr id="9" name="Text 7"/>
           <p:cNvSpPr/>
           <p:nvPr/>
         </p:nvSpPr>
@@ -7887,14 +8207,14 @@
       </p:sp>
       <p:sp>
         <p:nvSpPr>
-          <p:cNvPr id="9" name="Text 7"/>
+          <p:cNvPr id="10" name="Text 8"/>
           <p:cNvSpPr/>
           <p:nvPr/>
         </p:nvSpPr>
         <p:spPr>
           <a:xfrm>
             <a:off x="640080" y="621792"/>
-            <a:ext cx="10881360" cy="566928"/>
+            <a:ext cx="10881360" cy="713232"/>
           </a:xfrm>
           <a:prstGeom prst="rect">
             <a:avLst/>
@@ -7912,7 +8232,7 @@
               <a:buNone/>
             </a:pPr>
             <a:r>
-              <a:rPr lang="en-US" sz="2700" b="1" dirty="0">
+              <a:rPr lang="en-US" sz="3400" b="1" dirty="0">
                 <a:solidFill>
                   <a:srgbClr val="003A63"/>
                 </a:solidFill>
@@ -7922,20 +8242,20 @@
               </a:rPr>
               <a:t>Practical Exercise</a:t>
             </a:r>
-            <a:endParaRPr lang="en-US" sz="2700" dirty="0"/>
-          </a:p>
-        </p:txBody>
-      </p:sp>
-      <p:sp>
-        <p:nvSpPr>
-          <p:cNvPr id="10" name="Text 8"/>
-          <p:cNvSpPr/>
-          <p:nvPr/>
-        </p:nvSpPr>
-        <p:spPr>
-          <a:xfrm>
-            <a:off x="868680" y="1417320"/>
-            <a:ext cx="6675120" cy="4434840"/>
+            <a:endParaRPr lang="en-US" sz="3400" dirty="0"/>
+          </a:p>
+        </p:txBody>
+      </p:sp>
+      <p:sp>
+        <p:nvSpPr>
+          <p:cNvPr id="11" name="Text 9"/>
+          <p:cNvSpPr/>
+          <p:nvPr/>
+        </p:nvSpPr>
+        <p:spPr>
+          <a:xfrm>
+            <a:off x="868680" y="1508760"/>
+            <a:ext cx="6537960" cy="4160520"/>
           </a:xfrm>
           <a:prstGeom prst="rect">
             <a:avLst/>
@@ -7950,7 +8270,7 @@
           <a:lstStyle/>
           <a:p>
             <a:r>
-              <a:rPr lang="en-US" sz="1700" dirty="0">
+              <a:rPr lang="en-US" sz="2100" dirty="0">
                 <a:solidFill>
                   <a:srgbClr val="17364A"/>
                 </a:solidFill>
@@ -7960,11 +8280,11 @@
               </a:rPr>
               <a:t>Create an AI-readiness review for one eCR workflow.</a:t>
             </a:r>
-            <a:endParaRPr lang="en-US" sz="1700" dirty="0"/>
-          </a:p>
-          <a:p>
-            <a:r>
-              <a:rPr lang="en-US" sz="1700" dirty="0">
+            <a:endParaRPr lang="en-US" sz="2100" dirty="0"/>
+          </a:p>
+          <a:p>
+            <a:r>
+              <a:rPr lang="en-US" sz="2100" dirty="0">
                 <a:solidFill>
                   <a:srgbClr val="17364A"/>
                 </a:solidFill>
@@ -7972,15 +8292,15 @@
                 <a:ea typeface="Aptos" pitchFamily="34" charset="-122"/>
                 <a:cs typeface="Aptos" pitchFamily="34" charset="-120"/>
               </a:rPr>
-              <a:t>Map the current workflow, identify data elements required for review, describe common data quality gaps, define the.</a:t>
-            </a:r>
-            <a:endParaRPr lang="en-US" sz="1700" dirty="0"/>
-          </a:p>
-        </p:txBody>
-      </p:sp>
-      <p:sp>
-        <p:nvSpPr>
-          <p:cNvPr id="11" name="Shape 9"/>
+              <a:t>Map the current workflow, identify data elements required for review, describe common data quality.</a:t>
+            </a:r>
+            <a:endParaRPr lang="en-US" sz="2100" dirty="0"/>
+          </a:p>
+        </p:txBody>
+      </p:sp>
+      <p:sp>
+        <p:nvSpPr>
+          <p:cNvPr id="12" name="Shape 10"/>
           <p:cNvSpPr/>
           <p:nvPr/>
         </p:nvSpPr>
@@ -8007,14 +8327,14 @@
       </p:sp>
       <p:sp>
         <p:nvSpPr>
-          <p:cNvPr id="12" name="Text 10"/>
+          <p:cNvPr id="13" name="Text 11"/>
           <p:cNvSpPr/>
           <p:nvPr/>
         </p:nvSpPr>
         <p:spPr>
           <a:xfrm>
             <a:off x="8074152" y="1563624"/>
-            <a:ext cx="2825496" cy="201168"/>
+            <a:ext cx="2825496" cy="256032"/>
           </a:xfrm>
           <a:prstGeom prst="rect">
             <a:avLst/>
@@ -8030,7 +8350,7 @@
               <a:buNone/>
             </a:pPr>
             <a:r>
-              <a:rPr lang="en-US" sz="950" b="1" dirty="0">
+              <a:rPr lang="en-US" sz="1300" b="1" dirty="0">
                 <a:solidFill>
                   <a:srgbClr val="0068B7"/>
                 </a:solidFill>
@@ -8040,20 +8360,20 @@
               </a:rPr>
               <a:t>Key idea</a:t>
             </a:r>
-            <a:endParaRPr lang="en-US" sz="950" dirty="0"/>
-          </a:p>
-        </p:txBody>
-      </p:sp>
-      <p:sp>
-        <p:nvSpPr>
-          <p:cNvPr id="13" name="Text 11"/>
-          <p:cNvSpPr/>
-          <p:nvPr/>
-        </p:nvSpPr>
-        <p:spPr>
-          <a:xfrm>
-            <a:off x="8074152" y="1856232"/>
-            <a:ext cx="2825496" cy="1261872"/>
+            <a:endParaRPr lang="en-US" sz="1300" dirty="0"/>
+          </a:p>
+        </p:txBody>
+      </p:sp>
+      <p:sp>
+        <p:nvSpPr>
+          <p:cNvPr id="14" name="Text 12"/>
+          <p:cNvSpPr/>
+          <p:nvPr/>
+        </p:nvSpPr>
+        <p:spPr>
+          <a:xfrm>
+            <a:off x="8074152" y="1920240"/>
+            <a:ext cx="2825496" cy="1188720"/>
           </a:xfrm>
           <a:prstGeom prst="rect">
             <a:avLst/>
@@ -8071,7 +8391,7 @@
               <a:buNone/>
             </a:pPr>
             <a:r>
-              <a:rPr lang="en-US" sz="1250" dirty="0">
+              <a:rPr lang="en-US" sz="1550" dirty="0">
                 <a:solidFill>
                   <a:srgbClr val="17364A"/>
                 </a:solidFill>
@@ -8081,13 +8401,13 @@
               </a:rPr>
               <a:t>Create an AI-readiness review for one eCR workflow.</a:t>
             </a:r>
-            <a:endParaRPr lang="en-US" sz="1250" dirty="0"/>
-          </a:p>
-        </p:txBody>
-      </p:sp>
-      <p:sp>
-        <p:nvSpPr>
-          <p:cNvPr id="14" name="Shape 12"/>
+            <a:endParaRPr lang="en-US" sz="1550" dirty="0"/>
+          </a:p>
+        </p:txBody>
+      </p:sp>
+      <p:sp>
+        <p:nvSpPr>
+          <p:cNvPr id="15" name="Shape 13"/>
           <p:cNvSpPr/>
           <p:nvPr/>
         </p:nvSpPr>
@@ -8114,14 +8434,14 @@
       </p:sp>
       <p:sp>
         <p:nvSpPr>
-          <p:cNvPr id="15" name="Text 13"/>
+          <p:cNvPr id="16" name="Text 14"/>
           <p:cNvSpPr/>
           <p:nvPr/>
         </p:nvSpPr>
         <p:spPr>
           <a:xfrm>
             <a:off x="8074152" y="3666744"/>
-            <a:ext cx="2825496" cy="201168"/>
+            <a:ext cx="2825496" cy="256032"/>
           </a:xfrm>
           <a:prstGeom prst="rect">
             <a:avLst/>
@@ -8137,7 +8457,7 @@
               <a:buNone/>
             </a:pPr>
             <a:r>
-              <a:rPr lang="en-US" sz="950" b="1" dirty="0">
+              <a:rPr lang="en-US" sz="1300" b="1" dirty="0">
                 <a:solidFill>
                   <a:srgbClr val="0068B7"/>
                 </a:solidFill>
@@ -8147,20 +8467,20 @@
               </a:rPr>
               <a:t>Use this for</a:t>
             </a:r>
-            <a:endParaRPr lang="en-US" sz="950" dirty="0"/>
-          </a:p>
-        </p:txBody>
-      </p:sp>
-      <p:sp>
-        <p:nvSpPr>
-          <p:cNvPr id="16" name="Text 14"/>
-          <p:cNvSpPr/>
-          <p:nvPr/>
-        </p:nvSpPr>
-        <p:spPr>
-          <a:xfrm>
-            <a:off x="8074152" y="3959352"/>
-            <a:ext cx="2825496" cy="1170432"/>
+            <a:endParaRPr lang="en-US" sz="1300" dirty="0"/>
+          </a:p>
+        </p:txBody>
+      </p:sp>
+      <p:sp>
+        <p:nvSpPr>
+          <p:cNvPr id="17" name="Text 15"/>
+          <p:cNvSpPr/>
+          <p:nvPr/>
+        </p:nvSpPr>
+        <p:spPr>
+          <a:xfrm>
+            <a:off x="8074152" y="4023360"/>
+            <a:ext cx="2825496" cy="1097280"/>
           </a:xfrm>
           <a:prstGeom prst="rect">
             <a:avLst/>
@@ -8178,7 +8498,7 @@
               <a:buNone/>
             </a:pPr>
             <a:r>
-              <a:rPr lang="en-US" sz="1250" dirty="0">
+              <a:rPr lang="en-US" sz="1550" dirty="0">
                 <a:solidFill>
                   <a:srgbClr val="17364A"/>
                 </a:solidFill>
@@ -8188,7 +8508,7 @@
               </a:rPr>
               <a:t>Connect the concept to public health decisions, safeguards, documentation, or implementation work.</a:t>
             </a:r>
-            <a:endParaRPr lang="en-US" sz="1250" dirty="0"/>
+            <a:endParaRPr lang="en-US" sz="1550" dirty="0"/>
           </a:p>
         </p:txBody>
       </p:sp>
@@ -8385,7 +8705,7 @@
                 <a:ea typeface="Aptos" pitchFamily="34" charset="-122"/>
                 <a:cs typeface="Aptos" pitchFamily="34" charset="-120"/>
               </a:rPr>
-              <a:t>© Paula Soper</a:t>
+              <a:t>Â© Paula Soper</a:t>
             </a:r>
             <a:endParaRPr lang="en-US" sz="800" dirty="0"/>
           </a:p>
@@ -8393,7 +8713,46 @@
       </p:sp>
       <p:sp>
         <p:nvSpPr>
-          <p:cNvPr id="7" name="Shape 5"/>
+          <p:cNvPr id="7" name="Text 5"/>
+          <p:cNvSpPr/>
+          <p:nvPr/>
+        </p:nvSpPr>
+        <p:spPr>
+          <a:xfrm>
+            <a:off x="11137392" y="6510528"/>
+            <a:ext cx="411480" cy="201168"/>
+          </a:xfrm>
+          <a:prstGeom prst="rect">
+            <a:avLst/>
+          </a:prstGeom>
+          <a:noFill/>
+          <a:ln/>
+        </p:spPr>
+        <p:txBody>
+          <a:bodyPr wrap="square" lIns="0" tIns="0" rIns="0" bIns="0" rtlCol="0" anchor="ctr"/>
+          <a:lstStyle/>
+          <a:p>
+            <a:pPr algn="r" indent="0" marL="0">
+              <a:buNone/>
+            </a:pPr>
+            <a:r>
+              <a:rPr lang="en-US" sz="900" dirty="0">
+                <a:solidFill>
+                  <a:srgbClr val="5F7181"/>
+                </a:solidFill>
+                <a:latin typeface="Aptos" pitchFamily="34" charset="0"/>
+                <a:ea typeface="Aptos" pitchFamily="34" charset="-122"/>
+                <a:cs typeface="Aptos" pitchFamily="34" charset="-120"/>
+              </a:rPr>
+              <a:t>19</a:t>
+            </a:r>
+            <a:endParaRPr lang="en-US" sz="900" dirty="0"/>
+          </a:p>
+        </p:txBody>
+      </p:sp>
+      <p:sp>
+        <p:nvSpPr>
+          <p:cNvPr id="8" name="Shape 6"/>
           <p:cNvSpPr/>
           <p:nvPr/>
         </p:nvSpPr>
@@ -8418,7 +8777,7 @@
       </p:sp>
       <p:sp>
         <p:nvSpPr>
-          <p:cNvPr id="8" name="Text 6"/>
+          <p:cNvPr id="9" name="Text 7"/>
           <p:cNvSpPr/>
           <p:nvPr/>
         </p:nvSpPr>
@@ -8457,14 +8816,14 @@
       </p:sp>
       <p:sp>
         <p:nvSpPr>
-          <p:cNvPr id="9" name="Text 7"/>
+          <p:cNvPr id="10" name="Text 8"/>
           <p:cNvSpPr/>
           <p:nvPr/>
         </p:nvSpPr>
         <p:spPr>
           <a:xfrm>
             <a:off x="640080" y="621792"/>
-            <a:ext cx="10881360" cy="566928"/>
+            <a:ext cx="10881360" cy="713232"/>
           </a:xfrm>
           <a:prstGeom prst="rect">
             <a:avLst/>
@@ -8482,7 +8841,7 @@
               <a:buNone/>
             </a:pPr>
             <a:r>
-              <a:rPr lang="en-US" sz="2700" b="1" dirty="0">
+              <a:rPr lang="en-US" sz="3400" b="1" dirty="0">
                 <a:solidFill>
                   <a:srgbClr val="003A63"/>
                 </a:solidFill>
@@ -8492,20 +8851,20 @@
               </a:rPr>
               <a:t>Expected Artifact or Evidence</a:t>
             </a:r>
-            <a:endParaRPr lang="en-US" sz="2700" dirty="0"/>
-          </a:p>
-        </p:txBody>
-      </p:sp>
-      <p:sp>
-        <p:nvSpPr>
-          <p:cNvPr id="10" name="Text 8"/>
-          <p:cNvSpPr/>
-          <p:nvPr/>
-        </p:nvSpPr>
-        <p:spPr>
-          <a:xfrm>
-            <a:off x="868680" y="1417320"/>
-            <a:ext cx="6675120" cy="4434840"/>
+            <a:endParaRPr lang="en-US" sz="3400" dirty="0"/>
+          </a:p>
+        </p:txBody>
+      </p:sp>
+      <p:sp>
+        <p:nvSpPr>
+          <p:cNvPr id="11" name="Text 9"/>
+          <p:cNvSpPr/>
+          <p:nvPr/>
+        </p:nvSpPr>
+        <p:spPr>
+          <a:xfrm>
+            <a:off x="868680" y="1508760"/>
+            <a:ext cx="6537960" cy="4160520"/>
           </a:xfrm>
           <a:prstGeom prst="rect">
             <a:avLst/>
@@ -8520,7 +8879,7 @@
           <a:lstStyle/>
           <a:p>
             <a:r>
-              <a:rPr lang="en-US" sz="1700" dirty="0">
+              <a:rPr lang="en-US" sz="2100" dirty="0">
                 <a:solidFill>
                   <a:srgbClr val="17364A"/>
                 </a:solidFill>
@@ -8530,11 +8889,11 @@
               </a:rPr>
               <a:t>eCR workflow map</a:t>
             </a:r>
-            <a:endParaRPr lang="en-US" sz="1700" dirty="0"/>
-          </a:p>
-          <a:p>
-            <a:r>
-              <a:rPr lang="en-US" sz="1700" dirty="0">
+            <a:endParaRPr lang="en-US" sz="2100" dirty="0"/>
+          </a:p>
+          <a:p>
+            <a:r>
+              <a:rPr lang="en-US" sz="2100" dirty="0">
                 <a:solidFill>
                   <a:srgbClr val="17364A"/>
                 </a:solidFill>
@@ -8544,11 +8903,11 @@
               </a:rPr>
               <a:t>AI-readiness checklist</a:t>
             </a:r>
-            <a:endParaRPr lang="en-US" sz="1700" dirty="0"/>
-          </a:p>
-          <a:p>
-            <a:r>
-              <a:rPr lang="en-US" sz="1700" dirty="0">
+            <a:endParaRPr lang="en-US" sz="2100" dirty="0"/>
+          </a:p>
+          <a:p>
+            <a:r>
+              <a:rPr lang="en-US" sz="2100" dirty="0">
                 <a:solidFill>
                   <a:srgbClr val="17364A"/>
                 </a:solidFill>
@@ -8558,13 +8917,13 @@
               </a:rPr>
               <a:t>Validation scenarios</a:t>
             </a:r>
-            <a:endParaRPr lang="en-US" sz="1700" dirty="0"/>
-          </a:p>
-        </p:txBody>
-      </p:sp>
-      <p:sp>
-        <p:nvSpPr>
-          <p:cNvPr id="11" name="Shape 9"/>
+            <a:endParaRPr lang="en-US" sz="2100" dirty="0"/>
+          </a:p>
+        </p:txBody>
+      </p:sp>
+      <p:sp>
+        <p:nvSpPr>
+          <p:cNvPr id="12" name="Shape 10"/>
           <p:cNvSpPr/>
           <p:nvPr/>
         </p:nvSpPr>
@@ -8591,14 +8950,14 @@
       </p:sp>
       <p:sp>
         <p:nvSpPr>
-          <p:cNvPr id="12" name="Text 10"/>
+          <p:cNvPr id="13" name="Text 11"/>
           <p:cNvSpPr/>
           <p:nvPr/>
         </p:nvSpPr>
         <p:spPr>
           <a:xfrm>
             <a:off x="8074152" y="1563624"/>
-            <a:ext cx="2825496" cy="201168"/>
+            <a:ext cx="2825496" cy="256032"/>
           </a:xfrm>
           <a:prstGeom prst="rect">
             <a:avLst/>
@@ -8614,7 +8973,7 @@
               <a:buNone/>
             </a:pPr>
             <a:r>
-              <a:rPr lang="en-US" sz="950" b="1" dirty="0">
+              <a:rPr lang="en-US" sz="1300" b="1" dirty="0">
                 <a:solidFill>
                   <a:srgbClr val="0068B7"/>
                 </a:solidFill>
@@ -8624,20 +8983,20 @@
               </a:rPr>
               <a:t>Key idea</a:t>
             </a:r>
-            <a:endParaRPr lang="en-US" sz="950" dirty="0"/>
-          </a:p>
-        </p:txBody>
-      </p:sp>
-      <p:sp>
-        <p:nvSpPr>
-          <p:cNvPr id="13" name="Text 11"/>
-          <p:cNvSpPr/>
-          <p:nvPr/>
-        </p:nvSpPr>
-        <p:spPr>
-          <a:xfrm>
-            <a:off x="8074152" y="1856232"/>
-            <a:ext cx="2825496" cy="1261872"/>
+            <a:endParaRPr lang="en-US" sz="1300" dirty="0"/>
+          </a:p>
+        </p:txBody>
+      </p:sp>
+      <p:sp>
+        <p:nvSpPr>
+          <p:cNvPr id="14" name="Text 12"/>
+          <p:cNvSpPr/>
+          <p:nvPr/>
+        </p:nvSpPr>
+        <p:spPr>
+          <a:xfrm>
+            <a:off x="8074152" y="1920240"/>
+            <a:ext cx="2825496" cy="1188720"/>
           </a:xfrm>
           <a:prstGeom prst="rect">
             <a:avLst/>
@@ -8655,7 +9014,7 @@
               <a:buNone/>
             </a:pPr>
             <a:r>
-              <a:rPr lang="en-US" sz="1250" dirty="0">
+              <a:rPr lang="en-US" sz="1550" dirty="0">
                 <a:solidFill>
                   <a:srgbClr val="17364A"/>
                 </a:solidFill>
@@ -8665,13 +9024,13 @@
               </a:rPr>
               <a:t>eCR workflow map</a:t>
             </a:r>
-            <a:endParaRPr lang="en-US" sz="1250" dirty="0"/>
-          </a:p>
-        </p:txBody>
-      </p:sp>
-      <p:sp>
-        <p:nvSpPr>
-          <p:cNvPr id="14" name="Shape 12"/>
+            <a:endParaRPr lang="en-US" sz="1550" dirty="0"/>
+          </a:p>
+        </p:txBody>
+      </p:sp>
+      <p:sp>
+        <p:nvSpPr>
+          <p:cNvPr id="15" name="Shape 13"/>
           <p:cNvSpPr/>
           <p:nvPr/>
         </p:nvSpPr>
@@ -8698,14 +9057,14 @@
       </p:sp>
       <p:sp>
         <p:nvSpPr>
-          <p:cNvPr id="15" name="Text 13"/>
+          <p:cNvPr id="16" name="Text 14"/>
           <p:cNvSpPr/>
           <p:nvPr/>
         </p:nvSpPr>
         <p:spPr>
           <a:xfrm>
             <a:off x="8074152" y="3666744"/>
-            <a:ext cx="2825496" cy="201168"/>
+            <a:ext cx="2825496" cy="256032"/>
           </a:xfrm>
           <a:prstGeom prst="rect">
             <a:avLst/>
@@ -8721,7 +9080,7 @@
               <a:buNone/>
             </a:pPr>
             <a:r>
-              <a:rPr lang="en-US" sz="950" b="1" dirty="0">
+              <a:rPr lang="en-US" sz="1300" b="1" dirty="0">
                 <a:solidFill>
                   <a:srgbClr val="0068B7"/>
                 </a:solidFill>
@@ -8731,20 +9090,20 @@
               </a:rPr>
               <a:t>Use this for</a:t>
             </a:r>
-            <a:endParaRPr lang="en-US" sz="950" dirty="0"/>
-          </a:p>
-        </p:txBody>
-      </p:sp>
-      <p:sp>
-        <p:nvSpPr>
-          <p:cNvPr id="16" name="Text 14"/>
-          <p:cNvSpPr/>
-          <p:nvPr/>
-        </p:nvSpPr>
-        <p:spPr>
-          <a:xfrm>
-            <a:off x="8074152" y="3959352"/>
-            <a:ext cx="2825496" cy="1170432"/>
+            <a:endParaRPr lang="en-US" sz="1300" dirty="0"/>
+          </a:p>
+        </p:txBody>
+      </p:sp>
+      <p:sp>
+        <p:nvSpPr>
+          <p:cNvPr id="17" name="Text 15"/>
+          <p:cNvSpPr/>
+          <p:nvPr/>
+        </p:nvSpPr>
+        <p:spPr>
+          <a:xfrm>
+            <a:off x="8074152" y="4023360"/>
+            <a:ext cx="2825496" cy="1097280"/>
           </a:xfrm>
           <a:prstGeom prst="rect">
             <a:avLst/>
@@ -8762,7 +9121,7 @@
               <a:buNone/>
             </a:pPr>
             <a:r>
-              <a:rPr lang="en-US" sz="1250" dirty="0">
+              <a:rPr lang="en-US" sz="1550" dirty="0">
                 <a:solidFill>
                   <a:srgbClr val="17364A"/>
                 </a:solidFill>
@@ -8772,7 +9131,7 @@
               </a:rPr>
               <a:t>Connect the concept to public health decisions, safeguards, documentation, or implementation work.</a:t>
             </a:r>
-            <a:endParaRPr lang="en-US" sz="1250" dirty="0"/>
+            <a:endParaRPr lang="en-US" sz="1550" dirty="0"/>
           </a:p>
         </p:txBody>
       </p:sp>
@@ -8969,7 +9328,7 @@
                 <a:ea typeface="Aptos" pitchFamily="34" charset="-122"/>
                 <a:cs typeface="Aptos" pitchFamily="34" charset="-120"/>
               </a:rPr>
-              <a:t>© Paula Soper</a:t>
+              <a:t>Â© Paula Soper</a:t>
             </a:r>
             <a:endParaRPr lang="en-US" sz="800" dirty="0"/>
           </a:p>
@@ -8983,8 +9342,47 @@
         </p:nvSpPr>
         <p:spPr>
           <a:xfrm>
+            <a:off x="11137392" y="6510528"/>
+            <a:ext cx="411480" cy="201168"/>
+          </a:xfrm>
+          <a:prstGeom prst="rect">
+            <a:avLst/>
+          </a:prstGeom>
+          <a:noFill/>
+          <a:ln/>
+        </p:spPr>
+        <p:txBody>
+          <a:bodyPr wrap="square" lIns="0" tIns="0" rIns="0" bIns="0" rtlCol="0" anchor="ctr"/>
+          <a:lstStyle/>
+          <a:p>
+            <a:pPr algn="r" indent="0" marL="0">
+              <a:buNone/>
+            </a:pPr>
+            <a:r>
+              <a:rPr lang="en-US" sz="900" dirty="0">
+                <a:solidFill>
+                  <a:srgbClr val="5F7181"/>
+                </a:solidFill>
+                <a:latin typeface="Aptos" pitchFamily="34" charset="0"/>
+                <a:ea typeface="Aptos" pitchFamily="34" charset="-122"/>
+                <a:cs typeface="Aptos" pitchFamily="34" charset="-120"/>
+              </a:rPr>
+              <a:t>2</a:t>
+            </a:r>
+            <a:endParaRPr lang="en-US" sz="900" dirty="0"/>
+          </a:p>
+        </p:txBody>
+      </p:sp>
+      <p:sp>
+        <p:nvSpPr>
+          <p:cNvPr id="8" name="Text 6"/>
+          <p:cNvSpPr/>
+          <p:nvPr/>
+        </p:nvSpPr>
+        <p:spPr>
+          <a:xfrm>
             <a:off x="640080" y="658368"/>
-            <a:ext cx="10881360" cy="566928"/>
+            <a:ext cx="10881360" cy="713232"/>
           </a:xfrm>
           <a:prstGeom prst="rect">
             <a:avLst/>
@@ -9002,7 +9400,7 @@
               <a:buNone/>
             </a:pPr>
             <a:r>
-              <a:rPr lang="en-US" sz="2700" b="1" dirty="0">
+              <a:rPr lang="en-US" sz="3400" b="1" dirty="0">
                 <a:solidFill>
                   <a:srgbClr val="003A63"/>
                 </a:solidFill>
@@ -9012,20 +9410,20 @@
               </a:rPr>
               <a:t>What this module helps you do</a:t>
             </a:r>
-            <a:endParaRPr lang="en-US" sz="2700" dirty="0"/>
-          </a:p>
-        </p:txBody>
-      </p:sp>
-      <p:sp>
-        <p:nvSpPr>
-          <p:cNvPr id="8" name="Text 6"/>
-          <p:cNvSpPr/>
-          <p:nvPr/>
-        </p:nvSpPr>
-        <p:spPr>
-          <a:xfrm>
-            <a:off x="868680" y="1417320"/>
-            <a:ext cx="6675120" cy="3291840"/>
+            <a:endParaRPr lang="en-US" sz="3400" dirty="0"/>
+          </a:p>
+        </p:txBody>
+      </p:sp>
+      <p:sp>
+        <p:nvSpPr>
+          <p:cNvPr id="9" name="Text 7"/>
+          <p:cNvSpPr/>
+          <p:nvPr/>
+        </p:nvSpPr>
+        <p:spPr>
+          <a:xfrm>
+            <a:off x="868680" y="1508760"/>
+            <a:ext cx="6446520" cy="2926080"/>
           </a:xfrm>
           <a:prstGeom prst="rect">
             <a:avLst/>
@@ -9040,7 +9438,7 @@
           <a:lstStyle/>
           <a:p>
             <a:r>
-              <a:rPr lang="en-US" sz="1700" dirty="0">
+              <a:rPr lang="en-US" sz="2100" dirty="0">
                 <a:solidFill>
                   <a:srgbClr val="17364A"/>
                 </a:solidFill>
@@ -9050,11 +9448,11 @@
               </a:rPr>
               <a:t>Electronic case reporting is one of the clearest examples of public health automation.</a:t>
             </a:r>
-            <a:endParaRPr lang="en-US" sz="1700" dirty="0"/>
-          </a:p>
-          <a:p>
-            <a:r>
-              <a:rPr lang="en-US" sz="1700" dirty="0">
+            <a:endParaRPr lang="en-US" sz="2100" dirty="0"/>
+          </a:p>
+          <a:p>
+            <a:r>
+              <a:rPr lang="en-US" sz="2100" dirty="0">
                 <a:solidFill>
                   <a:srgbClr val="17364A"/>
                 </a:solidFill>
@@ -9062,13 +9460,13 @@
                 <a:ea typeface="Aptos" pitchFamily="34" charset="-122"/>
                 <a:cs typeface="Aptos" pitchFamily="34" charset="-120"/>
               </a:rPr>
-              <a:t>It uses data from electronic health records and reporting logic to support more timely case reporting to public health agencies.</a:t>
-            </a:r>
-            <a:endParaRPr lang="en-US" sz="1700" dirty="0"/>
-          </a:p>
-          <a:p>
-            <a:r>
-              <a:rPr lang="en-US" sz="1700" dirty="0">
+              <a:t>It uses data from electronic health records and reporting logic to support more timely case reporting to public.</a:t>
+            </a:r>
+            <a:endParaRPr lang="en-US" sz="2100" dirty="0"/>
+          </a:p>
+          <a:p>
+            <a:r>
+              <a:rPr lang="en-US" sz="2100" dirty="0">
                 <a:solidFill>
                   <a:srgbClr val="17364A"/>
                 </a:solidFill>
@@ -9076,15 +9474,15 @@
                 <a:ea typeface="Aptos" pitchFamily="34" charset="-122"/>
                 <a:cs typeface="Aptos" pitchFamily="34" charset="-120"/>
               </a:rPr>
-              <a:t>This module teaches learners how eCR works technically and how AI might support eCR-related workflows without replacing public health authority,.</a:t>
-            </a:r>
-            <a:endParaRPr lang="en-US" sz="1700" dirty="0"/>
-          </a:p>
-        </p:txBody>
-      </p:sp>
-      <p:sp>
-        <p:nvSpPr>
-          <p:cNvPr id="9" name="Shape 7"/>
+              <a:t>This module teaches learners how eCR works technically and how AI might support eCR-related workflows without.</a:t>
+            </a:r>
+            <a:endParaRPr lang="en-US" sz="2100" dirty="0"/>
+          </a:p>
+        </p:txBody>
+      </p:sp>
+      <p:sp>
+        <p:nvSpPr>
+          <p:cNvPr id="10" name="Shape 8"/>
           <p:cNvSpPr/>
           <p:nvPr/>
         </p:nvSpPr>
@@ -9111,14 +9509,14 @@
       </p:sp>
       <p:sp>
         <p:nvSpPr>
-          <p:cNvPr id="10" name="Text 8"/>
+          <p:cNvPr id="11" name="Text 9"/>
           <p:cNvSpPr/>
           <p:nvPr/>
         </p:nvSpPr>
         <p:spPr>
           <a:xfrm>
             <a:off x="8074152" y="1563624"/>
-            <a:ext cx="2825496" cy="201168"/>
+            <a:ext cx="2825496" cy="256032"/>
           </a:xfrm>
           <a:prstGeom prst="rect">
             <a:avLst/>
@@ -9134,7 +9532,7 @@
               <a:buNone/>
             </a:pPr>
             <a:r>
-              <a:rPr lang="en-US" sz="950" b="1" dirty="0">
+              <a:rPr lang="en-US" sz="1300" b="1" dirty="0">
                 <a:solidFill>
                   <a:srgbClr val="0068B7"/>
                 </a:solidFill>
@@ -9144,20 +9542,20 @@
               </a:rPr>
               <a:t>Module details</a:t>
             </a:r>
-            <a:endParaRPr lang="en-US" sz="950" dirty="0"/>
-          </a:p>
-        </p:txBody>
-      </p:sp>
-      <p:sp>
-        <p:nvSpPr>
-          <p:cNvPr id="11" name="Text 9"/>
-          <p:cNvSpPr/>
-          <p:nvPr/>
-        </p:nvSpPr>
-        <p:spPr>
-          <a:xfrm>
-            <a:off x="8074152" y="1856232"/>
-            <a:ext cx="2825496" cy="1353312"/>
+            <a:endParaRPr lang="en-US" sz="1300" dirty="0"/>
+          </a:p>
+        </p:txBody>
+      </p:sp>
+      <p:sp>
+        <p:nvSpPr>
+          <p:cNvPr id="12" name="Text 10"/>
+          <p:cNvSpPr/>
+          <p:nvPr/>
+        </p:nvSpPr>
+        <p:spPr>
+          <a:xfrm>
+            <a:off x="8074152" y="1920240"/>
+            <a:ext cx="2825496" cy="1280160"/>
           </a:xfrm>
           <a:prstGeom prst="rect">
             <a:avLst/>
@@ -9175,7 +9573,7 @@
               <a:buNone/>
             </a:pPr>
             <a:r>
-              <a:rPr lang="en-US" sz="1250" dirty="0">
+              <a:rPr lang="en-US" sz="1550" dirty="0">
                 <a:solidFill>
                   <a:srgbClr val="17364A"/>
                 </a:solidFill>
@@ -9185,14 +9583,14 @@
               </a:rPr>
               <a:t>Level: applied/foundational</a:t>
             </a:r>
-            <a:endParaRPr lang="en-US" sz="1250" dirty="0"/>
+            <a:endParaRPr lang="en-US" sz="1550" dirty="0"/>
           </a:p>
           <a:p>
             <a:pPr indent="0" marL="0">
               <a:buNone/>
             </a:pPr>
             <a:r>
-              <a:rPr lang="en-US" sz="1250" dirty="0">
+              <a:rPr lang="en-US" sz="1550" dirty="0">
                 <a:solidFill>
                   <a:srgbClr val="17364A"/>
                 </a:solidFill>
@@ -9202,14 +9600,14 @@
               </a:rPr>
               <a:t>Primary track: Technical Architecture Track</a:t>
             </a:r>
-            <a:endParaRPr lang="en-US" sz="1250" dirty="0"/>
+            <a:endParaRPr lang="en-US" sz="1550" dirty="0"/>
           </a:p>
           <a:p>
             <a:pPr indent="0" marL="0">
               <a:buNone/>
             </a:pPr>
             <a:r>
-              <a:rPr lang="en-US" sz="1250" dirty="0">
+              <a:rPr lang="en-US" sz="1550" dirty="0">
                 <a:solidFill>
                   <a:srgbClr val="17364A"/>
                 </a:solidFill>
@@ -9219,32 +9617,32 @@
               </a:rPr>
               <a:t>Appears in tracks: technical-architecture</a:t>
             </a:r>
-            <a:endParaRPr lang="en-US" sz="1250" dirty="0"/>
-          </a:p>
-        </p:txBody>
-      </p:sp>
-      <p:sp>
-        <p:nvSpPr>
-          <p:cNvPr id="12" name="Shape 10"/>
-          <p:cNvSpPr/>
-          <p:nvPr/>
-        </p:nvSpPr>
-        <p:spPr>
-          <a:xfrm>
-            <a:off x="7909560" y="3611880"/>
-            <a:ext cx="3154680" cy="1783080"/>
+            <a:endParaRPr lang="en-US" sz="1550" dirty="0"/>
+          </a:p>
+        </p:txBody>
+      </p:sp>
+      <p:sp>
+        <p:nvSpPr>
+          <p:cNvPr id="13" name="Shape 11"/>
+          <p:cNvSpPr/>
+          <p:nvPr/>
+        </p:nvSpPr>
+        <p:spPr>
+          <a:xfrm>
+            <a:off x="7635240" y="3730752"/>
+            <a:ext cx="1033272" cy="749808"/>
           </a:xfrm>
           <a:prstGeom prst="roundRect">
             <a:avLst>
-              <a:gd name="adj" fmla="val 6154"/>
+              <a:gd name="adj" fmla="val 14634"/>
             </a:avLst>
           </a:prstGeom>
           <a:solidFill>
-            <a:srgbClr val="EEF8ED"/>
+            <a:srgbClr val="0068B7"/>
           </a:solidFill>
           <a:ln w="12700">
             <a:solidFill>
-              <a:srgbClr val="B9D7E6"/>
+              <a:srgbClr val="0068B7"/>
             </a:solidFill>
             <a:prstDash val="solid"/>
           </a:ln>
@@ -9252,81 +9650,256 @@
       </p:sp>
       <p:sp>
         <p:nvSpPr>
-          <p:cNvPr id="13" name="Text 11"/>
-          <p:cNvSpPr/>
-          <p:nvPr/>
-        </p:nvSpPr>
-        <p:spPr>
-          <a:xfrm>
-            <a:off x="8074152" y="3758184"/>
-            <a:ext cx="2825496" cy="201168"/>
-          </a:xfrm>
-          <a:prstGeom prst="rect">
-            <a:avLst/>
-          </a:prstGeom>
-          <a:noFill/>
-          <a:ln/>
-        </p:spPr>
-        <p:txBody>
-          <a:bodyPr wrap="square" lIns="0" tIns="0" rIns="0" bIns="0" rtlCol="0" anchor="ctr"/>
-          <a:lstStyle/>
-          <a:p>
-            <a:pPr indent="0" marL="0">
-              <a:buNone/>
-            </a:pPr>
-            <a:r>
-              <a:rPr lang="en-US" sz="950" b="1" dirty="0">
-                <a:solidFill>
-                  <a:srgbClr val="0068B7"/>
-                </a:solidFill>
-                <a:latin typeface="Aptos" pitchFamily="34" charset="0"/>
-                <a:ea typeface="Aptos" pitchFamily="34" charset="-122"/>
-                <a:cs typeface="Aptos" pitchFamily="34" charset="-120"/>
-              </a:rPr>
-              <a:t>Learning approach</a:t>
-            </a:r>
-            <a:endParaRPr lang="en-US" sz="950" dirty="0"/>
-          </a:p>
-        </p:txBody>
-      </p:sp>
-      <p:sp>
-        <p:nvSpPr>
           <p:cNvPr id="14" name="Text 12"/>
           <p:cNvSpPr/>
           <p:nvPr/>
         </p:nvSpPr>
         <p:spPr>
           <a:xfrm>
-            <a:off x="8074152" y="4050792"/>
-            <a:ext cx="2825496" cy="1216152"/>
-          </a:xfrm>
-          <a:prstGeom prst="rect">
-            <a:avLst/>
-          </a:prstGeom>
-          <a:noFill/>
-          <a:ln/>
-        </p:spPr>
-        <p:txBody>
-          <a:bodyPr wrap="square" lIns="0" tIns="0" rIns="0" bIns="0" rtlCol="0" anchor="t">
+            <a:off x="7708392" y="3922776"/>
+            <a:ext cx="886968" cy="310896"/>
+          </a:xfrm>
+          <a:prstGeom prst="rect">
+            <a:avLst/>
+          </a:prstGeom>
+          <a:noFill/>
+          <a:ln/>
+        </p:spPr>
+        <p:txBody>
+          <a:bodyPr wrap="square" lIns="0" tIns="0" rIns="0" bIns="0" rtlCol="0" anchor="ctr">
             <a:normAutofit/>
           </a:bodyPr>
           <a:lstStyle/>
           <a:p>
-            <a:pPr indent="0" marL="0">
-              <a:buNone/>
-            </a:pPr>
-            <a:r>
-              <a:rPr lang="en-US" sz="1250" dirty="0">
-                <a:solidFill>
-                  <a:srgbClr val="17364A"/>
-                </a:solidFill>
-                <a:latin typeface="Aptos" pitchFamily="34" charset="0"/>
-                <a:ea typeface="Aptos" pitchFamily="34" charset="-122"/>
-                <a:cs typeface="Aptos" pitchFamily="34" charset="-120"/>
-              </a:rPr>
-              <a:t>Review the core ideas, complete the practical exercise, check your understanding, and use the related plays and tools to apply the lesson.</a:t>
-            </a:r>
-            <a:endParaRPr lang="en-US" sz="1250" dirty="0"/>
+            <a:pPr algn="ctr" indent="0" marL="0">
+              <a:buNone/>
+            </a:pPr>
+            <a:r>
+              <a:rPr lang="en-US" sz="1500" b="1" dirty="0">
+                <a:solidFill>
+                  <a:srgbClr val="FFFFFF"/>
+                </a:solidFill>
+                <a:latin typeface="Aptos" pitchFamily="34" charset="0"/>
+                <a:ea typeface="Aptos" pitchFamily="34" charset="-122"/>
+                <a:cs typeface="Aptos" pitchFamily="34" charset="-120"/>
+              </a:rPr>
+              <a:t>Learn</a:t>
+            </a:r>
+            <a:endParaRPr lang="en-US" sz="1500" dirty="0"/>
+          </a:p>
+        </p:txBody>
+      </p:sp>
+      <p:sp>
+        <p:nvSpPr>
+          <p:cNvPr id="15" name="Text 13"/>
+          <p:cNvSpPr/>
+          <p:nvPr/>
+        </p:nvSpPr>
+        <p:spPr>
+          <a:xfrm>
+            <a:off x="8695944" y="3941064"/>
+            <a:ext cx="201168" cy="256032"/>
+          </a:xfrm>
+          <a:prstGeom prst="rect">
+            <a:avLst/>
+          </a:prstGeom>
+          <a:noFill/>
+          <a:ln/>
+        </p:spPr>
+        <p:txBody>
+          <a:bodyPr wrap="square" lIns="0" tIns="0" rIns="0" bIns="0" rtlCol="0" anchor="ctr"/>
+          <a:lstStyle/>
+          <a:p>
+            <a:pPr algn="ctr" indent="0" marL="0">
+              <a:buNone/>
+            </a:pPr>
+            <a:r>
+              <a:rPr lang="en-US" sz="1800" b="1" dirty="0">
+                <a:solidFill>
+                  <a:srgbClr val="0068B7"/>
+                </a:solidFill>
+                <a:latin typeface="Aptos" pitchFamily="34" charset="0"/>
+                <a:ea typeface="Aptos" pitchFamily="34" charset="-122"/>
+                <a:cs typeface="Aptos" pitchFamily="34" charset="-120"/>
+              </a:rPr>
+              <a:t>â†’</a:t>
+            </a:r>
+            <a:endParaRPr lang="en-US" sz="1800" dirty="0"/>
+          </a:p>
+        </p:txBody>
+      </p:sp>
+      <p:sp>
+        <p:nvSpPr>
+          <p:cNvPr id="16" name="Shape 14"/>
+          <p:cNvSpPr/>
+          <p:nvPr/>
+        </p:nvSpPr>
+        <p:spPr>
+          <a:xfrm>
+            <a:off x="8924544" y="3730752"/>
+            <a:ext cx="1033272" cy="749808"/>
+          </a:xfrm>
+          <a:prstGeom prst="roundRect">
+            <a:avLst>
+              <a:gd name="adj" fmla="val 14634"/>
+            </a:avLst>
+          </a:prstGeom>
+          <a:solidFill>
+            <a:srgbClr val="2F8A28"/>
+          </a:solidFill>
+          <a:ln w="12700">
+            <a:solidFill>
+              <a:srgbClr val="2F8A28"/>
+            </a:solidFill>
+            <a:prstDash val="solid"/>
+          </a:ln>
+        </p:spPr>
+      </p:sp>
+      <p:sp>
+        <p:nvSpPr>
+          <p:cNvPr id="17" name="Text 15"/>
+          <p:cNvSpPr/>
+          <p:nvPr/>
+        </p:nvSpPr>
+        <p:spPr>
+          <a:xfrm>
+            <a:off x="8997696" y="3922776"/>
+            <a:ext cx="886968" cy="310896"/>
+          </a:xfrm>
+          <a:prstGeom prst="rect">
+            <a:avLst/>
+          </a:prstGeom>
+          <a:noFill/>
+          <a:ln/>
+        </p:spPr>
+        <p:txBody>
+          <a:bodyPr wrap="square" lIns="0" tIns="0" rIns="0" bIns="0" rtlCol="0" anchor="ctr">
+            <a:normAutofit/>
+          </a:bodyPr>
+          <a:lstStyle/>
+          <a:p>
+            <a:pPr algn="ctr" indent="0" marL="0">
+              <a:buNone/>
+            </a:pPr>
+            <a:r>
+              <a:rPr lang="en-US" sz="1500" b="1" dirty="0">
+                <a:solidFill>
+                  <a:srgbClr val="FFFFFF"/>
+                </a:solidFill>
+                <a:latin typeface="Aptos" pitchFamily="34" charset="0"/>
+                <a:ea typeface="Aptos" pitchFamily="34" charset="-122"/>
+                <a:cs typeface="Aptos" pitchFamily="34" charset="-120"/>
+              </a:rPr>
+              <a:t>Apply</a:t>
+            </a:r>
+            <a:endParaRPr lang="en-US" sz="1500" dirty="0"/>
+          </a:p>
+        </p:txBody>
+      </p:sp>
+      <p:sp>
+        <p:nvSpPr>
+          <p:cNvPr id="18" name="Text 16"/>
+          <p:cNvSpPr/>
+          <p:nvPr/>
+        </p:nvSpPr>
+        <p:spPr>
+          <a:xfrm>
+            <a:off x="9985248" y="3941064"/>
+            <a:ext cx="201168" cy="256032"/>
+          </a:xfrm>
+          <a:prstGeom prst="rect">
+            <a:avLst/>
+          </a:prstGeom>
+          <a:noFill/>
+          <a:ln/>
+        </p:spPr>
+        <p:txBody>
+          <a:bodyPr wrap="square" lIns="0" tIns="0" rIns="0" bIns="0" rtlCol="0" anchor="ctr"/>
+          <a:lstStyle/>
+          <a:p>
+            <a:pPr algn="ctr" indent="0" marL="0">
+              <a:buNone/>
+            </a:pPr>
+            <a:r>
+              <a:rPr lang="en-US" sz="1800" b="1" dirty="0">
+                <a:solidFill>
+                  <a:srgbClr val="0068B7"/>
+                </a:solidFill>
+                <a:latin typeface="Aptos" pitchFamily="34" charset="0"/>
+                <a:ea typeface="Aptos" pitchFamily="34" charset="-122"/>
+                <a:cs typeface="Aptos" pitchFamily="34" charset="-120"/>
+              </a:rPr>
+              <a:t>â†’</a:t>
+            </a:r>
+            <a:endParaRPr lang="en-US" sz="1800" dirty="0"/>
+          </a:p>
+        </p:txBody>
+      </p:sp>
+      <p:sp>
+        <p:nvSpPr>
+          <p:cNvPr id="19" name="Shape 17"/>
+          <p:cNvSpPr/>
+          <p:nvPr/>
+        </p:nvSpPr>
+        <p:spPr>
+          <a:xfrm>
+            <a:off x="10213848" y="3730752"/>
+            <a:ext cx="1033272" cy="749808"/>
+          </a:xfrm>
+          <a:prstGeom prst="roundRect">
+            <a:avLst>
+              <a:gd name="adj" fmla="val 14634"/>
+            </a:avLst>
+          </a:prstGeom>
+          <a:solidFill>
+            <a:srgbClr val="6A4CA3"/>
+          </a:solidFill>
+          <a:ln w="12700">
+            <a:solidFill>
+              <a:srgbClr val="6A4CA3"/>
+            </a:solidFill>
+            <a:prstDash val="solid"/>
+          </a:ln>
+        </p:spPr>
+      </p:sp>
+      <p:sp>
+        <p:nvSpPr>
+          <p:cNvPr id="20" name="Text 18"/>
+          <p:cNvSpPr/>
+          <p:nvPr/>
+        </p:nvSpPr>
+        <p:spPr>
+          <a:xfrm>
+            <a:off x="10287000" y="3922776"/>
+            <a:ext cx="886968" cy="310896"/>
+          </a:xfrm>
+          <a:prstGeom prst="rect">
+            <a:avLst/>
+          </a:prstGeom>
+          <a:noFill/>
+          <a:ln/>
+        </p:spPr>
+        <p:txBody>
+          <a:bodyPr wrap="square" lIns="0" tIns="0" rIns="0" bIns="0" rtlCol="0" anchor="ctr">
+            <a:normAutofit/>
+          </a:bodyPr>
+          <a:lstStyle/>
+          <a:p>
+            <a:pPr algn="ctr" indent="0" marL="0">
+              <a:buNone/>
+            </a:pPr>
+            <a:r>
+              <a:rPr lang="en-US" sz="1500" b="1" dirty="0">
+                <a:solidFill>
+                  <a:srgbClr val="FFFFFF"/>
+                </a:solidFill>
+                <a:latin typeface="Aptos" pitchFamily="34" charset="0"/>
+                <a:ea typeface="Aptos" pitchFamily="34" charset="-122"/>
+                <a:cs typeface="Aptos" pitchFamily="34" charset="-120"/>
+              </a:rPr>
+              <a:t>Document</a:t>
+            </a:r>
+            <a:endParaRPr lang="en-US" sz="1500" dirty="0"/>
           </a:p>
         </p:txBody>
       </p:sp>
@@ -9523,7 +10096,7 @@
                 <a:ea typeface="Aptos" pitchFamily="34" charset="-122"/>
                 <a:cs typeface="Aptos" pitchFamily="34" charset="-120"/>
               </a:rPr>
-              <a:t>© Paula Soper</a:t>
+              <a:t>Â© Paula Soper</a:t>
             </a:r>
             <a:endParaRPr lang="en-US" sz="800" dirty="0"/>
           </a:p>
@@ -9537,8 +10110,47 @@
         </p:nvSpPr>
         <p:spPr>
           <a:xfrm>
+            <a:off x="11137392" y="6510528"/>
+            <a:ext cx="411480" cy="201168"/>
+          </a:xfrm>
+          <a:prstGeom prst="rect">
+            <a:avLst/>
+          </a:prstGeom>
+          <a:noFill/>
+          <a:ln/>
+        </p:spPr>
+        <p:txBody>
+          <a:bodyPr wrap="square" lIns="0" tIns="0" rIns="0" bIns="0" rtlCol="0" anchor="ctr"/>
+          <a:lstStyle/>
+          <a:p>
+            <a:pPr algn="r" indent="0" marL="0">
+              <a:buNone/>
+            </a:pPr>
+            <a:r>
+              <a:rPr lang="en-US" sz="900" dirty="0">
+                <a:solidFill>
+                  <a:srgbClr val="5F7181"/>
+                </a:solidFill>
+                <a:latin typeface="Aptos" pitchFamily="34" charset="0"/>
+                <a:ea typeface="Aptos" pitchFamily="34" charset="-122"/>
+                <a:cs typeface="Aptos" pitchFamily="34" charset="-120"/>
+              </a:rPr>
+              <a:t>20</a:t>
+            </a:r>
+            <a:endParaRPr lang="en-US" sz="900" dirty="0"/>
+          </a:p>
+        </p:txBody>
+      </p:sp>
+      <p:sp>
+        <p:nvSpPr>
+          <p:cNvPr id="8" name="Text 6"/>
+          <p:cNvSpPr/>
+          <p:nvPr/>
+        </p:nvSpPr>
+        <p:spPr>
+          <a:xfrm>
             <a:off x="640080" y="658368"/>
-            <a:ext cx="10881360" cy="566928"/>
+            <a:ext cx="10881360" cy="713232"/>
           </a:xfrm>
           <a:prstGeom prst="rect">
             <a:avLst/>
@@ -9556,7 +10168,7 @@
               <a:buNone/>
             </a:pPr>
             <a:r>
-              <a:rPr lang="en-US" sz="2700" b="1" dirty="0">
+              <a:rPr lang="en-US" sz="3400" b="1" dirty="0">
                 <a:solidFill>
                   <a:srgbClr val="003A63"/>
                 </a:solidFill>
@@ -9566,20 +10178,20 @@
               </a:rPr>
               <a:t>Expected Artifact or Evidence Continued</a:t>
             </a:r>
-            <a:endParaRPr lang="en-US" sz="2700" dirty="0"/>
-          </a:p>
-        </p:txBody>
-      </p:sp>
-      <p:sp>
-        <p:nvSpPr>
-          <p:cNvPr id="8" name="Text 6"/>
-          <p:cNvSpPr/>
-          <p:nvPr/>
-        </p:nvSpPr>
-        <p:spPr>
-          <a:xfrm>
-            <a:off x="868680" y="1417320"/>
-            <a:ext cx="6675120" cy="4434840"/>
+            <a:endParaRPr lang="en-US" sz="3400" dirty="0"/>
+          </a:p>
+        </p:txBody>
+      </p:sp>
+      <p:sp>
+        <p:nvSpPr>
+          <p:cNvPr id="9" name="Text 7"/>
+          <p:cNvSpPr/>
+          <p:nvPr/>
+        </p:nvSpPr>
+        <p:spPr>
+          <a:xfrm>
+            <a:off x="868680" y="1508760"/>
+            <a:ext cx="6537960" cy="4160520"/>
           </a:xfrm>
           <a:prstGeom prst="rect">
             <a:avLst/>
@@ -9594,7 +10206,7 @@
           <a:lstStyle/>
           <a:p>
             <a:r>
-              <a:rPr lang="en-US" sz="1700" dirty="0">
+              <a:rPr lang="en-US" sz="2100" dirty="0">
                 <a:solidFill>
                   <a:srgbClr val="17364A"/>
                 </a:solidFill>
@@ -9604,13 +10216,13 @@
               </a:rPr>
               <a:t>Human review and escalation plan</a:t>
             </a:r>
-            <a:endParaRPr lang="en-US" sz="1700" dirty="0"/>
-          </a:p>
-        </p:txBody>
-      </p:sp>
-      <p:sp>
-        <p:nvSpPr>
-          <p:cNvPr id="9" name="Shape 7"/>
+            <a:endParaRPr lang="en-US" sz="2100" dirty="0"/>
+          </a:p>
+        </p:txBody>
+      </p:sp>
+      <p:sp>
+        <p:nvSpPr>
+          <p:cNvPr id="10" name="Shape 8"/>
           <p:cNvSpPr/>
           <p:nvPr/>
         </p:nvSpPr>
@@ -9637,14 +10249,14 @@
       </p:sp>
       <p:sp>
         <p:nvSpPr>
-          <p:cNvPr id="10" name="Text 8"/>
+          <p:cNvPr id="11" name="Text 9"/>
           <p:cNvSpPr/>
           <p:nvPr/>
         </p:nvSpPr>
         <p:spPr>
           <a:xfrm>
             <a:off x="8074152" y="1563624"/>
-            <a:ext cx="2825496" cy="201168"/>
+            <a:ext cx="2825496" cy="256032"/>
           </a:xfrm>
           <a:prstGeom prst="rect">
             <a:avLst/>
@@ -9660,7 +10272,7 @@
               <a:buNone/>
             </a:pPr>
             <a:r>
-              <a:rPr lang="en-US" sz="950" b="1" dirty="0">
+              <a:rPr lang="en-US" sz="1300" b="1" dirty="0">
                 <a:solidFill>
                   <a:srgbClr val="0068B7"/>
                 </a:solidFill>
@@ -9670,20 +10282,20 @@
               </a:rPr>
               <a:t>Key idea</a:t>
             </a:r>
-            <a:endParaRPr lang="en-US" sz="950" dirty="0"/>
-          </a:p>
-        </p:txBody>
-      </p:sp>
-      <p:sp>
-        <p:nvSpPr>
-          <p:cNvPr id="11" name="Text 9"/>
-          <p:cNvSpPr/>
-          <p:nvPr/>
-        </p:nvSpPr>
-        <p:spPr>
-          <a:xfrm>
-            <a:off x="8074152" y="1856232"/>
-            <a:ext cx="2825496" cy="1261872"/>
+            <a:endParaRPr lang="en-US" sz="1300" dirty="0"/>
+          </a:p>
+        </p:txBody>
+      </p:sp>
+      <p:sp>
+        <p:nvSpPr>
+          <p:cNvPr id="12" name="Text 10"/>
+          <p:cNvSpPr/>
+          <p:nvPr/>
+        </p:nvSpPr>
+        <p:spPr>
+          <a:xfrm>
+            <a:off x="8074152" y="1920240"/>
+            <a:ext cx="2825496" cy="1188720"/>
           </a:xfrm>
           <a:prstGeom prst="rect">
             <a:avLst/>
@@ -9701,7 +10313,7 @@
               <a:buNone/>
             </a:pPr>
             <a:r>
-              <a:rPr lang="en-US" sz="1250" dirty="0">
+              <a:rPr lang="en-US" sz="1550" dirty="0">
                 <a:solidFill>
                   <a:srgbClr val="17364A"/>
                 </a:solidFill>
@@ -9711,13 +10323,13 @@
               </a:rPr>
               <a:t>Human review and escalation plan</a:t>
             </a:r>
-            <a:endParaRPr lang="en-US" sz="1250" dirty="0"/>
-          </a:p>
-        </p:txBody>
-      </p:sp>
-      <p:sp>
-        <p:nvSpPr>
-          <p:cNvPr id="12" name="Shape 10"/>
+            <a:endParaRPr lang="en-US" sz="1550" dirty="0"/>
+          </a:p>
+        </p:txBody>
+      </p:sp>
+      <p:sp>
+        <p:nvSpPr>
+          <p:cNvPr id="13" name="Shape 11"/>
           <p:cNvSpPr/>
           <p:nvPr/>
         </p:nvSpPr>
@@ -9744,14 +10356,14 @@
       </p:sp>
       <p:sp>
         <p:nvSpPr>
-          <p:cNvPr id="13" name="Text 11"/>
+          <p:cNvPr id="14" name="Text 12"/>
           <p:cNvSpPr/>
           <p:nvPr/>
         </p:nvSpPr>
         <p:spPr>
           <a:xfrm>
             <a:off x="8074152" y="3666744"/>
-            <a:ext cx="2825496" cy="201168"/>
+            <a:ext cx="2825496" cy="256032"/>
           </a:xfrm>
           <a:prstGeom prst="rect">
             <a:avLst/>
@@ -9767,7 +10379,7 @@
               <a:buNone/>
             </a:pPr>
             <a:r>
-              <a:rPr lang="en-US" sz="950" b="1" dirty="0">
+              <a:rPr lang="en-US" sz="1300" b="1" dirty="0">
                 <a:solidFill>
                   <a:srgbClr val="0068B7"/>
                 </a:solidFill>
@@ -9777,20 +10389,20 @@
               </a:rPr>
               <a:t>Use this for</a:t>
             </a:r>
-            <a:endParaRPr lang="en-US" sz="950" dirty="0"/>
-          </a:p>
-        </p:txBody>
-      </p:sp>
-      <p:sp>
-        <p:nvSpPr>
-          <p:cNvPr id="14" name="Text 12"/>
-          <p:cNvSpPr/>
-          <p:nvPr/>
-        </p:nvSpPr>
-        <p:spPr>
-          <a:xfrm>
-            <a:off x="8074152" y="3959352"/>
-            <a:ext cx="2825496" cy="1170432"/>
+            <a:endParaRPr lang="en-US" sz="1300" dirty="0"/>
+          </a:p>
+        </p:txBody>
+      </p:sp>
+      <p:sp>
+        <p:nvSpPr>
+          <p:cNvPr id="15" name="Text 13"/>
+          <p:cNvSpPr/>
+          <p:nvPr/>
+        </p:nvSpPr>
+        <p:spPr>
+          <a:xfrm>
+            <a:off x="8074152" y="4023360"/>
+            <a:ext cx="2825496" cy="1097280"/>
           </a:xfrm>
           <a:prstGeom prst="rect">
             <a:avLst/>
@@ -9808,7 +10420,7 @@
               <a:buNone/>
             </a:pPr>
             <a:r>
-              <a:rPr lang="en-US" sz="1250" dirty="0">
+              <a:rPr lang="en-US" sz="1550" dirty="0">
                 <a:solidFill>
                   <a:srgbClr val="17364A"/>
                 </a:solidFill>
@@ -9818,7 +10430,7 @@
               </a:rPr>
               <a:t>Connect the concept to public health decisions, safeguards, documentation, or implementation work.</a:t>
             </a:r>
-            <a:endParaRPr lang="en-US" sz="1250" dirty="0"/>
+            <a:endParaRPr lang="en-US" sz="1550" dirty="0"/>
           </a:p>
         </p:txBody>
       </p:sp>
@@ -10015,7 +10627,7 @@
                 <a:ea typeface="Aptos" pitchFamily="34" charset="-122"/>
                 <a:cs typeface="Aptos" pitchFamily="34" charset="-120"/>
               </a:rPr>
-              <a:t>© Paula Soper</a:t>
+              <a:t>Â© Paula Soper</a:t>
             </a:r>
             <a:endParaRPr lang="en-US" sz="800" dirty="0"/>
           </a:p>
@@ -10023,7 +10635,46 @@
       </p:sp>
       <p:sp>
         <p:nvSpPr>
-          <p:cNvPr id="7" name="Shape 5"/>
+          <p:cNvPr id="7" name="Text 5"/>
+          <p:cNvSpPr/>
+          <p:nvPr/>
+        </p:nvSpPr>
+        <p:spPr>
+          <a:xfrm>
+            <a:off x="11137392" y="6510528"/>
+            <a:ext cx="411480" cy="201168"/>
+          </a:xfrm>
+          <a:prstGeom prst="rect">
+            <a:avLst/>
+          </a:prstGeom>
+          <a:noFill/>
+          <a:ln/>
+        </p:spPr>
+        <p:txBody>
+          <a:bodyPr wrap="square" lIns="0" tIns="0" rIns="0" bIns="0" rtlCol="0" anchor="ctr"/>
+          <a:lstStyle/>
+          <a:p>
+            <a:pPr algn="r" indent="0" marL="0">
+              <a:buNone/>
+            </a:pPr>
+            <a:r>
+              <a:rPr lang="en-US" sz="900" dirty="0">
+                <a:solidFill>
+                  <a:srgbClr val="5F7181"/>
+                </a:solidFill>
+                <a:latin typeface="Aptos" pitchFamily="34" charset="0"/>
+                <a:ea typeface="Aptos" pitchFamily="34" charset="-122"/>
+                <a:cs typeface="Aptos" pitchFamily="34" charset="-120"/>
+              </a:rPr>
+              <a:t>21</a:t>
+            </a:r>
+            <a:endParaRPr lang="en-US" sz="900" dirty="0"/>
+          </a:p>
+        </p:txBody>
+      </p:sp>
+      <p:sp>
+        <p:nvSpPr>
+          <p:cNvPr id="8" name="Shape 6"/>
           <p:cNvSpPr/>
           <p:nvPr/>
         </p:nvSpPr>
@@ -10048,7 +10699,7 @@
       </p:sp>
       <p:sp>
         <p:nvSpPr>
-          <p:cNvPr id="8" name="Text 6"/>
+          <p:cNvPr id="9" name="Text 7"/>
           <p:cNvSpPr/>
           <p:nvPr/>
         </p:nvSpPr>
@@ -10087,14 +10738,14 @@
       </p:sp>
       <p:sp>
         <p:nvSpPr>
-          <p:cNvPr id="9" name="Text 7"/>
+          <p:cNvPr id="10" name="Text 8"/>
           <p:cNvSpPr/>
           <p:nvPr/>
         </p:nvSpPr>
         <p:spPr>
           <a:xfrm>
             <a:off x="640080" y="621792"/>
-            <a:ext cx="10881360" cy="566928"/>
+            <a:ext cx="10881360" cy="713232"/>
           </a:xfrm>
           <a:prstGeom prst="rect">
             <a:avLst/>
@@ -10112,7 +10763,7 @@
               <a:buNone/>
             </a:pPr>
             <a:r>
-              <a:rPr lang="en-US" sz="2700" b="1" dirty="0">
+              <a:rPr lang="en-US" sz="3400" b="1" dirty="0">
                 <a:solidFill>
                   <a:srgbClr val="003A63"/>
                 </a:solidFill>
@@ -10122,20 +10773,20 @@
               </a:rPr>
               <a:t>Expected Assignment</a:t>
             </a:r>
-            <a:endParaRPr lang="en-US" sz="2700" dirty="0"/>
-          </a:p>
-        </p:txBody>
-      </p:sp>
-      <p:sp>
-        <p:nvSpPr>
-          <p:cNvPr id="10" name="Text 8"/>
-          <p:cNvSpPr/>
-          <p:nvPr/>
-        </p:nvSpPr>
-        <p:spPr>
-          <a:xfrm>
-            <a:off x="868680" y="1417320"/>
-            <a:ext cx="6675120" cy="4434840"/>
+            <a:endParaRPr lang="en-US" sz="3400" dirty="0"/>
+          </a:p>
+        </p:txBody>
+      </p:sp>
+      <p:sp>
+        <p:nvSpPr>
+          <p:cNvPr id="11" name="Text 9"/>
+          <p:cNvSpPr/>
+          <p:nvPr/>
+        </p:nvSpPr>
+        <p:spPr>
+          <a:xfrm>
+            <a:off x="868680" y="1508760"/>
+            <a:ext cx="6537960" cy="4160520"/>
           </a:xfrm>
           <a:prstGeom prst="rect">
             <a:avLst/>
@@ -10150,7 +10801,7 @@
           <a:lstStyle/>
           <a:p>
             <a:r>
-              <a:rPr lang="en-US" sz="1700" dirty="0">
+              <a:rPr lang="en-US" sz="2100" dirty="0">
                 <a:solidFill>
                   <a:srgbClr val="17364A"/>
                 </a:solidFill>
@@ -10160,11 +10811,11 @@
               </a:rPr>
               <a:t>eCR workflow map</a:t>
             </a:r>
-            <a:endParaRPr lang="en-US" sz="1700" dirty="0"/>
-          </a:p>
-          <a:p>
-            <a:r>
-              <a:rPr lang="en-US" sz="1700" dirty="0">
+            <a:endParaRPr lang="en-US" sz="2100" dirty="0"/>
+          </a:p>
+          <a:p>
+            <a:r>
+              <a:rPr lang="en-US" sz="2100" dirty="0">
                 <a:solidFill>
                   <a:srgbClr val="17364A"/>
                 </a:solidFill>
@@ -10174,11 +10825,11 @@
               </a:rPr>
               <a:t>AI-readiness checklist</a:t>
             </a:r>
-            <a:endParaRPr lang="en-US" sz="1700" dirty="0"/>
-          </a:p>
-          <a:p>
-            <a:r>
-              <a:rPr lang="en-US" sz="1700" dirty="0">
+            <a:endParaRPr lang="en-US" sz="2100" dirty="0"/>
+          </a:p>
+          <a:p>
+            <a:r>
+              <a:rPr lang="en-US" sz="2100" dirty="0">
                 <a:solidFill>
                   <a:srgbClr val="17364A"/>
                 </a:solidFill>
@@ -10188,27 +10839,13 @@
               </a:rPr>
               <a:t>Validation scenarios</a:t>
             </a:r>
-            <a:endParaRPr lang="en-US" sz="1700" dirty="0"/>
-          </a:p>
-          <a:p>
-            <a:r>
-              <a:rPr lang="en-US" sz="1700" dirty="0">
-                <a:solidFill>
-                  <a:srgbClr val="17364A"/>
-                </a:solidFill>
-                <a:latin typeface="Aptos" pitchFamily="34" charset="0"/>
-                <a:ea typeface="Aptos" pitchFamily="34" charset="-122"/>
-                <a:cs typeface="Aptos" pitchFamily="34" charset="-120"/>
-              </a:rPr>
-              <a:t>Human review and escalation plan</a:t>
-            </a:r>
-            <a:endParaRPr lang="en-US" sz="1700" dirty="0"/>
-          </a:p>
-        </p:txBody>
-      </p:sp>
-      <p:sp>
-        <p:nvSpPr>
-          <p:cNvPr id="11" name="Shape 9"/>
+            <a:endParaRPr lang="en-US" sz="2100" dirty="0"/>
+          </a:p>
+        </p:txBody>
+      </p:sp>
+      <p:sp>
+        <p:nvSpPr>
+          <p:cNvPr id="12" name="Shape 10"/>
           <p:cNvSpPr/>
           <p:nvPr/>
         </p:nvSpPr>
@@ -10235,14 +10872,14 @@
       </p:sp>
       <p:sp>
         <p:nvSpPr>
-          <p:cNvPr id="12" name="Text 10"/>
+          <p:cNvPr id="13" name="Text 11"/>
           <p:cNvSpPr/>
           <p:nvPr/>
         </p:nvSpPr>
         <p:spPr>
           <a:xfrm>
             <a:off x="8074152" y="1563624"/>
-            <a:ext cx="2825496" cy="201168"/>
+            <a:ext cx="2825496" cy="256032"/>
           </a:xfrm>
           <a:prstGeom prst="rect">
             <a:avLst/>
@@ -10258,7 +10895,7 @@
               <a:buNone/>
             </a:pPr>
             <a:r>
-              <a:rPr lang="en-US" sz="950" b="1" dirty="0">
+              <a:rPr lang="en-US" sz="1300" b="1" dirty="0">
                 <a:solidFill>
                   <a:srgbClr val="0068B7"/>
                 </a:solidFill>
@@ -10268,20 +10905,20 @@
               </a:rPr>
               <a:t>Key idea</a:t>
             </a:r>
-            <a:endParaRPr lang="en-US" sz="950" dirty="0"/>
-          </a:p>
-        </p:txBody>
-      </p:sp>
-      <p:sp>
-        <p:nvSpPr>
-          <p:cNvPr id="13" name="Text 11"/>
-          <p:cNvSpPr/>
-          <p:nvPr/>
-        </p:nvSpPr>
-        <p:spPr>
-          <a:xfrm>
-            <a:off x="8074152" y="1856232"/>
-            <a:ext cx="2825496" cy="1261872"/>
+            <a:endParaRPr lang="en-US" sz="1300" dirty="0"/>
+          </a:p>
+        </p:txBody>
+      </p:sp>
+      <p:sp>
+        <p:nvSpPr>
+          <p:cNvPr id="14" name="Text 12"/>
+          <p:cNvSpPr/>
+          <p:nvPr/>
+        </p:nvSpPr>
+        <p:spPr>
+          <a:xfrm>
+            <a:off x="8074152" y="1920240"/>
+            <a:ext cx="2825496" cy="1188720"/>
           </a:xfrm>
           <a:prstGeom prst="rect">
             <a:avLst/>
@@ -10299,7 +10936,7 @@
               <a:buNone/>
             </a:pPr>
             <a:r>
-              <a:rPr lang="en-US" sz="1250" dirty="0">
+              <a:rPr lang="en-US" sz="1550" dirty="0">
                 <a:solidFill>
                   <a:srgbClr val="17364A"/>
                 </a:solidFill>
@@ -10309,13 +10946,13 @@
               </a:rPr>
               <a:t>eCR workflow map</a:t>
             </a:r>
-            <a:endParaRPr lang="en-US" sz="1250" dirty="0"/>
-          </a:p>
-        </p:txBody>
-      </p:sp>
-      <p:sp>
-        <p:nvSpPr>
-          <p:cNvPr id="14" name="Shape 12"/>
+            <a:endParaRPr lang="en-US" sz="1550" dirty="0"/>
+          </a:p>
+        </p:txBody>
+      </p:sp>
+      <p:sp>
+        <p:nvSpPr>
+          <p:cNvPr id="15" name="Shape 13"/>
           <p:cNvSpPr/>
           <p:nvPr/>
         </p:nvSpPr>
@@ -10342,14 +10979,14 @@
       </p:sp>
       <p:sp>
         <p:nvSpPr>
-          <p:cNvPr id="15" name="Text 13"/>
+          <p:cNvPr id="16" name="Text 14"/>
           <p:cNvSpPr/>
           <p:nvPr/>
         </p:nvSpPr>
         <p:spPr>
           <a:xfrm>
             <a:off x="8074152" y="3666744"/>
-            <a:ext cx="2825496" cy="201168"/>
+            <a:ext cx="2825496" cy="256032"/>
           </a:xfrm>
           <a:prstGeom prst="rect">
             <a:avLst/>
@@ -10365,7 +11002,7 @@
               <a:buNone/>
             </a:pPr>
             <a:r>
-              <a:rPr lang="en-US" sz="950" b="1" dirty="0">
+              <a:rPr lang="en-US" sz="1300" b="1" dirty="0">
                 <a:solidFill>
                   <a:srgbClr val="0068B7"/>
                 </a:solidFill>
@@ -10375,20 +11012,20 @@
               </a:rPr>
               <a:t>Use this for</a:t>
             </a:r>
-            <a:endParaRPr lang="en-US" sz="950" dirty="0"/>
-          </a:p>
-        </p:txBody>
-      </p:sp>
-      <p:sp>
-        <p:nvSpPr>
-          <p:cNvPr id="16" name="Text 14"/>
-          <p:cNvSpPr/>
-          <p:nvPr/>
-        </p:nvSpPr>
-        <p:spPr>
-          <a:xfrm>
-            <a:off x="8074152" y="3959352"/>
-            <a:ext cx="2825496" cy="1170432"/>
+            <a:endParaRPr lang="en-US" sz="1300" dirty="0"/>
+          </a:p>
+        </p:txBody>
+      </p:sp>
+      <p:sp>
+        <p:nvSpPr>
+          <p:cNvPr id="17" name="Text 15"/>
+          <p:cNvSpPr/>
+          <p:nvPr/>
+        </p:nvSpPr>
+        <p:spPr>
+          <a:xfrm>
+            <a:off x="8074152" y="4023360"/>
+            <a:ext cx="2825496" cy="1097280"/>
           </a:xfrm>
           <a:prstGeom prst="rect">
             <a:avLst/>
@@ -10406,7 +11043,7 @@
               <a:buNone/>
             </a:pPr>
             <a:r>
-              <a:rPr lang="en-US" sz="1250" dirty="0">
+              <a:rPr lang="en-US" sz="1550" dirty="0">
                 <a:solidFill>
                   <a:srgbClr val="17364A"/>
                 </a:solidFill>
@@ -10416,7 +11053,7 @@
               </a:rPr>
               <a:t>Connect the concept to public health decisions, safeguards, documentation, or implementation work.</a:t>
             </a:r>
-            <a:endParaRPr lang="en-US" sz="1250" dirty="0"/>
+            <a:endParaRPr lang="en-US" sz="1550" dirty="0"/>
           </a:p>
         </p:txBody>
       </p:sp>
@@ -10613,7 +11250,7 @@
                 <a:ea typeface="Aptos" pitchFamily="34" charset="-122"/>
                 <a:cs typeface="Aptos" pitchFamily="34" charset="-120"/>
               </a:rPr>
-              <a:t>© Paula Soper</a:t>
+              <a:t>Â© Paula Soper</a:t>
             </a:r>
             <a:endParaRPr lang="en-US" sz="800" dirty="0"/>
           </a:p>
@@ -10621,7 +11258,46 @@
       </p:sp>
       <p:sp>
         <p:nvSpPr>
-          <p:cNvPr id="7" name="Shape 5"/>
+          <p:cNvPr id="7" name="Text 5"/>
+          <p:cNvSpPr/>
+          <p:nvPr/>
+        </p:nvSpPr>
+        <p:spPr>
+          <a:xfrm>
+            <a:off x="11137392" y="6510528"/>
+            <a:ext cx="411480" cy="201168"/>
+          </a:xfrm>
+          <a:prstGeom prst="rect">
+            <a:avLst/>
+          </a:prstGeom>
+          <a:noFill/>
+          <a:ln/>
+        </p:spPr>
+        <p:txBody>
+          <a:bodyPr wrap="square" lIns="0" tIns="0" rIns="0" bIns="0" rtlCol="0" anchor="ctr"/>
+          <a:lstStyle/>
+          <a:p>
+            <a:pPr algn="r" indent="0" marL="0">
+              <a:buNone/>
+            </a:pPr>
+            <a:r>
+              <a:rPr lang="en-US" sz="900" dirty="0">
+                <a:solidFill>
+                  <a:srgbClr val="5F7181"/>
+                </a:solidFill>
+                <a:latin typeface="Aptos" pitchFamily="34" charset="0"/>
+                <a:ea typeface="Aptos" pitchFamily="34" charset="-122"/>
+                <a:cs typeface="Aptos" pitchFamily="34" charset="-120"/>
+              </a:rPr>
+              <a:t>22</a:t>
+            </a:r>
+            <a:endParaRPr lang="en-US" sz="900" dirty="0"/>
+          </a:p>
+        </p:txBody>
+      </p:sp>
+      <p:sp>
+        <p:nvSpPr>
+          <p:cNvPr id="8" name="Shape 6"/>
           <p:cNvSpPr/>
           <p:nvPr/>
         </p:nvSpPr>
@@ -10646,7 +11322,7 @@
       </p:sp>
       <p:sp>
         <p:nvSpPr>
-          <p:cNvPr id="8" name="Text 6"/>
+          <p:cNvPr id="9" name="Text 7"/>
           <p:cNvSpPr/>
           <p:nvPr/>
         </p:nvSpPr>
@@ -10685,14 +11361,14 @@
       </p:sp>
       <p:sp>
         <p:nvSpPr>
-          <p:cNvPr id="9" name="Text 7"/>
+          <p:cNvPr id="10" name="Text 8"/>
           <p:cNvSpPr/>
           <p:nvPr/>
         </p:nvSpPr>
         <p:spPr>
           <a:xfrm>
             <a:off x="640080" y="621792"/>
-            <a:ext cx="10881360" cy="566928"/>
+            <a:ext cx="10881360" cy="713232"/>
           </a:xfrm>
           <a:prstGeom prst="rect">
             <a:avLst/>
@@ -10710,7 +11386,7 @@
               <a:buNone/>
             </a:pPr>
             <a:r>
-              <a:rPr lang="en-US" sz="2700" b="1" dirty="0">
+              <a:rPr lang="en-US" sz="3400" b="1" dirty="0">
                 <a:solidFill>
                   <a:srgbClr val="003A63"/>
                 </a:solidFill>
@@ -10720,20 +11396,20 @@
               </a:rPr>
               <a:t>Knowledge Check</a:t>
             </a:r>
-            <a:endParaRPr lang="en-US" sz="2700" dirty="0"/>
-          </a:p>
-        </p:txBody>
-      </p:sp>
-      <p:sp>
-        <p:nvSpPr>
-          <p:cNvPr id="10" name="Text 8"/>
-          <p:cNvSpPr/>
-          <p:nvPr/>
-        </p:nvSpPr>
-        <p:spPr>
-          <a:xfrm>
-            <a:off x="868680" y="1417320"/>
-            <a:ext cx="6675120" cy="4434840"/>
+            <a:endParaRPr lang="en-US" sz="3400" dirty="0"/>
+          </a:p>
+        </p:txBody>
+      </p:sp>
+      <p:sp>
+        <p:nvSpPr>
+          <p:cNvPr id="11" name="Text 9"/>
+          <p:cNvSpPr/>
+          <p:nvPr/>
+        </p:nvSpPr>
+        <p:spPr>
+          <a:xfrm>
+            <a:off x="868680" y="1508760"/>
+            <a:ext cx="6537960" cy="4160520"/>
           </a:xfrm>
           <a:prstGeom prst="rect">
             <a:avLst/>
@@ -10748,7 +11424,7 @@
           <a:lstStyle/>
           <a:p>
             <a:r>
-              <a:rPr lang="en-US" sz="1700" dirty="0">
+              <a:rPr lang="en-US" sz="2100" dirty="0">
                 <a:solidFill>
                   <a:srgbClr val="17364A"/>
                 </a:solidFill>
@@ -10758,11 +11434,11 @@
               </a:rPr>
               <a:t>1. What is eCR?</a:t>
             </a:r>
-            <a:endParaRPr lang="en-US" sz="1700" dirty="0"/>
-          </a:p>
-          <a:p>
-            <a:r>
-              <a:rPr lang="en-US" sz="1700" dirty="0">
+            <a:endParaRPr lang="en-US" sz="2100" dirty="0"/>
+          </a:p>
+          <a:p>
+            <a:r>
+              <a:rPr lang="en-US" sz="2100" dirty="0">
                 <a:solidFill>
                   <a:srgbClr val="17364A"/>
                 </a:solidFill>
@@ -10772,11 +11448,11 @@
               </a:rPr>
               <a:t>2. What is an eICR?</a:t>
             </a:r>
-            <a:endParaRPr lang="en-US" sz="1700" dirty="0"/>
-          </a:p>
-          <a:p>
-            <a:r>
-              <a:rPr lang="en-US" sz="1700" dirty="0">
+            <a:endParaRPr lang="en-US" sz="2100" dirty="0"/>
+          </a:p>
+          <a:p>
+            <a:r>
+              <a:rPr lang="en-US" sz="2100" dirty="0">
                 <a:solidFill>
                   <a:srgbClr val="17364A"/>
                 </a:solidFill>
@@ -10786,27 +11462,13 @@
               </a:rPr>
               <a:t>3. What do eRSD and RCTC support?</a:t>
             </a:r>
-            <a:endParaRPr lang="en-US" sz="1700" dirty="0"/>
-          </a:p>
-          <a:p>
-            <a:r>
-              <a:rPr lang="en-US" sz="1700" dirty="0">
-                <a:solidFill>
-                  <a:srgbClr val="17364A"/>
-                </a:solidFill>
-                <a:latin typeface="Aptos" pitchFamily="34" charset="0"/>
-                <a:ea typeface="Aptos" pitchFamily="34" charset="-122"/>
-                <a:cs typeface="Aptos" pitchFamily="34" charset="-120"/>
-              </a:rPr>
-              <a:t>4. Which AI-supported eCR use requires particularly careful validation?</a:t>
-            </a:r>
-            <a:endParaRPr lang="en-US" sz="1700" dirty="0"/>
-          </a:p>
-        </p:txBody>
-      </p:sp>
-      <p:sp>
-        <p:nvSpPr>
-          <p:cNvPr id="11" name="Shape 9"/>
+            <a:endParaRPr lang="en-US" sz="2100" dirty="0"/>
+          </a:p>
+        </p:txBody>
+      </p:sp>
+      <p:sp>
+        <p:nvSpPr>
+          <p:cNvPr id="12" name="Shape 10"/>
           <p:cNvSpPr/>
           <p:nvPr/>
         </p:nvSpPr>
@@ -10833,14 +11495,14 @@
       </p:sp>
       <p:sp>
         <p:nvSpPr>
-          <p:cNvPr id="12" name="Text 10"/>
+          <p:cNvPr id="13" name="Text 11"/>
           <p:cNvSpPr/>
           <p:nvPr/>
         </p:nvSpPr>
         <p:spPr>
           <a:xfrm>
             <a:off x="8074152" y="1563624"/>
-            <a:ext cx="2825496" cy="201168"/>
+            <a:ext cx="2825496" cy="256032"/>
           </a:xfrm>
           <a:prstGeom prst="rect">
             <a:avLst/>
@@ -10856,7 +11518,7 @@
               <a:buNone/>
             </a:pPr>
             <a:r>
-              <a:rPr lang="en-US" sz="950" b="1" dirty="0">
+              <a:rPr lang="en-US" sz="1300" b="1" dirty="0">
                 <a:solidFill>
                   <a:srgbClr val="0068B7"/>
                 </a:solidFill>
@@ -10866,20 +11528,20 @@
               </a:rPr>
               <a:t>Key idea</a:t>
             </a:r>
-            <a:endParaRPr lang="en-US" sz="950" dirty="0"/>
-          </a:p>
-        </p:txBody>
-      </p:sp>
-      <p:sp>
-        <p:nvSpPr>
-          <p:cNvPr id="13" name="Text 11"/>
-          <p:cNvSpPr/>
-          <p:nvPr/>
-        </p:nvSpPr>
-        <p:spPr>
-          <a:xfrm>
-            <a:off x="8074152" y="1856232"/>
-            <a:ext cx="2825496" cy="1261872"/>
+            <a:endParaRPr lang="en-US" sz="1300" dirty="0"/>
+          </a:p>
+        </p:txBody>
+      </p:sp>
+      <p:sp>
+        <p:nvSpPr>
+          <p:cNvPr id="14" name="Text 12"/>
+          <p:cNvSpPr/>
+          <p:nvPr/>
+        </p:nvSpPr>
+        <p:spPr>
+          <a:xfrm>
+            <a:off x="8074152" y="1920240"/>
+            <a:ext cx="2825496" cy="1188720"/>
           </a:xfrm>
           <a:prstGeom prst="rect">
             <a:avLst/>
@@ -10897,7 +11559,7 @@
               <a:buNone/>
             </a:pPr>
             <a:r>
-              <a:rPr lang="en-US" sz="1250" dirty="0">
+              <a:rPr lang="en-US" sz="1550" dirty="0">
                 <a:solidFill>
                   <a:srgbClr val="17364A"/>
                 </a:solidFill>
@@ -10907,13 +11569,13 @@
               </a:rPr>
               <a:t>1. What is eCR?</a:t>
             </a:r>
-            <a:endParaRPr lang="en-US" sz="1250" dirty="0"/>
-          </a:p>
-        </p:txBody>
-      </p:sp>
-      <p:sp>
-        <p:nvSpPr>
-          <p:cNvPr id="14" name="Shape 12"/>
+            <a:endParaRPr lang="en-US" sz="1550" dirty="0"/>
+          </a:p>
+        </p:txBody>
+      </p:sp>
+      <p:sp>
+        <p:nvSpPr>
+          <p:cNvPr id="15" name="Shape 13"/>
           <p:cNvSpPr/>
           <p:nvPr/>
         </p:nvSpPr>
@@ -10940,14 +11602,14 @@
       </p:sp>
       <p:sp>
         <p:nvSpPr>
-          <p:cNvPr id="15" name="Text 13"/>
+          <p:cNvPr id="16" name="Text 14"/>
           <p:cNvSpPr/>
           <p:nvPr/>
         </p:nvSpPr>
         <p:spPr>
           <a:xfrm>
             <a:off x="8074152" y="3666744"/>
-            <a:ext cx="2825496" cy="201168"/>
+            <a:ext cx="2825496" cy="256032"/>
           </a:xfrm>
           <a:prstGeom prst="rect">
             <a:avLst/>
@@ -10963,7 +11625,7 @@
               <a:buNone/>
             </a:pPr>
             <a:r>
-              <a:rPr lang="en-US" sz="950" b="1" dirty="0">
+              <a:rPr lang="en-US" sz="1300" b="1" dirty="0">
                 <a:solidFill>
                   <a:srgbClr val="0068B7"/>
                 </a:solidFill>
@@ -10973,20 +11635,20 @@
               </a:rPr>
               <a:t>Use this for</a:t>
             </a:r>
-            <a:endParaRPr lang="en-US" sz="950" dirty="0"/>
-          </a:p>
-        </p:txBody>
-      </p:sp>
-      <p:sp>
-        <p:nvSpPr>
-          <p:cNvPr id="16" name="Text 14"/>
-          <p:cNvSpPr/>
-          <p:nvPr/>
-        </p:nvSpPr>
-        <p:spPr>
-          <a:xfrm>
-            <a:off x="8074152" y="3959352"/>
-            <a:ext cx="2825496" cy="1170432"/>
+            <a:endParaRPr lang="en-US" sz="1300" dirty="0"/>
+          </a:p>
+        </p:txBody>
+      </p:sp>
+      <p:sp>
+        <p:nvSpPr>
+          <p:cNvPr id="17" name="Text 15"/>
+          <p:cNvSpPr/>
+          <p:nvPr/>
+        </p:nvSpPr>
+        <p:spPr>
+          <a:xfrm>
+            <a:off x="8074152" y="4023360"/>
+            <a:ext cx="2825496" cy="1097280"/>
           </a:xfrm>
           <a:prstGeom prst="rect">
             <a:avLst/>
@@ -11004,7 +11666,7 @@
               <a:buNone/>
             </a:pPr>
             <a:r>
-              <a:rPr lang="en-US" sz="1250" dirty="0">
+              <a:rPr lang="en-US" sz="1550" dirty="0">
                 <a:solidFill>
                   <a:srgbClr val="17364A"/>
                 </a:solidFill>
@@ -11014,7 +11676,7 @@
               </a:rPr>
               <a:t>Connect the concept to public health decisions, safeguards, documentation, or implementation work.</a:t>
             </a:r>
-            <a:endParaRPr lang="en-US" sz="1250" dirty="0"/>
+            <a:endParaRPr lang="en-US" sz="1550" dirty="0"/>
           </a:p>
         </p:txBody>
       </p:sp>
@@ -11211,7 +11873,7 @@
                 <a:ea typeface="Aptos" pitchFamily="34" charset="-122"/>
                 <a:cs typeface="Aptos" pitchFamily="34" charset="-120"/>
               </a:rPr>
-              <a:t>© Paula Soper</a:t>
+              <a:t>Â© Paula Soper</a:t>
             </a:r>
             <a:endParaRPr lang="en-US" sz="800" dirty="0"/>
           </a:p>
@@ -11219,7 +11881,46 @@
       </p:sp>
       <p:sp>
         <p:nvSpPr>
-          <p:cNvPr id="7" name="Shape 5"/>
+          <p:cNvPr id="7" name="Text 5"/>
+          <p:cNvSpPr/>
+          <p:nvPr/>
+        </p:nvSpPr>
+        <p:spPr>
+          <a:xfrm>
+            <a:off x="11137392" y="6510528"/>
+            <a:ext cx="411480" cy="201168"/>
+          </a:xfrm>
+          <a:prstGeom prst="rect">
+            <a:avLst/>
+          </a:prstGeom>
+          <a:noFill/>
+          <a:ln/>
+        </p:spPr>
+        <p:txBody>
+          <a:bodyPr wrap="square" lIns="0" tIns="0" rIns="0" bIns="0" rtlCol="0" anchor="ctr"/>
+          <a:lstStyle/>
+          <a:p>
+            <a:pPr algn="r" indent="0" marL="0">
+              <a:buNone/>
+            </a:pPr>
+            <a:r>
+              <a:rPr lang="en-US" sz="900" dirty="0">
+                <a:solidFill>
+                  <a:srgbClr val="5F7181"/>
+                </a:solidFill>
+                <a:latin typeface="Aptos" pitchFamily="34" charset="0"/>
+                <a:ea typeface="Aptos" pitchFamily="34" charset="-122"/>
+                <a:cs typeface="Aptos" pitchFamily="34" charset="-120"/>
+              </a:rPr>
+              <a:t>23</a:t>
+            </a:r>
+            <a:endParaRPr lang="en-US" sz="900" dirty="0"/>
+          </a:p>
+        </p:txBody>
+      </p:sp>
+      <p:sp>
+        <p:nvSpPr>
+          <p:cNvPr id="8" name="Shape 6"/>
           <p:cNvSpPr/>
           <p:nvPr/>
         </p:nvSpPr>
@@ -11244,7 +11945,7 @@
       </p:sp>
       <p:sp>
         <p:nvSpPr>
-          <p:cNvPr id="8" name="Text 6"/>
+          <p:cNvPr id="9" name="Text 7"/>
           <p:cNvSpPr/>
           <p:nvPr/>
         </p:nvSpPr>
@@ -11283,14 +11984,14 @@
       </p:sp>
       <p:sp>
         <p:nvSpPr>
-          <p:cNvPr id="9" name="Text 7"/>
+          <p:cNvPr id="10" name="Text 8"/>
           <p:cNvSpPr/>
           <p:nvPr/>
         </p:nvSpPr>
         <p:spPr>
           <a:xfrm>
             <a:off x="640080" y="621792"/>
-            <a:ext cx="10881360" cy="566928"/>
+            <a:ext cx="10881360" cy="713232"/>
           </a:xfrm>
           <a:prstGeom prst="rect">
             <a:avLst/>
@@ -11308,7 +12009,7 @@
               <a:buNone/>
             </a:pPr>
             <a:r>
-              <a:rPr lang="en-US" sz="2700" b="1" dirty="0">
+              <a:rPr lang="en-US" sz="3400" b="1" dirty="0">
                 <a:solidFill>
                   <a:srgbClr val="003A63"/>
                 </a:solidFill>
@@ -11318,20 +12019,20 @@
               </a:rPr>
               <a:t>References and Resources</a:t>
             </a:r>
-            <a:endParaRPr lang="en-US" sz="2700" dirty="0"/>
-          </a:p>
-        </p:txBody>
-      </p:sp>
-      <p:sp>
-        <p:nvSpPr>
-          <p:cNvPr id="10" name="Text 8"/>
-          <p:cNvSpPr/>
-          <p:nvPr/>
-        </p:nvSpPr>
-        <p:spPr>
-          <a:xfrm>
-            <a:off x="868680" y="1417320"/>
-            <a:ext cx="6675120" cy="4434840"/>
+            <a:endParaRPr lang="en-US" sz="3400" dirty="0"/>
+          </a:p>
+        </p:txBody>
+      </p:sp>
+      <p:sp>
+        <p:nvSpPr>
+          <p:cNvPr id="11" name="Text 9"/>
+          <p:cNvSpPr/>
+          <p:nvPr/>
+        </p:nvSpPr>
+        <p:spPr>
+          <a:xfrm>
+            <a:off x="868680" y="1508760"/>
+            <a:ext cx="6537960" cy="4160520"/>
           </a:xfrm>
           <a:prstGeom prst="rect">
             <a:avLst/>
@@ -11346,7 +12047,7 @@
           <a:lstStyle/>
           <a:p>
             <a:r>
-              <a:rPr lang="en-US" sz="1700" dirty="0">
+              <a:rPr lang="en-US" sz="2100" dirty="0">
                 <a:solidFill>
                   <a:srgbClr val="17364A"/>
                 </a:solidFill>
@@ -11356,11 +12057,11 @@
               </a:rPr>
               <a:t>CDC Electronic Case Reporting resources: https://www.cdc.gov/ecr/php/index.html</a:t>
             </a:r>
-            <a:endParaRPr lang="en-US" sz="1700" dirty="0"/>
-          </a:p>
-          <a:p>
-            <a:r>
-              <a:rPr lang="en-US" sz="1700" dirty="0">
+            <a:endParaRPr lang="en-US" sz="2100" dirty="0"/>
+          </a:p>
+          <a:p>
+            <a:r>
+              <a:rPr lang="en-US" sz="2100" dirty="0">
                 <a:solidFill>
                   <a:srgbClr val="17364A"/>
                 </a:solidFill>
@@ -11370,11 +12071,11 @@
               </a:rPr>
               <a:t>AIMS eCR triggering documentation: https://ecr.aimsplatform.org/ehr-implementers/triggering/</a:t>
             </a:r>
-            <a:endParaRPr lang="en-US" sz="1700" dirty="0"/>
-          </a:p>
-          <a:p>
-            <a:r>
-              <a:rPr lang="en-US" sz="1700" dirty="0">
+            <a:endParaRPr lang="en-US" sz="2100" dirty="0"/>
+          </a:p>
+          <a:p>
+            <a:r>
+              <a:rPr lang="en-US" sz="2100" dirty="0">
                 <a:solidFill>
                   <a:srgbClr val="17364A"/>
                 </a:solidFill>
@@ -11384,27 +12085,13 @@
               </a:rPr>
               <a:t>HL7 eCR FHIR Implementation Guide: https://hl7.org/fhir/us/ecr/</a:t>
             </a:r>
-            <a:endParaRPr lang="en-US" sz="1700" dirty="0"/>
-          </a:p>
-          <a:p>
-            <a:r>
-              <a:rPr lang="en-US" sz="1700" dirty="0">
-                <a:solidFill>
-                  <a:srgbClr val="17364A"/>
-                </a:solidFill>
-                <a:latin typeface="Aptos" pitchFamily="34" charset="0"/>
-                <a:ea typeface="Aptos" pitchFamily="34" charset="-122"/>
-                <a:cs typeface="Aptos" pitchFamily="34" charset="-120"/>
-              </a:rPr>
-              <a:t>Jurisdictional eCR onboarding and surveillance documentation</a:t>
-            </a:r>
-            <a:endParaRPr lang="en-US" sz="1700" dirty="0"/>
-          </a:p>
-        </p:txBody>
-      </p:sp>
-      <p:sp>
-        <p:nvSpPr>
-          <p:cNvPr id="11" name="Shape 9"/>
+            <a:endParaRPr lang="en-US" sz="2100" dirty="0"/>
+          </a:p>
+        </p:txBody>
+      </p:sp>
+      <p:sp>
+        <p:nvSpPr>
+          <p:cNvPr id="12" name="Shape 10"/>
           <p:cNvSpPr/>
           <p:nvPr/>
         </p:nvSpPr>
@@ -11431,14 +12118,14 @@
       </p:sp>
       <p:sp>
         <p:nvSpPr>
-          <p:cNvPr id="12" name="Text 10"/>
+          <p:cNvPr id="13" name="Text 11"/>
           <p:cNvSpPr/>
           <p:nvPr/>
         </p:nvSpPr>
         <p:spPr>
           <a:xfrm>
             <a:off x="8074152" y="1563624"/>
-            <a:ext cx="2825496" cy="201168"/>
+            <a:ext cx="2825496" cy="256032"/>
           </a:xfrm>
           <a:prstGeom prst="rect">
             <a:avLst/>
@@ -11454,7 +12141,7 @@
               <a:buNone/>
             </a:pPr>
             <a:r>
-              <a:rPr lang="en-US" sz="950" b="1" dirty="0">
+              <a:rPr lang="en-US" sz="1300" b="1" dirty="0">
                 <a:solidFill>
                   <a:srgbClr val="0068B7"/>
                 </a:solidFill>
@@ -11464,20 +12151,20 @@
               </a:rPr>
               <a:t>Key idea</a:t>
             </a:r>
-            <a:endParaRPr lang="en-US" sz="950" dirty="0"/>
-          </a:p>
-        </p:txBody>
-      </p:sp>
-      <p:sp>
-        <p:nvSpPr>
-          <p:cNvPr id="13" name="Text 11"/>
-          <p:cNvSpPr/>
-          <p:nvPr/>
-        </p:nvSpPr>
-        <p:spPr>
-          <a:xfrm>
-            <a:off x="8074152" y="1856232"/>
-            <a:ext cx="2825496" cy="1261872"/>
+            <a:endParaRPr lang="en-US" sz="1300" dirty="0"/>
+          </a:p>
+        </p:txBody>
+      </p:sp>
+      <p:sp>
+        <p:nvSpPr>
+          <p:cNvPr id="14" name="Text 12"/>
+          <p:cNvSpPr/>
+          <p:nvPr/>
+        </p:nvSpPr>
+        <p:spPr>
+          <a:xfrm>
+            <a:off x="8074152" y="1920240"/>
+            <a:ext cx="2825496" cy="1188720"/>
           </a:xfrm>
           <a:prstGeom prst="rect">
             <a:avLst/>
@@ -11495,7 +12182,7 @@
               <a:buNone/>
             </a:pPr>
             <a:r>
-              <a:rPr lang="en-US" sz="1250" dirty="0">
+              <a:rPr lang="en-US" sz="1550" dirty="0">
                 <a:solidFill>
                   <a:srgbClr val="17364A"/>
                 </a:solidFill>
@@ -11505,13 +12192,13 @@
               </a:rPr>
               <a:t>CDC Electronic Case Reporting resources: https://www.cdc.gov/ecr/php/index.html</a:t>
             </a:r>
-            <a:endParaRPr lang="en-US" sz="1250" dirty="0"/>
-          </a:p>
-        </p:txBody>
-      </p:sp>
-      <p:sp>
-        <p:nvSpPr>
-          <p:cNvPr id="14" name="Shape 12"/>
+            <a:endParaRPr lang="en-US" sz="1550" dirty="0"/>
+          </a:p>
+        </p:txBody>
+      </p:sp>
+      <p:sp>
+        <p:nvSpPr>
+          <p:cNvPr id="15" name="Shape 13"/>
           <p:cNvSpPr/>
           <p:nvPr/>
         </p:nvSpPr>
@@ -11538,14 +12225,14 @@
       </p:sp>
       <p:sp>
         <p:nvSpPr>
-          <p:cNvPr id="15" name="Text 13"/>
+          <p:cNvPr id="16" name="Text 14"/>
           <p:cNvSpPr/>
           <p:nvPr/>
         </p:nvSpPr>
         <p:spPr>
           <a:xfrm>
             <a:off x="8074152" y="3666744"/>
-            <a:ext cx="2825496" cy="201168"/>
+            <a:ext cx="2825496" cy="256032"/>
           </a:xfrm>
           <a:prstGeom prst="rect">
             <a:avLst/>
@@ -11561,7 +12248,7 @@
               <a:buNone/>
             </a:pPr>
             <a:r>
-              <a:rPr lang="en-US" sz="950" b="1" dirty="0">
+              <a:rPr lang="en-US" sz="1300" b="1" dirty="0">
                 <a:solidFill>
                   <a:srgbClr val="0068B7"/>
                 </a:solidFill>
@@ -11571,20 +12258,20 @@
               </a:rPr>
               <a:t>Use this for</a:t>
             </a:r>
-            <a:endParaRPr lang="en-US" sz="950" dirty="0"/>
-          </a:p>
-        </p:txBody>
-      </p:sp>
-      <p:sp>
-        <p:nvSpPr>
-          <p:cNvPr id="16" name="Text 14"/>
-          <p:cNvSpPr/>
-          <p:nvPr/>
-        </p:nvSpPr>
-        <p:spPr>
-          <a:xfrm>
-            <a:off x="8074152" y="3959352"/>
-            <a:ext cx="2825496" cy="1170432"/>
+            <a:endParaRPr lang="en-US" sz="1300" dirty="0"/>
+          </a:p>
+        </p:txBody>
+      </p:sp>
+      <p:sp>
+        <p:nvSpPr>
+          <p:cNvPr id="17" name="Text 15"/>
+          <p:cNvSpPr/>
+          <p:nvPr/>
+        </p:nvSpPr>
+        <p:spPr>
+          <a:xfrm>
+            <a:off x="8074152" y="4023360"/>
+            <a:ext cx="2825496" cy="1097280"/>
           </a:xfrm>
           <a:prstGeom prst="rect">
             <a:avLst/>
@@ -11602,7 +12289,7 @@
               <a:buNone/>
             </a:pPr>
             <a:r>
-              <a:rPr lang="en-US" sz="1250" dirty="0">
+              <a:rPr lang="en-US" sz="1550" dirty="0">
                 <a:solidFill>
                   <a:srgbClr val="17364A"/>
                 </a:solidFill>
@@ -11612,7 +12299,7 @@
               </a:rPr>
               <a:t>Connect the concept to public health decisions, safeguards, documentation, or implementation work.</a:t>
             </a:r>
-            <a:endParaRPr lang="en-US" sz="1250" dirty="0"/>
+            <a:endParaRPr lang="en-US" sz="1550" dirty="0"/>
           </a:p>
         </p:txBody>
       </p:sp>
@@ -11809,7 +12496,7 @@
                 <a:ea typeface="Aptos" pitchFamily="34" charset="-122"/>
                 <a:cs typeface="Aptos" pitchFamily="34" charset="-120"/>
               </a:rPr>
-              <a:t>© Paula Soper</a:t>
+              <a:t>Â© Paula Soper</a:t>
             </a:r>
             <a:endParaRPr lang="en-US" sz="800" dirty="0"/>
           </a:p>
@@ -11823,8 +12510,47 @@
         </p:nvSpPr>
         <p:spPr>
           <a:xfrm>
+            <a:off x="11137392" y="6510528"/>
+            <a:ext cx="411480" cy="201168"/>
+          </a:xfrm>
+          <a:prstGeom prst="rect">
+            <a:avLst/>
+          </a:prstGeom>
+          <a:noFill/>
+          <a:ln/>
+        </p:spPr>
+        <p:txBody>
+          <a:bodyPr wrap="square" lIns="0" tIns="0" rIns="0" bIns="0" rtlCol="0" anchor="ctr"/>
+          <a:lstStyle/>
+          <a:p>
+            <a:pPr algn="r" indent="0" marL="0">
+              <a:buNone/>
+            </a:pPr>
+            <a:r>
+              <a:rPr lang="en-US" sz="900" dirty="0">
+                <a:solidFill>
+                  <a:srgbClr val="5F7181"/>
+                </a:solidFill>
+                <a:latin typeface="Aptos" pitchFamily="34" charset="0"/>
+                <a:ea typeface="Aptos" pitchFamily="34" charset="-122"/>
+                <a:cs typeface="Aptos" pitchFamily="34" charset="-120"/>
+              </a:rPr>
+              <a:t>3</a:t>
+            </a:r>
+            <a:endParaRPr lang="en-US" sz="900" dirty="0"/>
+          </a:p>
+        </p:txBody>
+      </p:sp>
+      <p:sp>
+        <p:nvSpPr>
+          <p:cNvPr id="8" name="Text 6"/>
+          <p:cNvSpPr/>
+          <p:nvPr/>
+        </p:nvSpPr>
+        <p:spPr>
+          <a:xfrm>
             <a:off x="640080" y="658368"/>
-            <a:ext cx="10881360" cy="566928"/>
+            <a:ext cx="10881360" cy="713232"/>
           </a:xfrm>
           <a:prstGeom prst="rect">
             <a:avLst/>
@@ -11842,7 +12568,7 @@
               <a:buNone/>
             </a:pPr>
             <a:r>
-              <a:rPr lang="en-US" sz="2700" b="1" dirty="0">
+              <a:rPr lang="en-US" sz="3400" b="1" dirty="0">
                 <a:solidFill>
                   <a:srgbClr val="003A63"/>
                 </a:solidFill>
@@ -11852,20 +12578,20 @@
               </a:rPr>
               <a:t>How this module connects to the playbook</a:t>
             </a:r>
-            <a:endParaRPr lang="en-US" sz="2700" dirty="0"/>
-          </a:p>
-        </p:txBody>
-      </p:sp>
-      <p:sp>
-        <p:nvSpPr>
-          <p:cNvPr id="8" name="Text 6"/>
-          <p:cNvSpPr/>
-          <p:nvPr/>
-        </p:nvSpPr>
-        <p:spPr>
-          <a:xfrm>
-            <a:off x="868680" y="1417320"/>
-            <a:ext cx="6903720" cy="4480560"/>
+            <a:endParaRPr lang="en-US" sz="3400" dirty="0"/>
+          </a:p>
+        </p:txBody>
+      </p:sp>
+      <p:sp>
+        <p:nvSpPr>
+          <p:cNvPr id="9" name="Text 7"/>
+          <p:cNvSpPr/>
+          <p:nvPr/>
+        </p:nvSpPr>
+        <p:spPr>
+          <a:xfrm>
+            <a:off x="868680" y="1508760"/>
+            <a:ext cx="6812280" cy="3977640"/>
           </a:xfrm>
           <a:prstGeom prst="rect">
             <a:avLst/>
@@ -11880,7 +12606,7 @@
           <a:lstStyle/>
           <a:p>
             <a:r>
-              <a:rPr lang="en-US" sz="1540" dirty="0">
+              <a:rPr lang="en-US" sz="1900" dirty="0">
                 <a:solidFill>
                   <a:srgbClr val="17364A"/>
                 </a:solidFill>
@@ -11888,13 +12614,13 @@
                 <a:ea typeface="Aptos" pitchFamily="34" charset="-122"/>
                 <a:cs typeface="Aptos" pitchFamily="34" charset="-120"/>
               </a:rPr>
-              <a:t>Play 13: Monitor and Evaluate AI Systems - This lesson informs Play 13 by helping learners connect the lesson topic to monitor and.</a:t>
-            </a:r>
-            <a:endParaRPr lang="en-US" sz="1540" dirty="0"/>
-          </a:p>
-          <a:p>
-            <a:r>
-              <a:rPr lang="en-US" sz="1540" dirty="0">
+              <a:t>Play 13: Monitor and Evaluate AI Systems - This lesson informs Play 13 by helping learners connect the.</a:t>
+            </a:r>
+            <a:endParaRPr lang="en-US" sz="1900" dirty="0"/>
+          </a:p>
+          <a:p>
+            <a:r>
+              <a:rPr lang="en-US" sz="1900" dirty="0">
                 <a:solidFill>
                   <a:srgbClr val="17364A"/>
                 </a:solidFill>
@@ -11902,13 +12628,13 @@
                 <a:ea typeface="Aptos" pitchFamily="34" charset="-122"/>
                 <a:cs typeface="Aptos" pitchFamily="34" charset="-120"/>
               </a:rPr>
-              <a:t>Play 1: Vision &amp; Guardrails - This lesson informs Play 1 by helping learners connect the lesson topic to vision &amp; guardrails work in.</a:t>
-            </a:r>
-            <a:endParaRPr lang="en-US" sz="1540" dirty="0"/>
-          </a:p>
-          <a:p>
-            <a:r>
-              <a:rPr lang="en-US" sz="1540" dirty="0">
+              <a:t>Play 1: Vision &amp; Guardrails - This lesson informs Play 1 by helping learners connect the lesson topic to.</a:t>
+            </a:r>
+            <a:endParaRPr lang="en-US" sz="1900" dirty="0"/>
+          </a:p>
+          <a:p>
+            <a:r>
+              <a:rPr lang="en-US" sz="1900" dirty="0">
                 <a:solidFill>
                   <a:srgbClr val="17364A"/>
                 </a:solidFill>
@@ -11916,13 +12642,13 @@
                 <a:ea typeface="Aptos" pitchFamily="34" charset="-122"/>
                 <a:cs typeface="Aptos" pitchFamily="34" charset="-120"/>
               </a:rPr>
-              <a:t>Play 12: Execute Governance and Oversight - This lesson informs Play 12 by helping learners connect the lesson topic to execute.</a:t>
-            </a:r>
-            <a:endParaRPr lang="en-US" sz="1540" dirty="0"/>
-          </a:p>
-          <a:p>
-            <a:r>
-              <a:rPr lang="en-US" sz="1540" dirty="0">
+              <a:t>Play 12: Execute Governance and Oversight - This lesson informs Play 12 by helping learners connect the.</a:t>
+            </a:r>
+            <a:endParaRPr lang="en-US" sz="1900" dirty="0"/>
+          </a:p>
+          <a:p>
+            <a:r>
+              <a:rPr lang="en-US" sz="1900" dirty="0">
                 <a:solidFill>
                   <a:srgbClr val="17364A"/>
                 </a:solidFill>
@@ -11930,15 +12656,15 @@
                 <a:ea typeface="Aptos" pitchFamily="34" charset="-122"/>
                 <a:cs typeface="Aptos" pitchFamily="34" charset="-120"/>
               </a:rPr>
-              <a:t>Play 7: Prioritize Use Cases - This lesson informs Play 7 by helping learners connect the lesson topic to prioritize use cases work.</a:t>
-            </a:r>
-            <a:endParaRPr lang="en-US" sz="1540" dirty="0"/>
-          </a:p>
-        </p:txBody>
-      </p:sp>
-      <p:sp>
-        <p:nvSpPr>
-          <p:cNvPr id="9" name="Shape 7"/>
+              <a:t>Play 7: Prioritize Use Cases - This lesson informs Play 7 by helping learners connect the lesson topic to.</a:t>
+            </a:r>
+            <a:endParaRPr lang="en-US" sz="1900" dirty="0"/>
+          </a:p>
+        </p:txBody>
+      </p:sp>
+      <p:sp>
+        <p:nvSpPr>
+          <p:cNvPr id="10" name="Shape 8"/>
           <p:cNvSpPr/>
           <p:nvPr/>
         </p:nvSpPr>
@@ -11965,14 +12691,14 @@
       </p:sp>
       <p:sp>
         <p:nvSpPr>
-          <p:cNvPr id="10" name="Text 8"/>
+          <p:cNvPr id="11" name="Text 9"/>
           <p:cNvSpPr/>
           <p:nvPr/>
         </p:nvSpPr>
         <p:spPr>
           <a:xfrm>
             <a:off x="8211312" y="1563624"/>
-            <a:ext cx="2734056" cy="201168"/>
+            <a:ext cx="2734056" cy="256032"/>
           </a:xfrm>
           <a:prstGeom prst="rect">
             <a:avLst/>
@@ -11988,7 +12714,7 @@
               <a:buNone/>
             </a:pPr>
             <a:r>
-              <a:rPr lang="en-US" sz="950" b="1" dirty="0">
+              <a:rPr lang="en-US" sz="1300" b="1" dirty="0">
                 <a:solidFill>
                   <a:srgbClr val="0068B7"/>
                 </a:solidFill>
@@ -11998,20 +12724,20 @@
               </a:rPr>
               <a:t>Apply the lesson</a:t>
             </a:r>
-            <a:endParaRPr lang="en-US" sz="950" dirty="0"/>
-          </a:p>
-        </p:txBody>
-      </p:sp>
-      <p:sp>
-        <p:nvSpPr>
-          <p:cNvPr id="11" name="Text 9"/>
-          <p:cNvSpPr/>
-          <p:nvPr/>
-        </p:nvSpPr>
-        <p:spPr>
-          <a:xfrm>
-            <a:off x="8211312" y="1856232"/>
-            <a:ext cx="2734056" cy="1536192"/>
+            <a:endParaRPr lang="en-US" sz="1300" dirty="0"/>
+          </a:p>
+        </p:txBody>
+      </p:sp>
+      <p:sp>
+        <p:nvSpPr>
+          <p:cNvPr id="12" name="Text 10"/>
+          <p:cNvSpPr/>
+          <p:nvPr/>
+        </p:nvSpPr>
+        <p:spPr>
+          <a:xfrm>
+            <a:off x="8211312" y="1920240"/>
+            <a:ext cx="2734056" cy="1463040"/>
           </a:xfrm>
           <a:prstGeom prst="rect">
             <a:avLst/>
@@ -12029,7 +12755,7 @@
               <a:buNone/>
             </a:pPr>
             <a:r>
-              <a:rPr lang="en-US" sz="1250" dirty="0">
+              <a:rPr lang="en-US" sz="1550" dirty="0">
                 <a:solidFill>
                   <a:srgbClr val="17364A"/>
                 </a:solidFill>
@@ -12039,32 +12765,32 @@
               </a:rPr>
               <a:t>Use the related plays to identify decisions, participants, timing, approvals, and documentation needed for responsible implementation.</a:t>
             </a:r>
-            <a:endParaRPr lang="en-US" sz="1250" dirty="0"/>
-          </a:p>
-        </p:txBody>
-      </p:sp>
-      <p:sp>
-        <p:nvSpPr>
-          <p:cNvPr id="12" name="Shape 10"/>
-          <p:cNvSpPr/>
-          <p:nvPr/>
-        </p:nvSpPr>
-        <p:spPr>
-          <a:xfrm>
-            <a:off x="8046720" y="3794760"/>
-            <a:ext cx="3063240" cy="1508760"/>
+            <a:endParaRPr lang="en-US" sz="1550" dirty="0"/>
+          </a:p>
+        </p:txBody>
+      </p:sp>
+      <p:sp>
+        <p:nvSpPr>
+          <p:cNvPr id="13" name="Shape 11"/>
+          <p:cNvSpPr/>
+          <p:nvPr/>
+        </p:nvSpPr>
+        <p:spPr>
+          <a:xfrm>
+            <a:off x="7818120" y="3977640"/>
+            <a:ext cx="972312" cy="749808"/>
           </a:xfrm>
           <a:prstGeom prst="roundRect">
             <a:avLst>
-              <a:gd name="adj" fmla="val 7273"/>
+              <a:gd name="adj" fmla="val 14634"/>
             </a:avLst>
           </a:prstGeom>
           <a:solidFill>
-            <a:srgbClr val="FFF4D9"/>
+            <a:srgbClr val="0068B7"/>
           </a:solidFill>
           <a:ln w="12700">
             <a:solidFill>
-              <a:srgbClr val="B9D7E6"/>
+              <a:srgbClr val="0068B7"/>
             </a:solidFill>
             <a:prstDash val="solid"/>
           </a:ln>
@@ -12072,81 +12798,256 @@
       </p:sp>
       <p:sp>
         <p:nvSpPr>
-          <p:cNvPr id="13" name="Text 11"/>
-          <p:cNvSpPr/>
-          <p:nvPr/>
-        </p:nvSpPr>
-        <p:spPr>
-          <a:xfrm>
-            <a:off x="8211312" y="3941064"/>
-            <a:ext cx="2734056" cy="201168"/>
-          </a:xfrm>
-          <a:prstGeom prst="rect">
-            <a:avLst/>
-          </a:prstGeom>
-          <a:noFill/>
-          <a:ln/>
-        </p:spPr>
-        <p:txBody>
-          <a:bodyPr wrap="square" lIns="0" tIns="0" rIns="0" bIns="0" rtlCol="0" anchor="ctr"/>
-          <a:lstStyle/>
-          <a:p>
-            <a:pPr indent="0" marL="0">
-              <a:buNone/>
-            </a:pPr>
-            <a:r>
-              <a:rPr lang="en-US" sz="950" b="1" dirty="0">
-                <a:solidFill>
-                  <a:srgbClr val="0068B7"/>
-                </a:solidFill>
-                <a:latin typeface="Aptos" pitchFamily="34" charset="0"/>
-                <a:ea typeface="Aptos" pitchFamily="34" charset="-122"/>
-                <a:cs typeface="Aptos" pitchFamily="34" charset="-120"/>
-              </a:rPr>
-              <a:t>Keep in mind</a:t>
-            </a:r>
-            <a:endParaRPr lang="en-US" sz="950" dirty="0"/>
-          </a:p>
-        </p:txBody>
-      </p:sp>
-      <p:sp>
-        <p:nvSpPr>
           <p:cNvPr id="14" name="Text 12"/>
           <p:cNvSpPr/>
           <p:nvPr/>
         </p:nvSpPr>
         <p:spPr>
           <a:xfrm>
-            <a:off x="8211312" y="4233672"/>
-            <a:ext cx="2734056" cy="941832"/>
-          </a:xfrm>
-          <a:prstGeom prst="rect">
-            <a:avLst/>
-          </a:prstGeom>
-          <a:noFill/>
-          <a:ln/>
-        </p:spPr>
-        <p:txBody>
-          <a:bodyPr wrap="square" lIns="0" tIns="0" rIns="0" bIns="0" rtlCol="0" anchor="t">
+            <a:off x="7891272" y="4169664"/>
+            <a:ext cx="826008" cy="310896"/>
+          </a:xfrm>
+          <a:prstGeom prst="rect">
+            <a:avLst/>
+          </a:prstGeom>
+          <a:noFill/>
+          <a:ln/>
+        </p:spPr>
+        <p:txBody>
+          <a:bodyPr wrap="square" lIns="0" tIns="0" rIns="0" bIns="0" rtlCol="0" anchor="ctr">
             <a:normAutofit/>
           </a:bodyPr>
           <a:lstStyle/>
           <a:p>
-            <a:pPr indent="0" marL="0">
-              <a:buNone/>
-            </a:pPr>
-            <a:r>
-              <a:rPr lang="en-US" sz="1250" dirty="0">
-                <a:solidFill>
-                  <a:srgbClr val="17364A"/>
-                </a:solidFill>
-                <a:latin typeface="Aptos" pitchFamily="34" charset="0"/>
-                <a:ea typeface="Aptos" pitchFamily="34" charset="-122"/>
-                <a:cs typeface="Aptos" pitchFamily="34" charset="-120"/>
-              </a:rPr>
-              <a:t>The playbook connection helps turn training into agency work, not just individual knowledge.</a:t>
-            </a:r>
-            <a:endParaRPr lang="en-US" sz="1250" dirty="0"/>
+            <a:pPr algn="ctr" indent="0" marL="0">
+              <a:buNone/>
+            </a:pPr>
+            <a:r>
+              <a:rPr lang="en-US" sz="1500" b="1" dirty="0">
+                <a:solidFill>
+                  <a:srgbClr val="FFFFFF"/>
+                </a:solidFill>
+                <a:latin typeface="Aptos" pitchFamily="34" charset="0"/>
+                <a:ea typeface="Aptos" pitchFamily="34" charset="-122"/>
+                <a:cs typeface="Aptos" pitchFamily="34" charset="-120"/>
+              </a:rPr>
+              <a:t>Lesson</a:t>
+            </a:r>
+            <a:endParaRPr lang="en-US" sz="1500" dirty="0"/>
+          </a:p>
+        </p:txBody>
+      </p:sp>
+      <p:sp>
+        <p:nvSpPr>
+          <p:cNvPr id="15" name="Text 13"/>
+          <p:cNvSpPr/>
+          <p:nvPr/>
+        </p:nvSpPr>
+        <p:spPr>
+          <a:xfrm>
+            <a:off x="8817864" y="4187952"/>
+            <a:ext cx="201168" cy="256032"/>
+          </a:xfrm>
+          <a:prstGeom prst="rect">
+            <a:avLst/>
+          </a:prstGeom>
+          <a:noFill/>
+          <a:ln/>
+        </p:spPr>
+        <p:txBody>
+          <a:bodyPr wrap="square" lIns="0" tIns="0" rIns="0" bIns="0" rtlCol="0" anchor="ctr"/>
+          <a:lstStyle/>
+          <a:p>
+            <a:pPr algn="ctr" indent="0" marL="0">
+              <a:buNone/>
+            </a:pPr>
+            <a:r>
+              <a:rPr lang="en-US" sz="1800" b="1" dirty="0">
+                <a:solidFill>
+                  <a:srgbClr val="0068B7"/>
+                </a:solidFill>
+                <a:latin typeface="Aptos" pitchFamily="34" charset="0"/>
+                <a:ea typeface="Aptos" pitchFamily="34" charset="-122"/>
+                <a:cs typeface="Aptos" pitchFamily="34" charset="-120"/>
+              </a:rPr>
+              <a:t>â†’</a:t>
+            </a:r>
+            <a:endParaRPr lang="en-US" sz="1800" dirty="0"/>
+          </a:p>
+        </p:txBody>
+      </p:sp>
+      <p:sp>
+        <p:nvSpPr>
+          <p:cNvPr id="16" name="Shape 14"/>
+          <p:cNvSpPr/>
+          <p:nvPr/>
+        </p:nvSpPr>
+        <p:spPr>
+          <a:xfrm>
+            <a:off x="9046464" y="3977640"/>
+            <a:ext cx="972312" cy="749808"/>
+          </a:xfrm>
+          <a:prstGeom prst="roundRect">
+            <a:avLst>
+              <a:gd name="adj" fmla="val 14634"/>
+            </a:avLst>
+          </a:prstGeom>
+          <a:solidFill>
+            <a:srgbClr val="2F8A28"/>
+          </a:solidFill>
+          <a:ln w="12700">
+            <a:solidFill>
+              <a:srgbClr val="2F8A28"/>
+            </a:solidFill>
+            <a:prstDash val="solid"/>
+          </a:ln>
+        </p:spPr>
+      </p:sp>
+      <p:sp>
+        <p:nvSpPr>
+          <p:cNvPr id="17" name="Text 15"/>
+          <p:cNvSpPr/>
+          <p:nvPr/>
+        </p:nvSpPr>
+        <p:spPr>
+          <a:xfrm>
+            <a:off x="9119616" y="4169664"/>
+            <a:ext cx="826008" cy="310896"/>
+          </a:xfrm>
+          <a:prstGeom prst="rect">
+            <a:avLst/>
+          </a:prstGeom>
+          <a:noFill/>
+          <a:ln/>
+        </p:spPr>
+        <p:txBody>
+          <a:bodyPr wrap="square" lIns="0" tIns="0" rIns="0" bIns="0" rtlCol="0" anchor="ctr">
+            <a:normAutofit/>
+          </a:bodyPr>
+          <a:lstStyle/>
+          <a:p>
+            <a:pPr algn="ctr" indent="0" marL="0">
+              <a:buNone/>
+            </a:pPr>
+            <a:r>
+              <a:rPr lang="en-US" sz="1500" b="1" dirty="0">
+                <a:solidFill>
+                  <a:srgbClr val="FFFFFF"/>
+                </a:solidFill>
+                <a:latin typeface="Aptos" pitchFamily="34" charset="0"/>
+                <a:ea typeface="Aptos" pitchFamily="34" charset="-122"/>
+                <a:cs typeface="Aptos" pitchFamily="34" charset="-120"/>
+              </a:rPr>
+              <a:t>Plays</a:t>
+            </a:r>
+            <a:endParaRPr lang="en-US" sz="1500" dirty="0"/>
+          </a:p>
+        </p:txBody>
+      </p:sp>
+      <p:sp>
+        <p:nvSpPr>
+          <p:cNvPr id="18" name="Text 16"/>
+          <p:cNvSpPr/>
+          <p:nvPr/>
+        </p:nvSpPr>
+        <p:spPr>
+          <a:xfrm>
+            <a:off x="10046208" y="4187952"/>
+            <a:ext cx="201168" cy="256032"/>
+          </a:xfrm>
+          <a:prstGeom prst="rect">
+            <a:avLst/>
+          </a:prstGeom>
+          <a:noFill/>
+          <a:ln/>
+        </p:spPr>
+        <p:txBody>
+          <a:bodyPr wrap="square" lIns="0" tIns="0" rIns="0" bIns="0" rtlCol="0" anchor="ctr"/>
+          <a:lstStyle/>
+          <a:p>
+            <a:pPr algn="ctr" indent="0" marL="0">
+              <a:buNone/>
+            </a:pPr>
+            <a:r>
+              <a:rPr lang="en-US" sz="1800" b="1" dirty="0">
+                <a:solidFill>
+                  <a:srgbClr val="0068B7"/>
+                </a:solidFill>
+                <a:latin typeface="Aptos" pitchFamily="34" charset="0"/>
+                <a:ea typeface="Aptos" pitchFamily="34" charset="-122"/>
+                <a:cs typeface="Aptos" pitchFamily="34" charset="-120"/>
+              </a:rPr>
+              <a:t>â†’</a:t>
+            </a:r>
+            <a:endParaRPr lang="en-US" sz="1800" dirty="0"/>
+          </a:p>
+        </p:txBody>
+      </p:sp>
+      <p:sp>
+        <p:nvSpPr>
+          <p:cNvPr id="19" name="Shape 17"/>
+          <p:cNvSpPr/>
+          <p:nvPr/>
+        </p:nvSpPr>
+        <p:spPr>
+          <a:xfrm>
+            <a:off x="10274808" y="3977640"/>
+            <a:ext cx="972312" cy="749808"/>
+          </a:xfrm>
+          <a:prstGeom prst="roundRect">
+            <a:avLst>
+              <a:gd name="adj" fmla="val 14634"/>
+            </a:avLst>
+          </a:prstGeom>
+          <a:solidFill>
+            <a:srgbClr val="6A4CA3"/>
+          </a:solidFill>
+          <a:ln w="12700">
+            <a:solidFill>
+              <a:srgbClr val="6A4CA3"/>
+            </a:solidFill>
+            <a:prstDash val="solid"/>
+          </a:ln>
+        </p:spPr>
+      </p:sp>
+      <p:sp>
+        <p:nvSpPr>
+          <p:cNvPr id="20" name="Text 18"/>
+          <p:cNvSpPr/>
+          <p:nvPr/>
+        </p:nvSpPr>
+        <p:spPr>
+          <a:xfrm>
+            <a:off x="10347960" y="4169664"/>
+            <a:ext cx="826008" cy="310896"/>
+          </a:xfrm>
+          <a:prstGeom prst="rect">
+            <a:avLst/>
+          </a:prstGeom>
+          <a:noFill/>
+          <a:ln/>
+        </p:spPr>
+        <p:txBody>
+          <a:bodyPr wrap="square" lIns="0" tIns="0" rIns="0" bIns="0" rtlCol="0" anchor="ctr">
+            <a:normAutofit/>
+          </a:bodyPr>
+          <a:lstStyle/>
+          <a:p>
+            <a:pPr algn="ctr" indent="0" marL="0">
+              <a:buNone/>
+            </a:pPr>
+            <a:r>
+              <a:rPr lang="en-US" sz="1500" b="1" dirty="0">
+                <a:solidFill>
+                  <a:srgbClr val="FFFFFF"/>
+                </a:solidFill>
+                <a:latin typeface="Aptos" pitchFamily="34" charset="0"/>
+                <a:ea typeface="Aptos" pitchFamily="34" charset="-122"/>
+                <a:cs typeface="Aptos" pitchFamily="34" charset="-120"/>
+              </a:rPr>
+              <a:t>Action</a:t>
+            </a:r>
+            <a:endParaRPr lang="en-US" sz="1500" dirty="0"/>
           </a:p>
         </p:txBody>
       </p:sp>
@@ -12343,7 +13244,7 @@
                 <a:ea typeface="Aptos" pitchFamily="34" charset="-122"/>
                 <a:cs typeface="Aptos" pitchFamily="34" charset="-120"/>
               </a:rPr>
-              <a:t>© Paula Soper</a:t>
+              <a:t>Â© Paula Soper</a:t>
             </a:r>
             <a:endParaRPr lang="en-US" sz="800" dirty="0"/>
           </a:p>
@@ -12357,8 +13258,47 @@
         </p:nvSpPr>
         <p:spPr>
           <a:xfrm>
+            <a:off x="11137392" y="6510528"/>
+            <a:ext cx="411480" cy="201168"/>
+          </a:xfrm>
+          <a:prstGeom prst="rect">
+            <a:avLst/>
+          </a:prstGeom>
+          <a:noFill/>
+          <a:ln/>
+        </p:spPr>
+        <p:txBody>
+          <a:bodyPr wrap="square" lIns="0" tIns="0" rIns="0" bIns="0" rtlCol="0" anchor="ctr"/>
+          <a:lstStyle/>
+          <a:p>
+            <a:pPr algn="r" indent="0" marL="0">
+              <a:buNone/>
+            </a:pPr>
+            <a:r>
+              <a:rPr lang="en-US" sz="900" dirty="0">
+                <a:solidFill>
+                  <a:srgbClr val="5F7181"/>
+                </a:solidFill>
+                <a:latin typeface="Aptos" pitchFamily="34" charset="0"/>
+                <a:ea typeface="Aptos" pitchFamily="34" charset="-122"/>
+                <a:cs typeface="Aptos" pitchFamily="34" charset="-120"/>
+              </a:rPr>
+              <a:t>4</a:t>
+            </a:r>
+            <a:endParaRPr lang="en-US" sz="900" dirty="0"/>
+          </a:p>
+        </p:txBody>
+      </p:sp>
+      <p:sp>
+        <p:nvSpPr>
+          <p:cNvPr id="8" name="Text 6"/>
+          <p:cNvSpPr/>
+          <p:nvPr/>
+        </p:nvSpPr>
+        <p:spPr>
+          <a:xfrm>
             <a:off x="640080" y="658368"/>
-            <a:ext cx="10881360" cy="566928"/>
+            <a:ext cx="10881360" cy="713232"/>
           </a:xfrm>
           <a:prstGeom prst="rect">
             <a:avLst/>
@@ -12376,7 +13316,7 @@
               <a:buNone/>
             </a:pPr>
             <a:r>
-              <a:rPr lang="en-US" sz="2700" b="1" dirty="0">
+              <a:rPr lang="en-US" sz="3400" b="1" dirty="0">
                 <a:solidFill>
                   <a:srgbClr val="003A63"/>
                 </a:solidFill>
@@ -12386,20 +13326,20 @@
               </a:rPr>
               <a:t>Related toolkit resources</a:t>
             </a:r>
-            <a:endParaRPr lang="en-US" sz="2700" dirty="0"/>
-          </a:p>
-        </p:txBody>
-      </p:sp>
-      <p:sp>
-        <p:nvSpPr>
-          <p:cNvPr id="8" name="Text 6"/>
-          <p:cNvSpPr/>
-          <p:nvPr/>
-        </p:nvSpPr>
-        <p:spPr>
-          <a:xfrm>
-            <a:off x="868680" y="1417320"/>
-            <a:ext cx="6903720" cy="4480560"/>
+            <a:endParaRPr lang="en-US" sz="3400" dirty="0"/>
+          </a:p>
+        </p:txBody>
+      </p:sp>
+      <p:sp>
+        <p:nvSpPr>
+          <p:cNvPr id="9" name="Text 7"/>
+          <p:cNvSpPr/>
+          <p:nvPr/>
+        </p:nvSpPr>
+        <p:spPr>
+          <a:xfrm>
+            <a:off x="868680" y="1508760"/>
+            <a:ext cx="6812280" cy="3977640"/>
           </a:xfrm>
           <a:prstGeom prst="rect">
             <a:avLst/>
@@ -12414,7 +13354,7 @@
           <a:lstStyle/>
           <a:p>
             <a:r>
-              <a:rPr lang="en-US" sz="1460" dirty="0">
+              <a:rPr lang="en-US" sz="1850" dirty="0">
                 <a:solidFill>
                   <a:srgbClr val="17364A"/>
                 </a:solidFill>
@@ -12422,13 +13362,13 @@
                 <a:ea typeface="Aptos" pitchFamily="34" charset="-122"/>
                 <a:cs typeface="Aptos" pitchFamily="34" charset="-120"/>
               </a:rPr>
-              <a:t>Tool 44: Performance Monitoring Dashboard (Dashboard) - Use this tool to complete or strengthen the practical exercise for the module.</a:t>
-            </a:r>
-            <a:endParaRPr lang="en-US" sz="1460" dirty="0"/>
-          </a:p>
-          <a:p>
-            <a:r>
-              <a:rPr lang="en-US" sz="1460" dirty="0">
+              <a:t>Tool 44: Performance Monitoring Dashboard (Dashboard) - Use this tool to complete or strengthen the.</a:t>
+            </a:r>
+            <a:endParaRPr lang="en-US" sz="1850" dirty="0"/>
+          </a:p>
+          <a:p>
+            <a:r>
+              <a:rPr lang="en-US" sz="1850" dirty="0">
                 <a:solidFill>
                   <a:srgbClr val="17364A"/>
                 </a:solidFill>
@@ -12436,13 +13376,13 @@
                 <a:ea typeface="Aptos" pitchFamily="34" charset="-122"/>
                 <a:cs typeface="Aptos" pitchFamily="34" charset="-120"/>
               </a:rPr>
-              <a:t>Tool 45: Continuous Improvement Log (Log) - Use Continuous Improvement Log to translate this lesson into a documented public health.</a:t>
-            </a:r>
-            <a:endParaRPr lang="en-US" sz="1460" dirty="0"/>
-          </a:p>
-          <a:p>
-            <a:r>
-              <a:rPr lang="en-US" sz="1460" dirty="0">
+              <a:t>Tool 45: Continuous Improvement Log (Log) - Use Continuous Improvement Log to translate this lesson into a.</a:t>
+            </a:r>
+            <a:endParaRPr lang="en-US" sz="1850" dirty="0"/>
+          </a:p>
+          <a:p>
+            <a:r>
+              <a:rPr lang="en-US" sz="1850" dirty="0">
                 <a:solidFill>
                   <a:srgbClr val="17364A"/>
                 </a:solidFill>
@@ -12450,13 +13390,13 @@
                 <a:ea typeface="Aptos" pitchFamily="34" charset="-122"/>
                 <a:cs typeface="Aptos" pitchFamily="34" charset="-120"/>
               </a:rPr>
-              <a:t>Tool 48: AI Evaluation &amp; Outcomes Reporting (Template) - Use AI Evaluation &amp; Outcomes Reporting to translate this lesson into a.</a:t>
-            </a:r>
-            <a:endParaRPr lang="en-US" sz="1460" dirty="0"/>
-          </a:p>
-          <a:p>
-            <a:r>
-              <a:rPr lang="en-US" sz="1460" dirty="0">
+              <a:t>Tool 48: AI Evaluation &amp; Outcomes Reporting (Template) - Use AI Evaluation &amp; Outcomes Reporting to translate.</a:t>
+            </a:r>
+            <a:endParaRPr lang="en-US" sz="1850" dirty="0"/>
+          </a:p>
+          <a:p>
+            <a:r>
+              <a:rPr lang="en-US" sz="1850" dirty="0">
                 <a:solidFill>
                   <a:srgbClr val="17364A"/>
                 </a:solidFill>
@@ -12464,29 +13404,15 @@
                 <a:ea typeface="Aptos" pitchFamily="34" charset="-122"/>
                 <a:cs typeface="Aptos" pitchFamily="34" charset="-120"/>
               </a:rPr>
-              <a:t>Tool 4: AI Policy Landscape Scan (Worksheet) - Use AI Policy Landscape Scan to translate this lesson into a documented public health.</a:t>
-            </a:r>
-            <a:endParaRPr lang="en-US" sz="1460" dirty="0"/>
-          </a:p>
-          <a:p>
-            <a:r>
-              <a:rPr lang="en-US" sz="1460" dirty="0">
-                <a:solidFill>
-                  <a:srgbClr val="17364A"/>
-                </a:solidFill>
-                <a:latin typeface="Aptos" pitchFamily="34" charset="0"/>
-                <a:ea typeface="Aptos" pitchFamily="34" charset="-122"/>
-                <a:cs typeface="Aptos" pitchFamily="34" charset="-120"/>
-              </a:rPr>
-              <a:t>Tool 5: AI Environmental and Resource Impact Review (Checklist) - Use AI Environmental and Resource Impact Review to translate this.</a:t>
-            </a:r>
-            <a:endParaRPr lang="en-US" sz="1460" dirty="0"/>
-          </a:p>
-        </p:txBody>
-      </p:sp>
-      <p:sp>
-        <p:nvSpPr>
-          <p:cNvPr id="9" name="Shape 7"/>
+              <a:t>Tool 4: AI Policy Landscape Scan (Worksheet) - Use AI Policy Landscape Scan to translate this lesson into a.</a:t>
+            </a:r>
+            <a:endParaRPr lang="en-US" sz="1850" dirty="0"/>
+          </a:p>
+        </p:txBody>
+      </p:sp>
+      <p:sp>
+        <p:nvSpPr>
+          <p:cNvPr id="10" name="Shape 8"/>
           <p:cNvSpPr/>
           <p:nvPr/>
         </p:nvSpPr>
@@ -12513,14 +13439,14 @@
       </p:sp>
       <p:sp>
         <p:nvSpPr>
-          <p:cNvPr id="10" name="Text 8"/>
+          <p:cNvPr id="11" name="Text 9"/>
           <p:cNvSpPr/>
           <p:nvPr/>
         </p:nvSpPr>
         <p:spPr>
           <a:xfrm>
             <a:off x="8211312" y="1563624"/>
-            <a:ext cx="2734056" cy="201168"/>
+            <a:ext cx="2734056" cy="256032"/>
           </a:xfrm>
           <a:prstGeom prst="rect">
             <a:avLst/>
@@ -12536,7 +13462,7 @@
               <a:buNone/>
             </a:pPr>
             <a:r>
-              <a:rPr lang="en-US" sz="950" b="1" dirty="0">
+              <a:rPr lang="en-US" sz="1300" b="1" dirty="0">
                 <a:solidFill>
                   <a:srgbClr val="0068B7"/>
                 </a:solidFill>
@@ -12546,20 +13472,20 @@
               </a:rPr>
               <a:t>Use the tools</a:t>
             </a:r>
-            <a:endParaRPr lang="en-US" sz="950" dirty="0"/>
-          </a:p>
-        </p:txBody>
-      </p:sp>
-      <p:sp>
-        <p:nvSpPr>
-          <p:cNvPr id="11" name="Text 9"/>
-          <p:cNvSpPr/>
-          <p:nvPr/>
-        </p:nvSpPr>
-        <p:spPr>
-          <a:xfrm>
-            <a:off x="8211312" y="1856232"/>
-            <a:ext cx="2734056" cy="1536192"/>
+            <a:endParaRPr lang="en-US" sz="1300" dirty="0"/>
+          </a:p>
+        </p:txBody>
+      </p:sp>
+      <p:sp>
+        <p:nvSpPr>
+          <p:cNvPr id="12" name="Text 10"/>
+          <p:cNvSpPr/>
+          <p:nvPr/>
+        </p:nvSpPr>
+        <p:spPr>
+          <a:xfrm>
+            <a:off x="8211312" y="1920240"/>
+            <a:ext cx="2734056" cy="1463040"/>
           </a:xfrm>
           <a:prstGeom prst="rect">
             <a:avLst/>
@@ -12577,7 +13503,7 @@
               <a:buNone/>
             </a:pPr>
             <a:r>
-              <a:rPr lang="en-US" sz="1250" dirty="0">
+              <a:rPr lang="en-US" sz="1550" dirty="0">
                 <a:solidFill>
                   <a:srgbClr val="17364A"/>
                 </a:solidFill>
@@ -12587,32 +13513,32 @@
               </a:rPr>
               <a:t>Use linked tools when your department needs a structured worksheet, template, checklist, review process, or documentation artifact.</a:t>
             </a:r>
-            <a:endParaRPr lang="en-US" sz="1250" dirty="0"/>
-          </a:p>
-        </p:txBody>
-      </p:sp>
-      <p:sp>
-        <p:nvSpPr>
-          <p:cNvPr id="12" name="Shape 10"/>
-          <p:cNvSpPr/>
-          <p:nvPr/>
-        </p:nvSpPr>
-        <p:spPr>
-          <a:xfrm>
-            <a:off x="8046720" y="3794760"/>
-            <a:ext cx="3063240" cy="1508760"/>
+            <a:endParaRPr lang="en-US" sz="1550" dirty="0"/>
+          </a:p>
+        </p:txBody>
+      </p:sp>
+      <p:sp>
+        <p:nvSpPr>
+          <p:cNvPr id="13" name="Shape 11"/>
+          <p:cNvSpPr/>
+          <p:nvPr/>
+        </p:nvSpPr>
+        <p:spPr>
+          <a:xfrm>
+            <a:off x="7818120" y="3977640"/>
+            <a:ext cx="972312" cy="749808"/>
           </a:xfrm>
           <a:prstGeom prst="roundRect">
             <a:avLst>
-              <a:gd name="adj" fmla="val 7273"/>
+              <a:gd name="adj" fmla="val 14634"/>
             </a:avLst>
           </a:prstGeom>
           <a:solidFill>
-            <a:srgbClr val="EEF8ED"/>
+            <a:srgbClr val="0068B7"/>
           </a:solidFill>
           <a:ln w="12700">
             <a:solidFill>
-              <a:srgbClr val="B9D7E6"/>
+              <a:srgbClr val="0068B7"/>
             </a:solidFill>
             <a:prstDash val="solid"/>
           </a:ln>
@@ -12620,81 +13546,256 @@
       </p:sp>
       <p:sp>
         <p:nvSpPr>
-          <p:cNvPr id="13" name="Text 11"/>
-          <p:cNvSpPr/>
-          <p:nvPr/>
-        </p:nvSpPr>
-        <p:spPr>
-          <a:xfrm>
-            <a:off x="8211312" y="3941064"/>
-            <a:ext cx="2734056" cy="201168"/>
-          </a:xfrm>
-          <a:prstGeom prst="rect">
-            <a:avLst/>
-          </a:prstGeom>
-          <a:noFill/>
-          <a:ln/>
-        </p:spPr>
-        <p:txBody>
-          <a:bodyPr wrap="square" lIns="0" tIns="0" rIns="0" bIns="0" rtlCol="0" anchor="ctr"/>
-          <a:lstStyle/>
-          <a:p>
-            <a:pPr indent="0" marL="0">
-              <a:buNone/>
-            </a:pPr>
-            <a:r>
-              <a:rPr lang="en-US" sz="950" b="1" dirty="0">
-                <a:solidFill>
-                  <a:srgbClr val="0068B7"/>
-                </a:solidFill>
-                <a:latin typeface="Aptos" pitchFamily="34" charset="0"/>
-                <a:ea typeface="Aptos" pitchFamily="34" charset="-122"/>
-                <a:cs typeface="Aptos" pitchFamily="34" charset="-120"/>
-              </a:rPr>
-              <a:t>Avoid duplication</a:t>
-            </a:r>
-            <a:endParaRPr lang="en-US" sz="950" dirty="0"/>
-          </a:p>
-        </p:txBody>
-      </p:sp>
-      <p:sp>
-        <p:nvSpPr>
           <p:cNvPr id="14" name="Text 12"/>
           <p:cNvSpPr/>
           <p:nvPr/>
         </p:nvSpPr>
         <p:spPr>
           <a:xfrm>
-            <a:off x="8211312" y="4233672"/>
-            <a:ext cx="2734056" cy="941832"/>
-          </a:xfrm>
-          <a:prstGeom prst="rect">
-            <a:avLst/>
-          </a:prstGeom>
-          <a:noFill/>
-          <a:ln/>
-        </p:spPr>
-        <p:txBody>
-          <a:bodyPr wrap="square" lIns="0" tIns="0" rIns="0" bIns="0" rtlCol="0" anchor="t">
+            <a:off x="7891272" y="4169664"/>
+            <a:ext cx="826008" cy="310896"/>
+          </a:xfrm>
+          <a:prstGeom prst="rect">
+            <a:avLst/>
+          </a:prstGeom>
+          <a:noFill/>
+          <a:ln/>
+        </p:spPr>
+        <p:txBody>
+          <a:bodyPr wrap="square" lIns="0" tIns="0" rIns="0" bIns="0" rtlCol="0" anchor="ctr">
             <a:normAutofit/>
           </a:bodyPr>
           <a:lstStyle/>
           <a:p>
-            <a:pPr indent="0" marL="0">
-              <a:buNone/>
-            </a:pPr>
-            <a:r>
-              <a:rPr lang="en-US" sz="1250" dirty="0">
-                <a:solidFill>
-                  <a:srgbClr val="17364A"/>
-                </a:solidFill>
-                <a:latin typeface="Aptos" pitchFamily="34" charset="0"/>
-                <a:ea typeface="Aptos" pitchFamily="34" charset="-122"/>
-                <a:cs typeface="Aptos" pitchFamily="34" charset="-120"/>
-              </a:rPr>
-              <a:t>If your department already has a strong equivalent tool, adapt or use the existing process instead of recreating it.</a:t>
-            </a:r>
-            <a:endParaRPr lang="en-US" sz="1250" dirty="0"/>
+            <a:pPr algn="ctr" indent="0" marL="0">
+              <a:buNone/>
+            </a:pPr>
+            <a:r>
+              <a:rPr lang="en-US" sz="1500" b="1" dirty="0">
+                <a:solidFill>
+                  <a:srgbClr val="FFFFFF"/>
+                </a:solidFill>
+                <a:latin typeface="Aptos" pitchFamily="34" charset="0"/>
+                <a:ea typeface="Aptos" pitchFamily="34" charset="-122"/>
+                <a:cs typeface="Aptos" pitchFamily="34" charset="-120"/>
+              </a:rPr>
+              <a:t>Concept</a:t>
+            </a:r>
+            <a:endParaRPr lang="en-US" sz="1500" dirty="0"/>
+          </a:p>
+        </p:txBody>
+      </p:sp>
+      <p:sp>
+        <p:nvSpPr>
+          <p:cNvPr id="15" name="Text 13"/>
+          <p:cNvSpPr/>
+          <p:nvPr/>
+        </p:nvSpPr>
+        <p:spPr>
+          <a:xfrm>
+            <a:off x="8817864" y="4187952"/>
+            <a:ext cx="201168" cy="256032"/>
+          </a:xfrm>
+          <a:prstGeom prst="rect">
+            <a:avLst/>
+          </a:prstGeom>
+          <a:noFill/>
+          <a:ln/>
+        </p:spPr>
+        <p:txBody>
+          <a:bodyPr wrap="square" lIns="0" tIns="0" rIns="0" bIns="0" rtlCol="0" anchor="ctr"/>
+          <a:lstStyle/>
+          <a:p>
+            <a:pPr algn="ctr" indent="0" marL="0">
+              <a:buNone/>
+            </a:pPr>
+            <a:r>
+              <a:rPr lang="en-US" sz="1800" b="1" dirty="0">
+                <a:solidFill>
+                  <a:srgbClr val="0068B7"/>
+                </a:solidFill>
+                <a:latin typeface="Aptos" pitchFamily="34" charset="0"/>
+                <a:ea typeface="Aptos" pitchFamily="34" charset="-122"/>
+                <a:cs typeface="Aptos" pitchFamily="34" charset="-120"/>
+              </a:rPr>
+              <a:t>â†’</a:t>
+            </a:r>
+            <a:endParaRPr lang="en-US" sz="1800" dirty="0"/>
+          </a:p>
+        </p:txBody>
+      </p:sp>
+      <p:sp>
+        <p:nvSpPr>
+          <p:cNvPr id="16" name="Shape 14"/>
+          <p:cNvSpPr/>
+          <p:nvPr/>
+        </p:nvSpPr>
+        <p:spPr>
+          <a:xfrm>
+            <a:off x="9046464" y="3977640"/>
+            <a:ext cx="972312" cy="749808"/>
+          </a:xfrm>
+          <a:prstGeom prst="roundRect">
+            <a:avLst>
+              <a:gd name="adj" fmla="val 14634"/>
+            </a:avLst>
+          </a:prstGeom>
+          <a:solidFill>
+            <a:srgbClr val="2F8A28"/>
+          </a:solidFill>
+          <a:ln w="12700">
+            <a:solidFill>
+              <a:srgbClr val="2F8A28"/>
+            </a:solidFill>
+            <a:prstDash val="solid"/>
+          </a:ln>
+        </p:spPr>
+      </p:sp>
+      <p:sp>
+        <p:nvSpPr>
+          <p:cNvPr id="17" name="Text 15"/>
+          <p:cNvSpPr/>
+          <p:nvPr/>
+        </p:nvSpPr>
+        <p:spPr>
+          <a:xfrm>
+            <a:off x="9119616" y="4169664"/>
+            <a:ext cx="826008" cy="310896"/>
+          </a:xfrm>
+          <a:prstGeom prst="rect">
+            <a:avLst/>
+          </a:prstGeom>
+          <a:noFill/>
+          <a:ln/>
+        </p:spPr>
+        <p:txBody>
+          <a:bodyPr wrap="square" lIns="0" tIns="0" rIns="0" bIns="0" rtlCol="0" anchor="ctr">
+            <a:normAutofit/>
+          </a:bodyPr>
+          <a:lstStyle/>
+          <a:p>
+            <a:pPr algn="ctr" indent="0" marL="0">
+              <a:buNone/>
+            </a:pPr>
+            <a:r>
+              <a:rPr lang="en-US" sz="1500" b="1" dirty="0">
+                <a:solidFill>
+                  <a:srgbClr val="FFFFFF"/>
+                </a:solidFill>
+                <a:latin typeface="Aptos" pitchFamily="34" charset="0"/>
+                <a:ea typeface="Aptos" pitchFamily="34" charset="-122"/>
+                <a:cs typeface="Aptos" pitchFamily="34" charset="-120"/>
+              </a:rPr>
+              <a:t>Tool</a:t>
+            </a:r>
+            <a:endParaRPr lang="en-US" sz="1500" dirty="0"/>
+          </a:p>
+        </p:txBody>
+      </p:sp>
+      <p:sp>
+        <p:nvSpPr>
+          <p:cNvPr id="18" name="Text 16"/>
+          <p:cNvSpPr/>
+          <p:nvPr/>
+        </p:nvSpPr>
+        <p:spPr>
+          <a:xfrm>
+            <a:off x="10046208" y="4187952"/>
+            <a:ext cx="201168" cy="256032"/>
+          </a:xfrm>
+          <a:prstGeom prst="rect">
+            <a:avLst/>
+          </a:prstGeom>
+          <a:noFill/>
+          <a:ln/>
+        </p:spPr>
+        <p:txBody>
+          <a:bodyPr wrap="square" lIns="0" tIns="0" rIns="0" bIns="0" rtlCol="0" anchor="ctr"/>
+          <a:lstStyle/>
+          <a:p>
+            <a:pPr algn="ctr" indent="0" marL="0">
+              <a:buNone/>
+            </a:pPr>
+            <a:r>
+              <a:rPr lang="en-US" sz="1800" b="1" dirty="0">
+                <a:solidFill>
+                  <a:srgbClr val="0068B7"/>
+                </a:solidFill>
+                <a:latin typeface="Aptos" pitchFamily="34" charset="0"/>
+                <a:ea typeface="Aptos" pitchFamily="34" charset="-122"/>
+                <a:cs typeface="Aptos" pitchFamily="34" charset="-120"/>
+              </a:rPr>
+              <a:t>â†’</a:t>
+            </a:r>
+            <a:endParaRPr lang="en-US" sz="1800" dirty="0"/>
+          </a:p>
+        </p:txBody>
+      </p:sp>
+      <p:sp>
+        <p:nvSpPr>
+          <p:cNvPr id="19" name="Shape 17"/>
+          <p:cNvSpPr/>
+          <p:nvPr/>
+        </p:nvSpPr>
+        <p:spPr>
+          <a:xfrm>
+            <a:off x="10274808" y="3977640"/>
+            <a:ext cx="972312" cy="749808"/>
+          </a:xfrm>
+          <a:prstGeom prst="roundRect">
+            <a:avLst>
+              <a:gd name="adj" fmla="val 14634"/>
+            </a:avLst>
+          </a:prstGeom>
+          <a:solidFill>
+            <a:srgbClr val="D69A2D"/>
+          </a:solidFill>
+          <a:ln w="12700">
+            <a:solidFill>
+              <a:srgbClr val="D69A2D"/>
+            </a:solidFill>
+            <a:prstDash val="solid"/>
+          </a:ln>
+        </p:spPr>
+      </p:sp>
+      <p:sp>
+        <p:nvSpPr>
+          <p:cNvPr id="20" name="Text 18"/>
+          <p:cNvSpPr/>
+          <p:nvPr/>
+        </p:nvSpPr>
+        <p:spPr>
+          <a:xfrm>
+            <a:off x="10347960" y="4169664"/>
+            <a:ext cx="826008" cy="310896"/>
+          </a:xfrm>
+          <a:prstGeom prst="rect">
+            <a:avLst/>
+          </a:prstGeom>
+          <a:noFill/>
+          <a:ln/>
+        </p:spPr>
+        <p:txBody>
+          <a:bodyPr wrap="square" lIns="0" tIns="0" rIns="0" bIns="0" rtlCol="0" anchor="ctr">
+            <a:normAutofit/>
+          </a:bodyPr>
+          <a:lstStyle/>
+          <a:p>
+            <a:pPr algn="ctr" indent="0" marL="0">
+              <a:buNone/>
+            </a:pPr>
+            <a:r>
+              <a:rPr lang="en-US" sz="1500" b="1" dirty="0">
+                <a:solidFill>
+                  <a:srgbClr val="FFFFFF"/>
+                </a:solidFill>
+                <a:latin typeface="Aptos" pitchFamily="34" charset="0"/>
+                <a:ea typeface="Aptos" pitchFamily="34" charset="-122"/>
+                <a:cs typeface="Aptos" pitchFamily="34" charset="-120"/>
+              </a:rPr>
+              <a:t>Artifact</a:t>
+            </a:r>
+            <a:endParaRPr lang="en-US" sz="1500" dirty="0"/>
           </a:p>
         </p:txBody>
       </p:sp>
@@ -12891,7 +13992,7 @@
                 <a:ea typeface="Aptos" pitchFamily="34" charset="-122"/>
                 <a:cs typeface="Aptos" pitchFamily="34" charset="-120"/>
               </a:rPr>
-              <a:t>© Paula Soper</a:t>
+              <a:t>Â© Paula Soper</a:t>
             </a:r>
             <a:endParaRPr lang="en-US" sz="800" dirty="0"/>
           </a:p>
@@ -12899,7 +14000,46 @@
       </p:sp>
       <p:sp>
         <p:nvSpPr>
-          <p:cNvPr id="7" name="Shape 5"/>
+          <p:cNvPr id="7" name="Text 5"/>
+          <p:cNvSpPr/>
+          <p:nvPr/>
+        </p:nvSpPr>
+        <p:spPr>
+          <a:xfrm>
+            <a:off x="11137392" y="6510528"/>
+            <a:ext cx="411480" cy="201168"/>
+          </a:xfrm>
+          <a:prstGeom prst="rect">
+            <a:avLst/>
+          </a:prstGeom>
+          <a:noFill/>
+          <a:ln/>
+        </p:spPr>
+        <p:txBody>
+          <a:bodyPr wrap="square" lIns="0" tIns="0" rIns="0" bIns="0" rtlCol="0" anchor="ctr"/>
+          <a:lstStyle/>
+          <a:p>
+            <a:pPr algn="r" indent="0" marL="0">
+              <a:buNone/>
+            </a:pPr>
+            <a:r>
+              <a:rPr lang="en-US" sz="900" dirty="0">
+                <a:solidFill>
+                  <a:srgbClr val="5F7181"/>
+                </a:solidFill>
+                <a:latin typeface="Aptos" pitchFamily="34" charset="0"/>
+                <a:ea typeface="Aptos" pitchFamily="34" charset="-122"/>
+                <a:cs typeface="Aptos" pitchFamily="34" charset="-120"/>
+              </a:rPr>
+              <a:t>5</a:t>
+            </a:r>
+            <a:endParaRPr lang="en-US" sz="900" dirty="0"/>
+          </a:p>
+        </p:txBody>
+      </p:sp>
+      <p:sp>
+        <p:nvSpPr>
+          <p:cNvPr id="8" name="Shape 6"/>
           <p:cNvSpPr/>
           <p:nvPr/>
         </p:nvSpPr>
@@ -12924,7 +14064,7 @@
       </p:sp>
       <p:sp>
         <p:nvSpPr>
-          <p:cNvPr id="8" name="Text 6"/>
+          <p:cNvPr id="9" name="Text 7"/>
           <p:cNvSpPr/>
           <p:nvPr/>
         </p:nvSpPr>
@@ -12963,14 +14103,14 @@
       </p:sp>
       <p:sp>
         <p:nvSpPr>
-          <p:cNvPr id="9" name="Text 7"/>
+          <p:cNvPr id="10" name="Text 8"/>
           <p:cNvSpPr/>
           <p:nvPr/>
         </p:nvSpPr>
         <p:spPr>
           <a:xfrm>
             <a:off x="640080" y="621792"/>
-            <a:ext cx="10881360" cy="566928"/>
+            <a:ext cx="10881360" cy="713232"/>
           </a:xfrm>
           <a:prstGeom prst="rect">
             <a:avLst/>
@@ -12988,7 +14128,7 @@
               <a:buNone/>
             </a:pPr>
             <a:r>
-              <a:rPr lang="en-US" sz="2700" b="1" dirty="0">
+              <a:rPr lang="en-US" sz="3400" b="1" dirty="0">
                 <a:solidFill>
                   <a:srgbClr val="003A63"/>
                 </a:solidFill>
@@ -12998,20 +14138,20 @@
               </a:rPr>
               <a:t>Learning Objectives</a:t>
             </a:r>
-            <a:endParaRPr lang="en-US" sz="2700" dirty="0"/>
-          </a:p>
-        </p:txBody>
-      </p:sp>
-      <p:sp>
-        <p:nvSpPr>
-          <p:cNvPr id="10" name="Text 8"/>
-          <p:cNvSpPr/>
-          <p:nvPr/>
-        </p:nvSpPr>
-        <p:spPr>
-          <a:xfrm>
-            <a:off x="868680" y="1417320"/>
-            <a:ext cx="6675120" cy="4434840"/>
+            <a:endParaRPr lang="en-US" sz="3400" dirty="0"/>
+          </a:p>
+        </p:txBody>
+      </p:sp>
+      <p:sp>
+        <p:nvSpPr>
+          <p:cNvPr id="11" name="Text 9"/>
+          <p:cNvSpPr/>
+          <p:nvPr/>
+        </p:nvSpPr>
+        <p:spPr>
+          <a:xfrm>
+            <a:off x="868680" y="1508760"/>
+            <a:ext cx="6537960" cy="4160520"/>
           </a:xfrm>
           <a:prstGeom prst="rect">
             <a:avLst/>
@@ -13026,7 +14166,7 @@
           <a:lstStyle/>
           <a:p>
             <a:r>
-              <a:rPr lang="en-US" sz="1700" dirty="0">
+              <a:rPr lang="en-US" sz="2100" dirty="0">
                 <a:solidFill>
                   <a:srgbClr val="17364A"/>
                 </a:solidFill>
@@ -13036,11 +14176,11 @@
               </a:rPr>
               <a:t>Describe the basic eCR workflow from EHR trigger to public health action.</a:t>
             </a:r>
-            <a:endParaRPr lang="en-US" sz="1700" dirty="0"/>
-          </a:p>
-          <a:p>
-            <a:r>
-              <a:rPr lang="en-US" sz="1700" dirty="0">
+            <a:endParaRPr lang="en-US" sz="2100" dirty="0"/>
+          </a:p>
+          <a:p>
+            <a:r>
+              <a:rPr lang="en-US" sz="2100" dirty="0">
                 <a:solidFill>
                   <a:srgbClr val="17364A"/>
                 </a:solidFill>
@@ -13050,11 +14190,11 @@
               </a:rPr>
               <a:t>Explain the roles of eICR, Reportability Response, eRSD, and RCTC.</a:t>
             </a:r>
-            <a:endParaRPr lang="en-US" sz="1700" dirty="0"/>
-          </a:p>
-          <a:p>
-            <a:r>
-              <a:rPr lang="en-US" sz="1700" dirty="0">
+            <a:endParaRPr lang="en-US" sz="2100" dirty="0"/>
+          </a:p>
+          <a:p>
+            <a:r>
+              <a:rPr lang="en-US" sz="2100" dirty="0">
                 <a:solidFill>
                   <a:srgbClr val="17364A"/>
                 </a:solidFill>
@@ -13064,27 +14204,13 @@
               </a:rPr>
               <a:t>Identify eCR data quality, routing, and onboarding issues that can affect AI use.</a:t>
             </a:r>
-            <a:endParaRPr lang="en-US" sz="1700" dirty="0"/>
-          </a:p>
-          <a:p>
-            <a:r>
-              <a:rPr lang="en-US" sz="1700" dirty="0">
-                <a:solidFill>
-                  <a:srgbClr val="17364A"/>
-                </a:solidFill>
-                <a:latin typeface="Aptos" pitchFamily="34" charset="0"/>
-                <a:ea typeface="Aptos" pitchFamily="34" charset="-122"/>
-                <a:cs typeface="Aptos" pitchFamily="34" charset="-120"/>
-              </a:rPr>
-              <a:t>Assess where AI may support eCR workflows and where human review remains required.</a:t>
-            </a:r>
-            <a:endParaRPr lang="en-US" sz="1700" dirty="0"/>
-          </a:p>
-        </p:txBody>
-      </p:sp>
-      <p:sp>
-        <p:nvSpPr>
-          <p:cNvPr id="11" name="Shape 9"/>
+            <a:endParaRPr lang="en-US" sz="2100" dirty="0"/>
+          </a:p>
+        </p:txBody>
+      </p:sp>
+      <p:sp>
+        <p:nvSpPr>
+          <p:cNvPr id="12" name="Shape 10"/>
           <p:cNvSpPr/>
           <p:nvPr/>
         </p:nvSpPr>
@@ -13111,14 +14237,14 @@
       </p:sp>
       <p:sp>
         <p:nvSpPr>
-          <p:cNvPr id="12" name="Text 10"/>
+          <p:cNvPr id="13" name="Text 11"/>
           <p:cNvSpPr/>
           <p:nvPr/>
         </p:nvSpPr>
         <p:spPr>
           <a:xfrm>
             <a:off x="8074152" y="1563624"/>
-            <a:ext cx="2825496" cy="201168"/>
+            <a:ext cx="2825496" cy="256032"/>
           </a:xfrm>
           <a:prstGeom prst="rect">
             <a:avLst/>
@@ -13134,7 +14260,7 @@
               <a:buNone/>
             </a:pPr>
             <a:r>
-              <a:rPr lang="en-US" sz="950" b="1" dirty="0">
+              <a:rPr lang="en-US" sz="1300" b="1" dirty="0">
                 <a:solidFill>
                   <a:srgbClr val="0068B7"/>
                 </a:solidFill>
@@ -13144,20 +14270,20 @@
               </a:rPr>
               <a:t>Key idea</a:t>
             </a:r>
-            <a:endParaRPr lang="en-US" sz="950" dirty="0"/>
-          </a:p>
-        </p:txBody>
-      </p:sp>
-      <p:sp>
-        <p:nvSpPr>
-          <p:cNvPr id="13" name="Text 11"/>
-          <p:cNvSpPr/>
-          <p:nvPr/>
-        </p:nvSpPr>
-        <p:spPr>
-          <a:xfrm>
-            <a:off x="8074152" y="1856232"/>
-            <a:ext cx="2825496" cy="1261872"/>
+            <a:endParaRPr lang="en-US" sz="1300" dirty="0"/>
+          </a:p>
+        </p:txBody>
+      </p:sp>
+      <p:sp>
+        <p:nvSpPr>
+          <p:cNvPr id="14" name="Text 12"/>
+          <p:cNvSpPr/>
+          <p:nvPr/>
+        </p:nvSpPr>
+        <p:spPr>
+          <a:xfrm>
+            <a:off x="8074152" y="1920240"/>
+            <a:ext cx="2825496" cy="1188720"/>
           </a:xfrm>
           <a:prstGeom prst="rect">
             <a:avLst/>
@@ -13175,7 +14301,7 @@
               <a:buNone/>
             </a:pPr>
             <a:r>
-              <a:rPr lang="en-US" sz="1250" dirty="0">
+              <a:rPr lang="en-US" sz="1550" dirty="0">
                 <a:solidFill>
                   <a:srgbClr val="17364A"/>
                 </a:solidFill>
@@ -13185,13 +14311,13 @@
               </a:rPr>
               <a:t>Describe the basic eCR workflow from EHR trigger to public health action.</a:t>
             </a:r>
-            <a:endParaRPr lang="en-US" sz="1250" dirty="0"/>
-          </a:p>
-        </p:txBody>
-      </p:sp>
-      <p:sp>
-        <p:nvSpPr>
-          <p:cNvPr id="14" name="Shape 12"/>
+            <a:endParaRPr lang="en-US" sz="1550" dirty="0"/>
+          </a:p>
+        </p:txBody>
+      </p:sp>
+      <p:sp>
+        <p:nvSpPr>
+          <p:cNvPr id="15" name="Shape 13"/>
           <p:cNvSpPr/>
           <p:nvPr/>
         </p:nvSpPr>
@@ -13218,14 +14344,14 @@
       </p:sp>
       <p:sp>
         <p:nvSpPr>
-          <p:cNvPr id="15" name="Text 13"/>
+          <p:cNvPr id="16" name="Text 14"/>
           <p:cNvSpPr/>
           <p:nvPr/>
         </p:nvSpPr>
         <p:spPr>
           <a:xfrm>
             <a:off x="8074152" y="3666744"/>
-            <a:ext cx="2825496" cy="201168"/>
+            <a:ext cx="2825496" cy="256032"/>
           </a:xfrm>
           <a:prstGeom prst="rect">
             <a:avLst/>
@@ -13241,7 +14367,7 @@
               <a:buNone/>
             </a:pPr>
             <a:r>
-              <a:rPr lang="en-US" sz="950" b="1" dirty="0">
+              <a:rPr lang="en-US" sz="1300" b="1" dirty="0">
                 <a:solidFill>
                   <a:srgbClr val="0068B7"/>
                 </a:solidFill>
@@ -13251,20 +14377,20 @@
               </a:rPr>
               <a:t>Use this for</a:t>
             </a:r>
-            <a:endParaRPr lang="en-US" sz="950" dirty="0"/>
-          </a:p>
-        </p:txBody>
-      </p:sp>
-      <p:sp>
-        <p:nvSpPr>
-          <p:cNvPr id="16" name="Text 14"/>
-          <p:cNvSpPr/>
-          <p:nvPr/>
-        </p:nvSpPr>
-        <p:spPr>
-          <a:xfrm>
-            <a:off x="8074152" y="3959352"/>
-            <a:ext cx="2825496" cy="1170432"/>
+            <a:endParaRPr lang="en-US" sz="1300" dirty="0"/>
+          </a:p>
+        </p:txBody>
+      </p:sp>
+      <p:sp>
+        <p:nvSpPr>
+          <p:cNvPr id="17" name="Text 15"/>
+          <p:cNvSpPr/>
+          <p:nvPr/>
+        </p:nvSpPr>
+        <p:spPr>
+          <a:xfrm>
+            <a:off x="8074152" y="4023360"/>
+            <a:ext cx="2825496" cy="1097280"/>
           </a:xfrm>
           <a:prstGeom prst="rect">
             <a:avLst/>
@@ -13282,7 +14408,7 @@
               <a:buNone/>
             </a:pPr>
             <a:r>
-              <a:rPr lang="en-US" sz="1250" dirty="0">
+              <a:rPr lang="en-US" sz="1550" dirty="0">
                 <a:solidFill>
                   <a:srgbClr val="17364A"/>
                 </a:solidFill>
@@ -13292,7 +14418,7 @@
               </a:rPr>
               <a:t>Connect the concept to public health decisions, safeguards, documentation, or implementation work.</a:t>
             </a:r>
-            <a:endParaRPr lang="en-US" sz="1250" dirty="0"/>
+            <a:endParaRPr lang="en-US" sz="1550" dirty="0"/>
           </a:p>
         </p:txBody>
       </p:sp>
@@ -13489,7 +14615,7 @@
                 <a:ea typeface="Aptos" pitchFamily="34" charset="-122"/>
                 <a:cs typeface="Aptos" pitchFamily="34" charset="-120"/>
               </a:rPr>
-              <a:t>© Paula Soper</a:t>
+              <a:t>Â© Paula Soper</a:t>
             </a:r>
             <a:endParaRPr lang="en-US" sz="800" dirty="0"/>
           </a:p>
@@ -13497,7 +14623,46 @@
       </p:sp>
       <p:sp>
         <p:nvSpPr>
-          <p:cNvPr id="7" name="Shape 5"/>
+          <p:cNvPr id="7" name="Text 5"/>
+          <p:cNvSpPr/>
+          <p:nvPr/>
+        </p:nvSpPr>
+        <p:spPr>
+          <a:xfrm>
+            <a:off x="11137392" y="6510528"/>
+            <a:ext cx="411480" cy="201168"/>
+          </a:xfrm>
+          <a:prstGeom prst="rect">
+            <a:avLst/>
+          </a:prstGeom>
+          <a:noFill/>
+          <a:ln/>
+        </p:spPr>
+        <p:txBody>
+          <a:bodyPr wrap="square" lIns="0" tIns="0" rIns="0" bIns="0" rtlCol="0" anchor="ctr"/>
+          <a:lstStyle/>
+          <a:p>
+            <a:pPr algn="r" indent="0" marL="0">
+              <a:buNone/>
+            </a:pPr>
+            <a:r>
+              <a:rPr lang="en-US" sz="900" dirty="0">
+                <a:solidFill>
+                  <a:srgbClr val="5F7181"/>
+                </a:solidFill>
+                <a:latin typeface="Aptos" pitchFamily="34" charset="0"/>
+                <a:ea typeface="Aptos" pitchFamily="34" charset="-122"/>
+                <a:cs typeface="Aptos" pitchFamily="34" charset="-120"/>
+              </a:rPr>
+              <a:t>6</a:t>
+            </a:r>
+            <a:endParaRPr lang="en-US" sz="900" dirty="0"/>
+          </a:p>
+        </p:txBody>
+      </p:sp>
+      <p:sp>
+        <p:nvSpPr>
+          <p:cNvPr id="8" name="Shape 6"/>
           <p:cNvSpPr/>
           <p:nvPr/>
         </p:nvSpPr>
@@ -13522,7 +14687,7 @@
       </p:sp>
       <p:sp>
         <p:nvSpPr>
-          <p:cNvPr id="8" name="Text 6"/>
+          <p:cNvPr id="9" name="Text 7"/>
           <p:cNvSpPr/>
           <p:nvPr/>
         </p:nvSpPr>
@@ -13561,14 +14726,14 @@
       </p:sp>
       <p:sp>
         <p:nvSpPr>
-          <p:cNvPr id="9" name="Text 7"/>
+          <p:cNvPr id="10" name="Text 8"/>
           <p:cNvSpPr/>
           <p:nvPr/>
         </p:nvSpPr>
         <p:spPr>
           <a:xfrm>
             <a:off x="640080" y="621792"/>
-            <a:ext cx="10881360" cy="566928"/>
+            <a:ext cx="10881360" cy="713232"/>
           </a:xfrm>
           <a:prstGeom prst="rect">
             <a:avLst/>
@@ -13586,7 +14751,7 @@
               <a:buNone/>
             </a:pPr>
             <a:r>
-              <a:rPr lang="en-US" sz="2700" b="1" dirty="0">
+              <a:rPr lang="en-US" sz="3400" b="1" dirty="0">
                 <a:solidFill>
                   <a:srgbClr val="003A63"/>
                 </a:solidFill>
@@ -13596,20 +14761,20 @@
               </a:rPr>
               <a:t>Module Overview</a:t>
             </a:r>
-            <a:endParaRPr lang="en-US" sz="2700" dirty="0"/>
-          </a:p>
-        </p:txBody>
-      </p:sp>
-      <p:sp>
-        <p:nvSpPr>
-          <p:cNvPr id="10" name="Text 8"/>
-          <p:cNvSpPr/>
-          <p:nvPr/>
-        </p:nvSpPr>
-        <p:spPr>
-          <a:xfrm>
-            <a:off x="868680" y="1417320"/>
-            <a:ext cx="6675120" cy="4434840"/>
+            <a:endParaRPr lang="en-US" sz="3400" dirty="0"/>
+          </a:p>
+        </p:txBody>
+      </p:sp>
+      <p:sp>
+        <p:nvSpPr>
+          <p:cNvPr id="11" name="Text 9"/>
+          <p:cNvSpPr/>
+          <p:nvPr/>
+        </p:nvSpPr>
+        <p:spPr>
+          <a:xfrm>
+            <a:off x="868680" y="1508760"/>
+            <a:ext cx="6537960" cy="4160520"/>
           </a:xfrm>
           <a:prstGeom prst="rect">
             <a:avLst/>
@@ -13624,7 +14789,7 @@
           <a:lstStyle/>
           <a:p>
             <a:r>
-              <a:rPr lang="en-US" sz="1700" dirty="0">
+              <a:rPr lang="en-US" sz="2100" dirty="0">
                 <a:solidFill>
                   <a:srgbClr val="17364A"/>
                 </a:solidFill>
@@ -13634,11 +14799,11 @@
               </a:rPr>
               <a:t>Electronic case reporting is one of the clearest examples of public health automation.</a:t>
             </a:r>
-            <a:endParaRPr lang="en-US" sz="1700" dirty="0"/>
-          </a:p>
-          <a:p>
-            <a:r>
-              <a:rPr lang="en-US" sz="1700" dirty="0">
+            <a:endParaRPr lang="en-US" sz="2100" dirty="0"/>
+          </a:p>
+          <a:p>
+            <a:r>
+              <a:rPr lang="en-US" sz="2100" dirty="0">
                 <a:solidFill>
                   <a:srgbClr val="17364A"/>
                 </a:solidFill>
@@ -13646,13 +14811,13 @@
                 <a:ea typeface="Aptos" pitchFamily="34" charset="-122"/>
                 <a:cs typeface="Aptos" pitchFamily="34" charset="-120"/>
               </a:rPr>
-              <a:t>It uses data from electronic health records and reporting logic to support more timely case reporting to public health.</a:t>
-            </a:r>
-            <a:endParaRPr lang="en-US" sz="1700" dirty="0"/>
-          </a:p>
-          <a:p>
-            <a:r>
-              <a:rPr lang="en-US" sz="1700" dirty="0">
+              <a:t>It uses data from electronic health records and reporting logic to support more timely case reporting.</a:t>
+            </a:r>
+            <a:endParaRPr lang="en-US" sz="2100" dirty="0"/>
+          </a:p>
+          <a:p>
+            <a:r>
+              <a:rPr lang="en-US" sz="2100" dirty="0">
                 <a:solidFill>
                   <a:srgbClr val="17364A"/>
                 </a:solidFill>
@@ -13660,15 +14825,15 @@
                 <a:ea typeface="Aptos" pitchFamily="34" charset="-122"/>
                 <a:cs typeface="Aptos" pitchFamily="34" charset="-120"/>
               </a:rPr>
-              <a:t>This module teaches learners how eCR works technically and how AI might support eCR-related workflows without replacing.</a:t>
-            </a:r>
-            <a:endParaRPr lang="en-US" sz="1700" dirty="0"/>
-          </a:p>
-        </p:txBody>
-      </p:sp>
-      <p:sp>
-        <p:nvSpPr>
-          <p:cNvPr id="11" name="Shape 9"/>
+              <a:t>This module teaches learners how eCR works technically and how AI might support eCR-related workflows.</a:t>
+            </a:r>
+            <a:endParaRPr lang="en-US" sz="2100" dirty="0"/>
+          </a:p>
+        </p:txBody>
+      </p:sp>
+      <p:sp>
+        <p:nvSpPr>
+          <p:cNvPr id="12" name="Shape 10"/>
           <p:cNvSpPr/>
           <p:nvPr/>
         </p:nvSpPr>
@@ -13695,14 +14860,14 @@
       </p:sp>
       <p:sp>
         <p:nvSpPr>
-          <p:cNvPr id="12" name="Text 10"/>
+          <p:cNvPr id="13" name="Text 11"/>
           <p:cNvSpPr/>
           <p:nvPr/>
         </p:nvSpPr>
         <p:spPr>
           <a:xfrm>
             <a:off x="8074152" y="1563624"/>
-            <a:ext cx="2825496" cy="201168"/>
+            <a:ext cx="2825496" cy="256032"/>
           </a:xfrm>
           <a:prstGeom prst="rect">
             <a:avLst/>
@@ -13718,7 +14883,7 @@
               <a:buNone/>
             </a:pPr>
             <a:r>
-              <a:rPr lang="en-US" sz="950" b="1" dirty="0">
+              <a:rPr lang="en-US" sz="1300" b="1" dirty="0">
                 <a:solidFill>
                   <a:srgbClr val="0068B7"/>
                 </a:solidFill>
@@ -13728,20 +14893,20 @@
               </a:rPr>
               <a:t>Key idea</a:t>
             </a:r>
-            <a:endParaRPr lang="en-US" sz="950" dirty="0"/>
-          </a:p>
-        </p:txBody>
-      </p:sp>
-      <p:sp>
-        <p:nvSpPr>
-          <p:cNvPr id="13" name="Text 11"/>
-          <p:cNvSpPr/>
-          <p:nvPr/>
-        </p:nvSpPr>
-        <p:spPr>
-          <a:xfrm>
-            <a:off x="8074152" y="1856232"/>
-            <a:ext cx="2825496" cy="1261872"/>
+            <a:endParaRPr lang="en-US" sz="1300" dirty="0"/>
+          </a:p>
+        </p:txBody>
+      </p:sp>
+      <p:sp>
+        <p:nvSpPr>
+          <p:cNvPr id="14" name="Text 12"/>
+          <p:cNvSpPr/>
+          <p:nvPr/>
+        </p:nvSpPr>
+        <p:spPr>
+          <a:xfrm>
+            <a:off x="8074152" y="1920240"/>
+            <a:ext cx="2825496" cy="1188720"/>
           </a:xfrm>
           <a:prstGeom prst="rect">
             <a:avLst/>
@@ -13759,7 +14924,7 @@
               <a:buNone/>
             </a:pPr>
             <a:r>
-              <a:rPr lang="en-US" sz="1250" dirty="0">
+              <a:rPr lang="en-US" sz="1550" dirty="0">
                 <a:solidFill>
                   <a:srgbClr val="17364A"/>
                 </a:solidFill>
@@ -13769,13 +14934,13 @@
               </a:rPr>
               <a:t>Electronic case reporting is one of the clearest examples of public health automation.</a:t>
             </a:r>
-            <a:endParaRPr lang="en-US" sz="1250" dirty="0"/>
-          </a:p>
-        </p:txBody>
-      </p:sp>
-      <p:sp>
-        <p:nvSpPr>
-          <p:cNvPr id="14" name="Shape 12"/>
+            <a:endParaRPr lang="en-US" sz="1550" dirty="0"/>
+          </a:p>
+        </p:txBody>
+      </p:sp>
+      <p:sp>
+        <p:nvSpPr>
+          <p:cNvPr id="15" name="Shape 13"/>
           <p:cNvSpPr/>
           <p:nvPr/>
         </p:nvSpPr>
@@ -13802,14 +14967,14 @@
       </p:sp>
       <p:sp>
         <p:nvSpPr>
-          <p:cNvPr id="15" name="Text 13"/>
+          <p:cNvPr id="16" name="Text 14"/>
           <p:cNvSpPr/>
           <p:nvPr/>
         </p:nvSpPr>
         <p:spPr>
           <a:xfrm>
             <a:off x="8074152" y="3666744"/>
-            <a:ext cx="2825496" cy="201168"/>
+            <a:ext cx="2825496" cy="256032"/>
           </a:xfrm>
           <a:prstGeom prst="rect">
             <a:avLst/>
@@ -13825,7 +14990,7 @@
               <a:buNone/>
             </a:pPr>
             <a:r>
-              <a:rPr lang="en-US" sz="950" b="1" dirty="0">
+              <a:rPr lang="en-US" sz="1300" b="1" dirty="0">
                 <a:solidFill>
                   <a:srgbClr val="0068B7"/>
                 </a:solidFill>
@@ -13835,20 +15000,20 @@
               </a:rPr>
               <a:t>Use this for</a:t>
             </a:r>
-            <a:endParaRPr lang="en-US" sz="950" dirty="0"/>
-          </a:p>
-        </p:txBody>
-      </p:sp>
-      <p:sp>
-        <p:nvSpPr>
-          <p:cNvPr id="16" name="Text 14"/>
-          <p:cNvSpPr/>
-          <p:nvPr/>
-        </p:nvSpPr>
-        <p:spPr>
-          <a:xfrm>
-            <a:off x="8074152" y="3959352"/>
-            <a:ext cx="2825496" cy="1170432"/>
+            <a:endParaRPr lang="en-US" sz="1300" dirty="0"/>
+          </a:p>
+        </p:txBody>
+      </p:sp>
+      <p:sp>
+        <p:nvSpPr>
+          <p:cNvPr id="17" name="Text 15"/>
+          <p:cNvSpPr/>
+          <p:nvPr/>
+        </p:nvSpPr>
+        <p:spPr>
+          <a:xfrm>
+            <a:off x="8074152" y="4023360"/>
+            <a:ext cx="2825496" cy="1097280"/>
           </a:xfrm>
           <a:prstGeom prst="rect">
             <a:avLst/>
@@ -13866,7 +15031,7 @@
               <a:buNone/>
             </a:pPr>
             <a:r>
-              <a:rPr lang="en-US" sz="1250" dirty="0">
+              <a:rPr lang="en-US" sz="1550" dirty="0">
                 <a:solidFill>
                   <a:srgbClr val="17364A"/>
                 </a:solidFill>
@@ -13876,7 +15041,7 @@
               </a:rPr>
               <a:t>Connect the concept to public health decisions, safeguards, documentation, or implementation work.</a:t>
             </a:r>
-            <a:endParaRPr lang="en-US" sz="1250" dirty="0"/>
+            <a:endParaRPr lang="en-US" sz="1550" dirty="0"/>
           </a:p>
         </p:txBody>
       </p:sp>
@@ -14073,7 +15238,7 @@
                 <a:ea typeface="Aptos" pitchFamily="34" charset="-122"/>
                 <a:cs typeface="Aptos" pitchFamily="34" charset="-120"/>
               </a:rPr>
-              <a:t>© Paula Soper</a:t>
+              <a:t>Â© Paula Soper</a:t>
             </a:r>
             <a:endParaRPr lang="en-US" sz="800" dirty="0"/>
           </a:p>
@@ -14081,7 +15246,46 @@
       </p:sp>
       <p:sp>
         <p:nvSpPr>
-          <p:cNvPr id="7" name="Shape 5"/>
+          <p:cNvPr id="7" name="Text 5"/>
+          <p:cNvSpPr/>
+          <p:nvPr/>
+        </p:nvSpPr>
+        <p:spPr>
+          <a:xfrm>
+            <a:off x="11137392" y="6510528"/>
+            <a:ext cx="411480" cy="201168"/>
+          </a:xfrm>
+          <a:prstGeom prst="rect">
+            <a:avLst/>
+          </a:prstGeom>
+          <a:noFill/>
+          <a:ln/>
+        </p:spPr>
+        <p:txBody>
+          <a:bodyPr wrap="square" lIns="0" tIns="0" rIns="0" bIns="0" rtlCol="0" anchor="ctr"/>
+          <a:lstStyle/>
+          <a:p>
+            <a:pPr algn="r" indent="0" marL="0">
+              <a:buNone/>
+            </a:pPr>
+            <a:r>
+              <a:rPr lang="en-US" sz="900" dirty="0">
+                <a:solidFill>
+                  <a:srgbClr val="5F7181"/>
+                </a:solidFill>
+                <a:latin typeface="Aptos" pitchFamily="34" charset="0"/>
+                <a:ea typeface="Aptos" pitchFamily="34" charset="-122"/>
+                <a:cs typeface="Aptos" pitchFamily="34" charset="-120"/>
+              </a:rPr>
+              <a:t>7</a:t>
+            </a:r>
+            <a:endParaRPr lang="en-US" sz="900" dirty="0"/>
+          </a:p>
+        </p:txBody>
+      </p:sp>
+      <p:sp>
+        <p:nvSpPr>
+          <p:cNvPr id="8" name="Shape 6"/>
           <p:cNvSpPr/>
           <p:nvPr/>
         </p:nvSpPr>
@@ -14106,7 +15310,7 @@
       </p:sp>
       <p:sp>
         <p:nvSpPr>
-          <p:cNvPr id="8" name="Text 6"/>
+          <p:cNvPr id="9" name="Text 7"/>
           <p:cNvSpPr/>
           <p:nvPr/>
         </p:nvSpPr>
@@ -14145,14 +15349,14 @@
       </p:sp>
       <p:sp>
         <p:nvSpPr>
-          <p:cNvPr id="9" name="Text 7"/>
+          <p:cNvPr id="10" name="Text 8"/>
           <p:cNvSpPr/>
           <p:nvPr/>
         </p:nvSpPr>
         <p:spPr>
           <a:xfrm>
             <a:off x="640080" y="621792"/>
-            <a:ext cx="10881360" cy="566928"/>
+            <a:ext cx="10881360" cy="713232"/>
           </a:xfrm>
           <a:prstGeom prst="rect">
             <a:avLst/>
@@ -14170,7 +15374,7 @@
               <a:buNone/>
             </a:pPr>
             <a:r>
-              <a:rPr lang="en-US" sz="2700" b="1" dirty="0">
+              <a:rPr lang="en-US" sz="3400" b="1" dirty="0">
                 <a:solidFill>
                   <a:srgbClr val="003A63"/>
                 </a:solidFill>
@@ -14180,20 +15384,20 @@
               </a:rPr>
               <a:t>Jurisdiction and Agency Policy Note</a:t>
             </a:r>
-            <a:endParaRPr lang="en-US" sz="2700" dirty="0"/>
-          </a:p>
-        </p:txBody>
-      </p:sp>
-      <p:sp>
-        <p:nvSpPr>
-          <p:cNvPr id="10" name="Text 8"/>
-          <p:cNvSpPr/>
-          <p:nvPr/>
-        </p:nvSpPr>
-        <p:spPr>
-          <a:xfrm>
-            <a:off x="868680" y="1417320"/>
-            <a:ext cx="6675120" cy="4434840"/>
+            <a:endParaRPr lang="en-US" sz="3400" dirty="0"/>
+          </a:p>
+        </p:txBody>
+      </p:sp>
+      <p:sp>
+        <p:nvSpPr>
+          <p:cNvPr id="11" name="Text 9"/>
+          <p:cNvSpPr/>
+          <p:nvPr/>
+        </p:nvSpPr>
+        <p:spPr>
+          <a:xfrm>
+            <a:off x="868680" y="1508760"/>
+            <a:ext cx="6537960" cy="4160520"/>
           </a:xfrm>
           <a:prstGeom prst="rect">
             <a:avLst/>
@@ -14208,7 +15412,7 @@
           <a:lstStyle/>
           <a:p>
             <a:r>
-              <a:rPr lang="en-US" sz="1700" dirty="0">
+              <a:rPr lang="en-US" sz="2100" dirty="0">
                 <a:solidFill>
                   <a:srgbClr val="17364A"/>
                 </a:solidFill>
@@ -14218,11 +15422,11 @@
               </a:rPr>
               <a:t>This national-level module is intended for training and planning purposes.</a:t>
             </a:r>
-            <a:endParaRPr lang="en-US" sz="1700" dirty="0"/>
-          </a:p>
-          <a:p>
-            <a:r>
-              <a:rPr lang="en-US" sz="1700" dirty="0">
+            <a:endParaRPr lang="en-US" sz="2100" dirty="0"/>
+          </a:p>
+          <a:p>
+            <a:r>
+              <a:rPr lang="en-US" sz="2100" dirty="0">
                 <a:solidFill>
                   <a:srgbClr val="17364A"/>
                 </a:solidFill>
@@ -14232,11 +15436,11 @@
               </a:rPr>
               <a:t>It does not replace legal, privacy, procurement, civil rights, records, or agency policy review.</a:t>
             </a:r>
-            <a:endParaRPr lang="en-US" sz="1700" dirty="0"/>
-          </a:p>
-          <a:p>
-            <a:r>
-              <a:rPr lang="en-US" sz="1700" dirty="0">
+            <a:endParaRPr lang="en-US" sz="2100" dirty="0"/>
+          </a:p>
+          <a:p>
+            <a:r>
+              <a:rPr lang="en-US" sz="2100" dirty="0">
                 <a:solidFill>
                   <a:srgbClr val="17364A"/>
                 </a:solidFill>
@@ -14244,15 +15448,15 @@
                 <a:ea typeface="Aptos" pitchFamily="34" charset="-122"/>
                 <a:cs typeface="Aptos" pitchFamily="34" charset="-120"/>
               </a:rPr>
-              <a:t>Learners should confirm applicable requirements in their own jurisdiction and organization before implementing AI-supported.</a:t>
-            </a:r>
-            <a:endParaRPr lang="en-US" sz="1700" dirty="0"/>
-          </a:p>
-        </p:txBody>
-      </p:sp>
-      <p:sp>
-        <p:nvSpPr>
-          <p:cNvPr id="11" name="Shape 9"/>
+              <a:t>Learners should confirm applicable requirements in their own jurisdiction and organization before.</a:t>
+            </a:r>
+            <a:endParaRPr lang="en-US" sz="2100" dirty="0"/>
+          </a:p>
+        </p:txBody>
+      </p:sp>
+      <p:sp>
+        <p:nvSpPr>
+          <p:cNvPr id="12" name="Shape 10"/>
           <p:cNvSpPr/>
           <p:nvPr/>
         </p:nvSpPr>
@@ -14279,14 +15483,14 @@
       </p:sp>
       <p:sp>
         <p:nvSpPr>
-          <p:cNvPr id="12" name="Text 10"/>
+          <p:cNvPr id="13" name="Text 11"/>
           <p:cNvSpPr/>
           <p:nvPr/>
         </p:nvSpPr>
         <p:spPr>
           <a:xfrm>
             <a:off x="8074152" y="1563624"/>
-            <a:ext cx="2825496" cy="201168"/>
+            <a:ext cx="2825496" cy="256032"/>
           </a:xfrm>
           <a:prstGeom prst="rect">
             <a:avLst/>
@@ -14302,7 +15506,7 @@
               <a:buNone/>
             </a:pPr>
             <a:r>
-              <a:rPr lang="en-US" sz="950" b="1" dirty="0">
+              <a:rPr lang="en-US" sz="1300" b="1" dirty="0">
                 <a:solidFill>
                   <a:srgbClr val="0068B7"/>
                 </a:solidFill>
@@ -14312,20 +15516,20 @@
               </a:rPr>
               <a:t>Key idea</a:t>
             </a:r>
-            <a:endParaRPr lang="en-US" sz="950" dirty="0"/>
-          </a:p>
-        </p:txBody>
-      </p:sp>
-      <p:sp>
-        <p:nvSpPr>
-          <p:cNvPr id="13" name="Text 11"/>
-          <p:cNvSpPr/>
-          <p:nvPr/>
-        </p:nvSpPr>
-        <p:spPr>
-          <a:xfrm>
-            <a:off x="8074152" y="1856232"/>
-            <a:ext cx="2825496" cy="1261872"/>
+            <a:endParaRPr lang="en-US" sz="1300" dirty="0"/>
+          </a:p>
+        </p:txBody>
+      </p:sp>
+      <p:sp>
+        <p:nvSpPr>
+          <p:cNvPr id="14" name="Text 12"/>
+          <p:cNvSpPr/>
+          <p:nvPr/>
+        </p:nvSpPr>
+        <p:spPr>
+          <a:xfrm>
+            <a:off x="8074152" y="1920240"/>
+            <a:ext cx="2825496" cy="1188720"/>
           </a:xfrm>
           <a:prstGeom prst="rect">
             <a:avLst/>
@@ -14343,7 +15547,7 @@
               <a:buNone/>
             </a:pPr>
             <a:r>
-              <a:rPr lang="en-US" sz="1250" dirty="0">
+              <a:rPr lang="en-US" sz="1550" dirty="0">
                 <a:solidFill>
                   <a:srgbClr val="17364A"/>
                 </a:solidFill>
@@ -14353,13 +15557,13 @@
               </a:rPr>
               <a:t>This national-level module is intended for training and planning purposes.</a:t>
             </a:r>
-            <a:endParaRPr lang="en-US" sz="1250" dirty="0"/>
-          </a:p>
-        </p:txBody>
-      </p:sp>
-      <p:sp>
-        <p:nvSpPr>
-          <p:cNvPr id="14" name="Shape 12"/>
+            <a:endParaRPr lang="en-US" sz="1550" dirty="0"/>
+          </a:p>
+        </p:txBody>
+      </p:sp>
+      <p:sp>
+        <p:nvSpPr>
+          <p:cNvPr id="15" name="Shape 13"/>
           <p:cNvSpPr/>
           <p:nvPr/>
         </p:nvSpPr>
@@ -14386,14 +15590,14 @@
       </p:sp>
       <p:sp>
         <p:nvSpPr>
-          <p:cNvPr id="15" name="Text 13"/>
+          <p:cNvPr id="16" name="Text 14"/>
           <p:cNvSpPr/>
           <p:nvPr/>
         </p:nvSpPr>
         <p:spPr>
           <a:xfrm>
             <a:off x="8074152" y="3666744"/>
-            <a:ext cx="2825496" cy="201168"/>
+            <a:ext cx="2825496" cy="256032"/>
           </a:xfrm>
           <a:prstGeom prst="rect">
             <a:avLst/>
@@ -14409,7 +15613,7 @@
               <a:buNone/>
             </a:pPr>
             <a:r>
-              <a:rPr lang="en-US" sz="950" b="1" dirty="0">
+              <a:rPr lang="en-US" sz="1300" b="1" dirty="0">
                 <a:solidFill>
                   <a:srgbClr val="0068B7"/>
                 </a:solidFill>
@@ -14419,20 +15623,20 @@
               </a:rPr>
               <a:t>Use this for</a:t>
             </a:r>
-            <a:endParaRPr lang="en-US" sz="950" dirty="0"/>
-          </a:p>
-        </p:txBody>
-      </p:sp>
-      <p:sp>
-        <p:nvSpPr>
-          <p:cNvPr id="16" name="Text 14"/>
-          <p:cNvSpPr/>
-          <p:nvPr/>
-        </p:nvSpPr>
-        <p:spPr>
-          <a:xfrm>
-            <a:off x="8074152" y="3959352"/>
-            <a:ext cx="2825496" cy="1170432"/>
+            <a:endParaRPr lang="en-US" sz="1300" dirty="0"/>
+          </a:p>
+        </p:txBody>
+      </p:sp>
+      <p:sp>
+        <p:nvSpPr>
+          <p:cNvPr id="17" name="Text 15"/>
+          <p:cNvSpPr/>
+          <p:nvPr/>
+        </p:nvSpPr>
+        <p:spPr>
+          <a:xfrm>
+            <a:off x="8074152" y="4023360"/>
+            <a:ext cx="2825496" cy="1097280"/>
           </a:xfrm>
           <a:prstGeom prst="rect">
             <a:avLst/>
@@ -14450,7 +15654,7 @@
               <a:buNone/>
             </a:pPr>
             <a:r>
-              <a:rPr lang="en-US" sz="1250" dirty="0">
+              <a:rPr lang="en-US" sz="1550" dirty="0">
                 <a:solidFill>
                   <a:srgbClr val="17364A"/>
                 </a:solidFill>
@@ -14460,7 +15664,7 @@
               </a:rPr>
               <a:t>Connect the concept to public health decisions, safeguards, documentation, or implementation work.</a:t>
             </a:r>
-            <a:endParaRPr lang="en-US" sz="1250" dirty="0"/>
+            <a:endParaRPr lang="en-US" sz="1550" dirty="0"/>
           </a:p>
         </p:txBody>
       </p:sp>
@@ -14657,7 +15861,7 @@
                 <a:ea typeface="Aptos" pitchFamily="34" charset="-122"/>
                 <a:cs typeface="Aptos" pitchFamily="34" charset="-120"/>
               </a:rPr>
-              <a:t>© Paula Soper</a:t>
+              <a:t>Â© Paula Soper</a:t>
             </a:r>
             <a:endParaRPr lang="en-US" sz="800" dirty="0"/>
           </a:p>
@@ -14665,7 +15869,46 @@
       </p:sp>
       <p:sp>
         <p:nvSpPr>
-          <p:cNvPr id="7" name="Shape 5"/>
+          <p:cNvPr id="7" name="Text 5"/>
+          <p:cNvSpPr/>
+          <p:nvPr/>
+        </p:nvSpPr>
+        <p:spPr>
+          <a:xfrm>
+            <a:off x="11137392" y="6510528"/>
+            <a:ext cx="411480" cy="201168"/>
+          </a:xfrm>
+          <a:prstGeom prst="rect">
+            <a:avLst/>
+          </a:prstGeom>
+          <a:noFill/>
+          <a:ln/>
+        </p:spPr>
+        <p:txBody>
+          <a:bodyPr wrap="square" lIns="0" tIns="0" rIns="0" bIns="0" rtlCol="0" anchor="ctr"/>
+          <a:lstStyle/>
+          <a:p>
+            <a:pPr algn="r" indent="0" marL="0">
+              <a:buNone/>
+            </a:pPr>
+            <a:r>
+              <a:rPr lang="en-US" sz="900" dirty="0">
+                <a:solidFill>
+                  <a:srgbClr val="5F7181"/>
+                </a:solidFill>
+                <a:latin typeface="Aptos" pitchFamily="34" charset="0"/>
+                <a:ea typeface="Aptos" pitchFamily="34" charset="-122"/>
+                <a:cs typeface="Aptos" pitchFamily="34" charset="-120"/>
+              </a:rPr>
+              <a:t>8</a:t>
+            </a:r>
+            <a:endParaRPr lang="en-US" sz="900" dirty="0"/>
+          </a:p>
+        </p:txBody>
+      </p:sp>
+      <p:sp>
+        <p:nvSpPr>
+          <p:cNvPr id="8" name="Shape 6"/>
           <p:cNvSpPr/>
           <p:nvPr/>
         </p:nvSpPr>
@@ -14690,7 +15933,7 @@
       </p:sp>
       <p:sp>
         <p:nvSpPr>
-          <p:cNvPr id="8" name="Text 6"/>
+          <p:cNvPr id="9" name="Text 7"/>
           <p:cNvSpPr/>
           <p:nvPr/>
         </p:nvSpPr>
@@ -14729,14 +15972,14 @@
       </p:sp>
       <p:sp>
         <p:nvSpPr>
-          <p:cNvPr id="9" name="Text 7"/>
+          <p:cNvPr id="10" name="Text 8"/>
           <p:cNvSpPr/>
           <p:nvPr/>
         </p:nvSpPr>
         <p:spPr>
           <a:xfrm>
             <a:off x="640080" y="621792"/>
-            <a:ext cx="10881360" cy="566928"/>
+            <a:ext cx="10881360" cy="713232"/>
           </a:xfrm>
           <a:prstGeom prst="rect">
             <a:avLst/>
@@ -14754,7 +15997,7 @@
               <a:buNone/>
             </a:pPr>
             <a:r>
-              <a:rPr lang="en-US" sz="2700" b="1" dirty="0">
+              <a:rPr lang="en-US" sz="3400" b="1" dirty="0">
                 <a:solidFill>
                   <a:srgbClr val="003A63"/>
                 </a:solidFill>
@@ -14764,20 +16007,20 @@
               </a:rPr>
               <a:t>Why This Topic Matters for Public Health AI</a:t>
             </a:r>
-            <a:endParaRPr lang="en-US" sz="2700" dirty="0"/>
-          </a:p>
-        </p:txBody>
-      </p:sp>
-      <p:sp>
-        <p:nvSpPr>
-          <p:cNvPr id="10" name="Text 8"/>
-          <p:cNvSpPr/>
-          <p:nvPr/>
-        </p:nvSpPr>
-        <p:spPr>
-          <a:xfrm>
-            <a:off x="868680" y="1417320"/>
-            <a:ext cx="6675120" cy="4434840"/>
+            <a:endParaRPr lang="en-US" sz="3400" dirty="0"/>
+          </a:p>
+        </p:txBody>
+      </p:sp>
+      <p:sp>
+        <p:nvSpPr>
+          <p:cNvPr id="11" name="Text 9"/>
+          <p:cNvSpPr/>
+          <p:nvPr/>
+        </p:nvSpPr>
+        <p:spPr>
+          <a:xfrm>
+            <a:off x="868680" y="1508760"/>
+            <a:ext cx="6537960" cy="4160520"/>
           </a:xfrm>
           <a:prstGeom prst="rect">
             <a:avLst/>
@@ -14792,7 +16035,7 @@
           <a:lstStyle/>
           <a:p>
             <a:r>
-              <a:rPr lang="en-US" sz="1700" dirty="0">
+              <a:rPr lang="en-US" sz="2100" dirty="0">
                 <a:solidFill>
                   <a:srgbClr val="17364A"/>
                 </a:solidFill>
@@ -14800,13 +16043,13 @@
                 <a:ea typeface="Aptos" pitchFamily="34" charset="-122"/>
                 <a:cs typeface="Aptos" pitchFamily="34" charset="-120"/>
               </a:rPr>
-              <a:t>eCR matters for AI because it brings structured, timely, clinically relevant information into public health workflows.</a:t>
-            </a:r>
-            <a:endParaRPr lang="en-US" sz="1700" dirty="0"/>
-          </a:p>
-          <a:p>
-            <a:r>
-              <a:rPr lang="en-US" sz="1700" dirty="0">
+              <a:t>eCR matters for AI because it brings structured, timely, clinically relevant information into public.</a:t>
+            </a:r>
+            <a:endParaRPr lang="en-US" sz="2100" dirty="0"/>
+          </a:p>
+          <a:p>
+            <a:r>
+              <a:rPr lang="en-US" sz="2100" dirty="0">
                 <a:solidFill>
                   <a:srgbClr val="17364A"/>
                 </a:solidFill>
@@ -14816,11 +16059,11 @@
               </a:rPr>
               <a:t>It can reduce manual reporting burden and improve the speed of public health awareness.</a:t>
             </a:r>
-            <a:endParaRPr lang="en-US" sz="1700" dirty="0"/>
-          </a:p>
-          <a:p>
-            <a:r>
-              <a:rPr lang="en-US" sz="1700" dirty="0">
+            <a:endParaRPr lang="en-US" sz="2100" dirty="0"/>
+          </a:p>
+          <a:p>
+            <a:r>
+              <a:rPr lang="en-US" sz="2100" dirty="0">
                 <a:solidFill>
                   <a:srgbClr val="17364A"/>
                 </a:solidFill>
@@ -14830,27 +16073,13 @@
               </a:rPr>
               <a:t>However, eCR is not simply a data feed.</a:t>
             </a:r>
-            <a:endParaRPr lang="en-US" sz="1700" dirty="0"/>
-          </a:p>
-          <a:p>
-            <a:r>
-              <a:rPr lang="en-US" sz="1700" dirty="0">
-                <a:solidFill>
-                  <a:srgbClr val="17364A"/>
-                </a:solidFill>
-                <a:latin typeface="Aptos" pitchFamily="34" charset="0"/>
-                <a:ea typeface="Aptos" pitchFamily="34" charset="-122"/>
-                <a:cs typeface="Aptos" pitchFamily="34" charset="-120"/>
-              </a:rPr>
-              <a:t>It includes trigger logic, routing, standards, jurisdictional rules, provider workflows, public health system intake, and.</a:t>
-            </a:r>
-            <a:endParaRPr lang="en-US" sz="1700" dirty="0"/>
-          </a:p>
-        </p:txBody>
-      </p:sp>
-      <p:sp>
-        <p:nvSpPr>
-          <p:cNvPr id="11" name="Shape 9"/>
+            <a:endParaRPr lang="en-US" sz="2100" dirty="0"/>
+          </a:p>
+        </p:txBody>
+      </p:sp>
+      <p:sp>
+        <p:nvSpPr>
+          <p:cNvPr id="12" name="Shape 10"/>
           <p:cNvSpPr/>
           <p:nvPr/>
         </p:nvSpPr>
@@ -14877,14 +16106,14 @@
       </p:sp>
       <p:sp>
         <p:nvSpPr>
-          <p:cNvPr id="12" name="Text 10"/>
+          <p:cNvPr id="13" name="Text 11"/>
           <p:cNvSpPr/>
           <p:nvPr/>
         </p:nvSpPr>
         <p:spPr>
           <a:xfrm>
             <a:off x="8074152" y="1563624"/>
-            <a:ext cx="2825496" cy="201168"/>
+            <a:ext cx="2825496" cy="256032"/>
           </a:xfrm>
           <a:prstGeom prst="rect">
             <a:avLst/>
@@ -14900,7 +16129,7 @@
               <a:buNone/>
             </a:pPr>
             <a:r>
-              <a:rPr lang="en-US" sz="950" b="1" dirty="0">
+              <a:rPr lang="en-US" sz="1300" b="1" dirty="0">
                 <a:solidFill>
                   <a:srgbClr val="0068B7"/>
                 </a:solidFill>
@@ -14910,20 +16139,20 @@
               </a:rPr>
               <a:t>Key idea</a:t>
             </a:r>
-            <a:endParaRPr lang="en-US" sz="950" dirty="0"/>
-          </a:p>
-        </p:txBody>
-      </p:sp>
-      <p:sp>
-        <p:nvSpPr>
-          <p:cNvPr id="13" name="Text 11"/>
-          <p:cNvSpPr/>
-          <p:nvPr/>
-        </p:nvSpPr>
-        <p:spPr>
-          <a:xfrm>
-            <a:off x="8074152" y="1856232"/>
-            <a:ext cx="2825496" cy="1261872"/>
+            <a:endParaRPr lang="en-US" sz="1300" dirty="0"/>
+          </a:p>
+        </p:txBody>
+      </p:sp>
+      <p:sp>
+        <p:nvSpPr>
+          <p:cNvPr id="14" name="Text 12"/>
+          <p:cNvSpPr/>
+          <p:nvPr/>
+        </p:nvSpPr>
+        <p:spPr>
+          <a:xfrm>
+            <a:off x="8074152" y="1920240"/>
+            <a:ext cx="2825496" cy="1188720"/>
           </a:xfrm>
           <a:prstGeom prst="rect">
             <a:avLst/>
@@ -14941,7 +16170,7 @@
               <a:buNone/>
             </a:pPr>
             <a:r>
-              <a:rPr lang="en-US" sz="1250" dirty="0">
+              <a:rPr lang="en-US" sz="1550" dirty="0">
                 <a:solidFill>
                   <a:srgbClr val="17364A"/>
                 </a:solidFill>
@@ -14949,15 +16178,15 @@
                 <a:ea typeface="Aptos" pitchFamily="34" charset="-122"/>
                 <a:cs typeface="Aptos" pitchFamily="34" charset="-120"/>
               </a:rPr>
-              <a:t>eCR matters for AI because it brings structured, timely, clinically relevant information into public health workflows.</a:t>
-            </a:r>
-            <a:endParaRPr lang="en-US" sz="1250" dirty="0"/>
-          </a:p>
-        </p:txBody>
-      </p:sp>
-      <p:sp>
-        <p:nvSpPr>
-          <p:cNvPr id="14" name="Shape 12"/>
+              <a:t>eCR matters for AI because it brings structured, timely, clinically relevant information into public.</a:t>
+            </a:r>
+            <a:endParaRPr lang="en-US" sz="1550" dirty="0"/>
+          </a:p>
+        </p:txBody>
+      </p:sp>
+      <p:sp>
+        <p:nvSpPr>
+          <p:cNvPr id="15" name="Shape 13"/>
           <p:cNvSpPr/>
           <p:nvPr/>
         </p:nvSpPr>
@@ -14984,14 +16213,14 @@
       </p:sp>
       <p:sp>
         <p:nvSpPr>
-          <p:cNvPr id="15" name="Text 13"/>
+          <p:cNvPr id="16" name="Text 14"/>
           <p:cNvSpPr/>
           <p:nvPr/>
         </p:nvSpPr>
         <p:spPr>
           <a:xfrm>
             <a:off x="8074152" y="3666744"/>
-            <a:ext cx="2825496" cy="201168"/>
+            <a:ext cx="2825496" cy="256032"/>
           </a:xfrm>
           <a:prstGeom prst="rect">
             <a:avLst/>
@@ -15007,7 +16236,7 @@
               <a:buNone/>
             </a:pPr>
             <a:r>
-              <a:rPr lang="en-US" sz="950" b="1" dirty="0">
+              <a:rPr lang="en-US" sz="1300" b="1" dirty="0">
                 <a:solidFill>
                   <a:srgbClr val="0068B7"/>
                 </a:solidFill>
@@ -15017,20 +16246,20 @@
               </a:rPr>
               <a:t>Use this for</a:t>
             </a:r>
-            <a:endParaRPr lang="en-US" sz="950" dirty="0"/>
-          </a:p>
-        </p:txBody>
-      </p:sp>
-      <p:sp>
-        <p:nvSpPr>
-          <p:cNvPr id="16" name="Text 14"/>
-          <p:cNvSpPr/>
-          <p:nvPr/>
-        </p:nvSpPr>
-        <p:spPr>
-          <a:xfrm>
-            <a:off x="8074152" y="3959352"/>
-            <a:ext cx="2825496" cy="1170432"/>
+            <a:endParaRPr lang="en-US" sz="1300" dirty="0"/>
+          </a:p>
+        </p:txBody>
+      </p:sp>
+      <p:sp>
+        <p:nvSpPr>
+          <p:cNvPr id="17" name="Text 15"/>
+          <p:cNvSpPr/>
+          <p:nvPr/>
+        </p:nvSpPr>
+        <p:spPr>
+          <a:xfrm>
+            <a:off x="8074152" y="4023360"/>
+            <a:ext cx="2825496" cy="1097280"/>
           </a:xfrm>
           <a:prstGeom prst="rect">
             <a:avLst/>
@@ -15048,7 +16277,7 @@
               <a:buNone/>
             </a:pPr>
             <a:r>
-              <a:rPr lang="en-US" sz="1250" dirty="0">
+              <a:rPr lang="en-US" sz="1550" dirty="0">
                 <a:solidFill>
                   <a:srgbClr val="17364A"/>
                 </a:solidFill>
@@ -15058,7 +16287,7 @@
               </a:rPr>
               <a:t>Connect the concept to public health decisions, safeguards, documentation, or implementation work.</a:t>
             </a:r>
-            <a:endParaRPr lang="en-US" sz="1250" dirty="0"/>
+            <a:endParaRPr lang="en-US" sz="1550" dirty="0"/>
           </a:p>
         </p:txBody>
       </p:sp>
@@ -15255,7 +16484,7 @@
                 <a:ea typeface="Aptos" pitchFamily="34" charset="-122"/>
                 <a:cs typeface="Aptos" pitchFamily="34" charset="-120"/>
               </a:rPr>
-              <a:t>© Paula Soper</a:t>
+              <a:t>Â© Paula Soper</a:t>
             </a:r>
             <a:endParaRPr lang="en-US" sz="800" dirty="0"/>
           </a:p>
@@ -15263,7 +16492,46 @@
       </p:sp>
       <p:sp>
         <p:nvSpPr>
-          <p:cNvPr id="7" name="Shape 5"/>
+          <p:cNvPr id="7" name="Text 5"/>
+          <p:cNvSpPr/>
+          <p:nvPr/>
+        </p:nvSpPr>
+        <p:spPr>
+          <a:xfrm>
+            <a:off x="11137392" y="6510528"/>
+            <a:ext cx="411480" cy="201168"/>
+          </a:xfrm>
+          <a:prstGeom prst="rect">
+            <a:avLst/>
+          </a:prstGeom>
+          <a:noFill/>
+          <a:ln/>
+        </p:spPr>
+        <p:txBody>
+          <a:bodyPr wrap="square" lIns="0" tIns="0" rIns="0" bIns="0" rtlCol="0" anchor="ctr"/>
+          <a:lstStyle/>
+          <a:p>
+            <a:pPr algn="r" indent="0" marL="0">
+              <a:buNone/>
+            </a:pPr>
+            <a:r>
+              <a:rPr lang="en-US" sz="900" dirty="0">
+                <a:solidFill>
+                  <a:srgbClr val="5F7181"/>
+                </a:solidFill>
+                <a:latin typeface="Aptos" pitchFamily="34" charset="0"/>
+                <a:ea typeface="Aptos" pitchFamily="34" charset="-122"/>
+                <a:cs typeface="Aptos" pitchFamily="34" charset="-120"/>
+              </a:rPr>
+              <a:t>9</a:t>
+            </a:r>
+            <a:endParaRPr lang="en-US" sz="900" dirty="0"/>
+          </a:p>
+        </p:txBody>
+      </p:sp>
+      <p:sp>
+        <p:nvSpPr>
+          <p:cNvPr id="8" name="Shape 6"/>
           <p:cNvSpPr/>
           <p:nvPr/>
         </p:nvSpPr>
@@ -15288,7 +16556,7 @@
       </p:sp>
       <p:sp>
         <p:nvSpPr>
-          <p:cNvPr id="8" name="Text 6"/>
+          <p:cNvPr id="9" name="Text 7"/>
           <p:cNvSpPr/>
           <p:nvPr/>
         </p:nvSpPr>
@@ -15327,14 +16595,14 @@
       </p:sp>
       <p:sp>
         <p:nvSpPr>
-          <p:cNvPr id="9" name="Text 7"/>
+          <p:cNvPr id="10" name="Text 8"/>
           <p:cNvSpPr/>
           <p:nvPr/>
         </p:nvSpPr>
         <p:spPr>
           <a:xfrm>
             <a:off x="640080" y="621792"/>
-            <a:ext cx="10881360" cy="566928"/>
+            <a:ext cx="10881360" cy="713232"/>
           </a:xfrm>
           <a:prstGeom prst="rect">
             <a:avLst/>
@@ -15352,7 +16620,7 @@
               <a:buNone/>
             </a:pPr>
             <a:r>
-              <a:rPr lang="en-US" sz="2700" b="1" dirty="0">
+              <a:rPr lang="en-US" sz="3400" b="1" dirty="0">
                 <a:solidFill>
                   <a:srgbClr val="003A63"/>
                 </a:solidFill>
@@ -15362,20 +16630,20 @@
               </a:rPr>
               <a:t>Core Concepts</a:t>
             </a:r>
-            <a:endParaRPr lang="en-US" sz="2700" dirty="0"/>
-          </a:p>
-        </p:txBody>
-      </p:sp>
-      <p:sp>
-        <p:nvSpPr>
-          <p:cNvPr id="10" name="Text 8"/>
-          <p:cNvSpPr/>
-          <p:nvPr/>
-        </p:nvSpPr>
-        <p:spPr>
-          <a:xfrm>
-            <a:off x="868680" y="1417320"/>
-            <a:ext cx="6675120" cy="4434840"/>
+            <a:endParaRPr lang="en-US" sz="3400" dirty="0"/>
+          </a:p>
+        </p:txBody>
+      </p:sp>
+      <p:sp>
+        <p:nvSpPr>
+          <p:cNvPr id="11" name="Text 9"/>
+          <p:cNvSpPr/>
+          <p:nvPr/>
+        </p:nvSpPr>
+        <p:spPr>
+          <a:xfrm>
+            <a:off x="868680" y="1508760"/>
+            <a:ext cx="6537960" cy="4160520"/>
           </a:xfrm>
           <a:prstGeom prst="rect">
             <a:avLst/>
@@ -15390,7 +16658,7 @@
           <a:lstStyle/>
           <a:p>
             <a:r>
-              <a:rPr lang="en-US" sz="1700" dirty="0">
+              <a:rPr lang="en-US" sz="2100" dirty="0">
                 <a:solidFill>
                   <a:srgbClr val="17364A"/>
                 </a:solidFill>
@@ -15400,11 +16668,11 @@
               </a:rPr>
               <a:t>Electronic case reporting.</a:t>
             </a:r>
-            <a:endParaRPr lang="en-US" sz="1700" dirty="0"/>
-          </a:p>
-          <a:p>
-            <a:r>
-              <a:rPr lang="en-US" sz="1700" dirty="0">
+            <a:endParaRPr lang="en-US" sz="2100" dirty="0"/>
+          </a:p>
+          <a:p>
+            <a:r>
+              <a:rPr lang="en-US" sz="2100" dirty="0">
                 <a:solidFill>
                   <a:srgbClr val="17364A"/>
                 </a:solidFill>
@@ -15412,13 +16680,13 @@
                 <a:ea typeface="Aptos" pitchFamily="34" charset="-122"/>
                 <a:cs typeface="Aptos" pitchFamily="34" charset="-120"/>
               </a:rPr>
-              <a:t>Electronic case reporting is the automated exchange of case report information from healthcare to public health.</a:t>
-            </a:r>
-            <a:endParaRPr lang="en-US" sz="1700" dirty="0"/>
-          </a:p>
-          <a:p>
-            <a:r>
-              <a:rPr lang="en-US" sz="1700" dirty="0">
+              <a:t>Electronic case reporting is the automated exchange of case report information from healthcare to.</a:t>
+            </a:r>
+            <a:endParaRPr lang="en-US" sz="2100" dirty="0"/>
+          </a:p>
+          <a:p>
+            <a:r>
+              <a:rPr lang="en-US" sz="2100" dirty="0">
                 <a:solidFill>
                   <a:srgbClr val="17364A"/>
                 </a:solidFill>
@@ -15428,27 +16696,13 @@
               </a:rPr>
               <a:t>It is designed to improve timeliness, completeness, and consistency in reportable condition workflows.</a:t>
             </a:r>
-            <a:endParaRPr lang="en-US" sz="1700" dirty="0"/>
-          </a:p>
-          <a:p>
-            <a:r>
-              <a:rPr lang="en-US" sz="1700" dirty="0">
-                <a:solidFill>
-                  <a:srgbClr val="17364A"/>
-                </a:solidFill>
-                <a:latin typeface="Aptos" pitchFamily="34" charset="0"/>
-                <a:ea typeface="Aptos" pitchFamily="34" charset="-122"/>
-                <a:cs typeface="Aptos" pitchFamily="34" charset="-120"/>
-              </a:rPr>
-              <a:t>eICR.</a:t>
-            </a:r>
-            <a:endParaRPr lang="en-US" sz="1700" dirty="0"/>
-          </a:p>
-        </p:txBody>
-      </p:sp>
-      <p:sp>
-        <p:nvSpPr>
-          <p:cNvPr id="11" name="Shape 9"/>
+            <a:endParaRPr lang="en-US" sz="2100" dirty="0"/>
+          </a:p>
+        </p:txBody>
+      </p:sp>
+      <p:sp>
+        <p:nvSpPr>
+          <p:cNvPr id="12" name="Shape 10"/>
           <p:cNvSpPr/>
           <p:nvPr/>
         </p:nvSpPr>
@@ -15475,14 +16729,14 @@
       </p:sp>
       <p:sp>
         <p:nvSpPr>
-          <p:cNvPr id="12" name="Text 10"/>
+          <p:cNvPr id="13" name="Text 11"/>
           <p:cNvSpPr/>
           <p:nvPr/>
         </p:nvSpPr>
         <p:spPr>
           <a:xfrm>
             <a:off x="8074152" y="1563624"/>
-            <a:ext cx="2825496" cy="201168"/>
+            <a:ext cx="2825496" cy="256032"/>
           </a:xfrm>
           <a:prstGeom prst="rect">
             <a:avLst/>
@@ -15498,7 +16752,7 @@
               <a:buNone/>
             </a:pPr>
             <a:r>
-              <a:rPr lang="en-US" sz="950" b="1" dirty="0">
+              <a:rPr lang="en-US" sz="1300" b="1" dirty="0">
                 <a:solidFill>
                   <a:srgbClr val="0068B7"/>
                 </a:solidFill>
@@ -15508,20 +16762,20 @@
               </a:rPr>
               <a:t>Key idea</a:t>
             </a:r>
-            <a:endParaRPr lang="en-US" sz="950" dirty="0"/>
-          </a:p>
-        </p:txBody>
-      </p:sp>
-      <p:sp>
-        <p:nvSpPr>
-          <p:cNvPr id="13" name="Text 11"/>
-          <p:cNvSpPr/>
-          <p:nvPr/>
-        </p:nvSpPr>
-        <p:spPr>
-          <a:xfrm>
-            <a:off x="8074152" y="1856232"/>
-            <a:ext cx="2825496" cy="1261872"/>
+            <a:endParaRPr lang="en-US" sz="1300" dirty="0"/>
+          </a:p>
+        </p:txBody>
+      </p:sp>
+      <p:sp>
+        <p:nvSpPr>
+          <p:cNvPr id="14" name="Text 12"/>
+          <p:cNvSpPr/>
+          <p:nvPr/>
+        </p:nvSpPr>
+        <p:spPr>
+          <a:xfrm>
+            <a:off x="8074152" y="1920240"/>
+            <a:ext cx="2825496" cy="1188720"/>
           </a:xfrm>
           <a:prstGeom prst="rect">
             <a:avLst/>
@@ -15539,7 +16793,7 @@
               <a:buNone/>
             </a:pPr>
             <a:r>
-              <a:rPr lang="en-US" sz="1250" dirty="0">
+              <a:rPr lang="en-US" sz="1550" dirty="0">
                 <a:solidFill>
                   <a:srgbClr val="17364A"/>
                 </a:solidFill>
@@ -15549,13 +16803,13 @@
               </a:rPr>
               <a:t>Electronic case reporting.</a:t>
             </a:r>
-            <a:endParaRPr lang="en-US" sz="1250" dirty="0"/>
-          </a:p>
-        </p:txBody>
-      </p:sp>
-      <p:sp>
-        <p:nvSpPr>
-          <p:cNvPr id="14" name="Shape 12"/>
+            <a:endParaRPr lang="en-US" sz="1550" dirty="0"/>
+          </a:p>
+        </p:txBody>
+      </p:sp>
+      <p:sp>
+        <p:nvSpPr>
+          <p:cNvPr id="15" name="Shape 13"/>
           <p:cNvSpPr/>
           <p:nvPr/>
         </p:nvSpPr>
@@ -15582,14 +16836,14 @@
       </p:sp>
       <p:sp>
         <p:nvSpPr>
-          <p:cNvPr id="15" name="Text 13"/>
+          <p:cNvPr id="16" name="Text 14"/>
           <p:cNvSpPr/>
           <p:nvPr/>
         </p:nvSpPr>
         <p:spPr>
           <a:xfrm>
             <a:off x="8074152" y="3666744"/>
-            <a:ext cx="2825496" cy="201168"/>
+            <a:ext cx="2825496" cy="256032"/>
           </a:xfrm>
           <a:prstGeom prst="rect">
             <a:avLst/>
@@ -15605,7 +16859,7 @@
               <a:buNone/>
             </a:pPr>
             <a:r>
-              <a:rPr lang="en-US" sz="950" b="1" dirty="0">
+              <a:rPr lang="en-US" sz="1300" b="1" dirty="0">
                 <a:solidFill>
                   <a:srgbClr val="0068B7"/>
                 </a:solidFill>
@@ -15615,20 +16869,20 @@
               </a:rPr>
               <a:t>Use this for</a:t>
             </a:r>
-            <a:endParaRPr lang="en-US" sz="950" dirty="0"/>
-          </a:p>
-        </p:txBody>
-      </p:sp>
-      <p:sp>
-        <p:nvSpPr>
-          <p:cNvPr id="16" name="Text 14"/>
-          <p:cNvSpPr/>
-          <p:nvPr/>
-        </p:nvSpPr>
-        <p:spPr>
-          <a:xfrm>
-            <a:off x="8074152" y="3959352"/>
-            <a:ext cx="2825496" cy="1170432"/>
+            <a:endParaRPr lang="en-US" sz="1300" dirty="0"/>
+          </a:p>
+        </p:txBody>
+      </p:sp>
+      <p:sp>
+        <p:nvSpPr>
+          <p:cNvPr id="17" name="Text 15"/>
+          <p:cNvSpPr/>
+          <p:nvPr/>
+        </p:nvSpPr>
+        <p:spPr>
+          <a:xfrm>
+            <a:off x="8074152" y="4023360"/>
+            <a:ext cx="2825496" cy="1097280"/>
           </a:xfrm>
           <a:prstGeom prst="rect">
             <a:avLst/>
@@ -15646,7 +16900,7 @@
               <a:buNone/>
             </a:pPr>
             <a:r>
-              <a:rPr lang="en-US" sz="1250" dirty="0">
+              <a:rPr lang="en-US" sz="1550" dirty="0">
                 <a:solidFill>
                   <a:srgbClr val="17364A"/>
                 </a:solidFill>
@@ -15656,7 +16910,7 @@
               </a:rPr>
               <a:t>Connect the concept to public health decisions, safeguards, documentation, or implementation work.</a:t>
             </a:r>
-            <a:endParaRPr lang="en-US" sz="1250" dirty="0"/>
+            <a:endParaRPr lang="en-US" sz="1550" dirty="0"/>
           </a:p>
         </p:txBody>
       </p:sp>
